--- a/docs/SVD e PCA per l'analisi di immagini mediche.pptx
+++ b/docs/SVD e PCA per l'analisi di immagini mediche.pptx
@@ -134,7 +134,7 @@
 <file path=ppt/revisionInfo.xml><?xml version="1.0" encoding="utf-8"?>
 <p1510:revInfo xmlns:a="http://schemas.openxmlformats.org/drawingml/2006/main" xmlns:r="http://schemas.openxmlformats.org/officeDocument/2006/relationships" xmlns:p1510="http://schemas.microsoft.com/office/powerpoint/2015/10/main">
   <p1510:revLst>
-    <p1510:client id="{F7ADC412-93B0-4647-AF16-AAD7E9940F4D}" v="92" dt="2026-04-13T15:58:11.240"/>
+    <p1510:client id="{F7ADC412-93B0-4647-AF16-AAD7E9940F4D}" v="159" dt="2026-04-14T10:03:28.090"/>
   </p1510:revLst>
 </p1510:revInfo>
 </file>
@@ -144,41 +144,145 @@
   <pc:docChgLst>
     <pc:chgData name="PATRUNO ANDREA" userId="434c2d3d-d760-4baf-8981-191d7218719d" providerId="ADAL" clId="{D49931E2-CE7A-4E79-93FA-3282CEFD0145}"/>
     <pc:docChg chg="undo redo custSel addSld delSld modSld sldOrd">
-      <pc:chgData name="PATRUNO ANDREA" userId="434c2d3d-d760-4baf-8981-191d7218719d" providerId="ADAL" clId="{D49931E2-CE7A-4E79-93FA-3282CEFD0145}" dt="2026-04-13T16:07:59.998" v="1423" actId="478"/>
+      <pc:chgData name="PATRUNO ANDREA" userId="434c2d3d-d760-4baf-8981-191d7218719d" providerId="ADAL" clId="{D49931E2-CE7A-4E79-93FA-3282CEFD0145}" dt="2026-04-14T10:04:37.815" v="2193" actId="1076"/>
       <pc:docMkLst>
         <pc:docMk/>
       </pc:docMkLst>
-      <pc:sldChg chg="modSp mod">
-        <pc:chgData name="PATRUNO ANDREA" userId="434c2d3d-d760-4baf-8981-191d7218719d" providerId="ADAL" clId="{D49931E2-CE7A-4E79-93FA-3282CEFD0145}" dt="2026-04-12T10:22:37.564" v="1" actId="20577"/>
+      <pc:sldChg chg="addSp delSp modSp mod">
+        <pc:chgData name="PATRUNO ANDREA" userId="434c2d3d-d760-4baf-8981-191d7218719d" providerId="ADAL" clId="{D49931E2-CE7A-4E79-93FA-3282CEFD0145}" dt="2026-04-14T08:34:06.087" v="1475" actId="20577"/>
         <pc:sldMkLst>
           <pc:docMk/>
           <pc:sldMk cId="0" sldId="256"/>
         </pc:sldMkLst>
         <pc:spChg chg="mod">
-          <ac:chgData name="PATRUNO ANDREA" userId="434c2d3d-d760-4baf-8981-191d7218719d" providerId="ADAL" clId="{D49931E2-CE7A-4E79-93FA-3282CEFD0145}" dt="2026-04-12T10:22:35.332" v="0" actId="14100"/>
+          <ac:chgData name="PATRUNO ANDREA" userId="434c2d3d-d760-4baf-8981-191d7218719d" providerId="ADAL" clId="{D49931E2-CE7A-4E79-93FA-3282CEFD0145}" dt="2026-04-14T08:27:38.613" v="1424" actId="338"/>
+          <ac:spMkLst>
+            <pc:docMk/>
+            <pc:sldMk cId="0" sldId="256"/>
+            <ac:spMk id="3" creationId="{00000000-0000-0000-0000-000000000000}"/>
+          </ac:spMkLst>
+        </pc:spChg>
+        <pc:spChg chg="del mod">
+          <ac:chgData name="PATRUNO ANDREA" userId="434c2d3d-d760-4baf-8981-191d7218719d" providerId="ADAL" clId="{D49931E2-CE7A-4E79-93FA-3282CEFD0145}" dt="2026-04-14T08:33:54.104" v="1458" actId="478"/>
           <ac:spMkLst>
             <pc:docMk/>
             <pc:sldMk cId="0" sldId="256"/>
             <ac:spMk id="4" creationId="{00000000-0000-0000-0000-000000000000}"/>
           </ac:spMkLst>
         </pc:spChg>
+        <pc:spChg chg="del mod">
+          <ac:chgData name="PATRUNO ANDREA" userId="434c2d3d-d760-4baf-8981-191d7218719d" providerId="ADAL" clId="{D49931E2-CE7A-4E79-93FA-3282CEFD0145}" dt="2026-04-14T08:33:54.104" v="1458" actId="478"/>
+          <ac:spMkLst>
+            <pc:docMk/>
+            <pc:sldMk cId="0" sldId="256"/>
+            <ac:spMk id="5" creationId="{00000000-0000-0000-0000-000000000000}"/>
+          </ac:spMkLst>
+        </pc:spChg>
         <pc:spChg chg="mod">
-          <ac:chgData name="PATRUNO ANDREA" userId="434c2d3d-d760-4baf-8981-191d7218719d" providerId="ADAL" clId="{D49931E2-CE7A-4E79-93FA-3282CEFD0145}" dt="2026-04-12T10:22:37.564" v="1" actId="20577"/>
+          <ac:chgData name="PATRUNO ANDREA" userId="434c2d3d-d760-4baf-8981-191d7218719d" providerId="ADAL" clId="{D49931E2-CE7A-4E79-93FA-3282CEFD0145}" dt="2026-04-14T08:34:06.087" v="1475" actId="20577"/>
+          <ac:spMkLst>
+            <pc:docMk/>
+            <pc:sldMk cId="0" sldId="256"/>
+            <ac:spMk id="6" creationId="{00000000-0000-0000-0000-000000000000}"/>
+          </ac:spMkLst>
+        </pc:spChg>
+        <pc:spChg chg="mod">
+          <ac:chgData name="PATRUNO ANDREA" userId="434c2d3d-d760-4baf-8981-191d7218719d" providerId="ADAL" clId="{D49931E2-CE7A-4E79-93FA-3282CEFD0145}" dt="2026-04-14T08:27:38.613" v="1424" actId="338"/>
+          <ac:spMkLst>
+            <pc:docMk/>
+            <pc:sldMk cId="0" sldId="256"/>
+            <ac:spMk id="7" creationId="{00000000-0000-0000-0000-000000000000}"/>
+          </ac:spMkLst>
+        </pc:spChg>
+        <pc:spChg chg="mod">
+          <ac:chgData name="PATRUNO ANDREA" userId="434c2d3d-d760-4baf-8981-191d7218719d" providerId="ADAL" clId="{D49931E2-CE7A-4E79-93FA-3282CEFD0145}" dt="2026-04-14T08:31:46.615" v="1438" actId="14100"/>
+          <ac:spMkLst>
+            <pc:docMk/>
+            <pc:sldMk cId="0" sldId="256"/>
+            <ac:spMk id="8" creationId="{735C6579-BFD9-8E92-4914-725EEDA60B3D}"/>
+          </ac:spMkLst>
+        </pc:spChg>
+        <pc:spChg chg="mod">
+          <ac:chgData name="PATRUNO ANDREA" userId="434c2d3d-d760-4baf-8981-191d7218719d" providerId="ADAL" clId="{D49931E2-CE7A-4E79-93FA-3282CEFD0145}" dt="2026-04-14T08:27:38.613" v="1424" actId="338"/>
+          <ac:spMkLst>
+            <pc:docMk/>
+            <pc:sldMk cId="0" sldId="256"/>
+            <ac:spMk id="12" creationId="{00000000-0000-0000-0000-000000000000}"/>
+          </ac:spMkLst>
+        </pc:spChg>
+        <pc:spChg chg="mod">
+          <ac:chgData name="PATRUNO ANDREA" userId="434c2d3d-d760-4baf-8981-191d7218719d" providerId="ADAL" clId="{D49931E2-CE7A-4E79-93FA-3282CEFD0145}" dt="2026-04-14T08:27:38.613" v="1424" actId="338"/>
           <ac:spMkLst>
             <pc:docMk/>
             <pc:sldMk cId="0" sldId="256"/>
             <ac:spMk id="13" creationId="{00000000-0000-0000-0000-000000000000}"/>
           </ac:spMkLst>
         </pc:spChg>
+        <pc:spChg chg="mod">
+          <ac:chgData name="PATRUNO ANDREA" userId="434c2d3d-d760-4baf-8981-191d7218719d" providerId="ADAL" clId="{D49931E2-CE7A-4E79-93FA-3282CEFD0145}" dt="2026-04-14T08:27:38.613" v="1424" actId="338"/>
+          <ac:spMkLst>
+            <pc:docMk/>
+            <pc:sldMk cId="0" sldId="256"/>
+            <ac:spMk id="15" creationId="{00000000-0000-0000-0000-000000000000}"/>
+          </ac:spMkLst>
+        </pc:spChg>
+        <pc:spChg chg="mod">
+          <ac:chgData name="PATRUNO ANDREA" userId="434c2d3d-d760-4baf-8981-191d7218719d" providerId="ADAL" clId="{D49931E2-CE7A-4E79-93FA-3282CEFD0145}" dt="2026-04-14T08:27:38.613" v="1424" actId="338"/>
+          <ac:spMkLst>
+            <pc:docMk/>
+            <pc:sldMk cId="0" sldId="256"/>
+            <ac:spMk id="21" creationId="{42C903A0-549B-41CD-68A2-BCD537033D52}"/>
+          </ac:spMkLst>
+        </pc:spChg>
+        <pc:grpChg chg="del mod">
+          <ac:chgData name="PATRUNO ANDREA" userId="434c2d3d-d760-4baf-8981-191d7218719d" providerId="ADAL" clId="{D49931E2-CE7A-4E79-93FA-3282CEFD0145}" dt="2026-04-14T08:31:47.583" v="1439" actId="478"/>
+          <ac:grpSpMkLst>
+            <pc:docMk/>
+            <pc:sldMk cId="0" sldId="256"/>
+            <ac:grpSpMk id="2" creationId="{C2569AAD-390F-1421-6E26-E09754C0DD47}"/>
+          </ac:grpSpMkLst>
+        </pc:grpChg>
+        <pc:picChg chg="add del mod">
+          <ac:chgData name="PATRUNO ANDREA" userId="434c2d3d-d760-4baf-8981-191d7218719d" providerId="ADAL" clId="{D49931E2-CE7A-4E79-93FA-3282CEFD0145}" dt="2026-04-14T08:28:43.650" v="1427" actId="478"/>
+          <ac:picMkLst>
+            <pc:docMk/>
+            <pc:sldMk cId="0" sldId="256"/>
+            <ac:picMk id="10" creationId="{EBA8AFF1-463D-A65E-D8A6-7B608ABF133C}"/>
+          </ac:picMkLst>
+        </pc:picChg>
+        <pc:picChg chg="add mod">
+          <ac:chgData name="PATRUNO ANDREA" userId="434c2d3d-d760-4baf-8981-191d7218719d" providerId="ADAL" clId="{D49931E2-CE7A-4E79-93FA-3282CEFD0145}" dt="2026-04-14T08:33:12.061" v="1446" actId="34807"/>
+          <ac:picMkLst>
+            <pc:docMk/>
+            <pc:sldMk cId="0" sldId="256"/>
+            <ac:picMk id="16" creationId="{C0F8BD52-01F8-965A-3310-531DE91C3412}"/>
+          </ac:picMkLst>
+        </pc:picChg>
+        <pc:picChg chg="mod">
+          <ac:chgData name="PATRUNO ANDREA" userId="434c2d3d-d760-4baf-8981-191d7218719d" providerId="ADAL" clId="{D49931E2-CE7A-4E79-93FA-3282CEFD0145}" dt="2026-04-14T08:32:45.423" v="1445" actId="34807"/>
+          <ac:picMkLst>
+            <pc:docMk/>
+            <pc:sldMk cId="0" sldId="256"/>
+            <ac:picMk id="25" creationId="{3A04ECB1-7679-695D-F40A-F00131D65DA1}"/>
+          </ac:picMkLst>
+        </pc:picChg>
+        <pc:picChg chg="mod">
+          <ac:chgData name="PATRUNO ANDREA" userId="434c2d3d-d760-4baf-8981-191d7218719d" providerId="ADAL" clId="{D49931E2-CE7A-4E79-93FA-3282CEFD0145}" dt="2026-04-14T08:31:46.615" v="1438" actId="14100"/>
+          <ac:picMkLst>
+            <pc:docMk/>
+            <pc:sldMk cId="0" sldId="256"/>
+            <ac:picMk id="1029" creationId="{3DEBCD12-9B7E-5F1F-64BB-0F1C078FC2BE}"/>
+          </ac:picMkLst>
+        </pc:picChg>
       </pc:sldChg>
       <pc:sldChg chg="addSp delSp modSp mod">
-        <pc:chgData name="PATRUNO ANDREA" userId="434c2d3d-d760-4baf-8981-191d7218719d" providerId="ADAL" clId="{D49931E2-CE7A-4E79-93FA-3282CEFD0145}" dt="2026-04-13T16:07:59.998" v="1423" actId="478"/>
+        <pc:chgData name="PATRUNO ANDREA" userId="434c2d3d-d760-4baf-8981-191d7218719d" providerId="ADAL" clId="{D49931E2-CE7A-4E79-93FA-3282CEFD0145}" dt="2026-04-14T08:49:04.967" v="1605"/>
         <pc:sldMkLst>
           <pc:docMk/>
           <pc:sldMk cId="0" sldId="257"/>
         </pc:sldMkLst>
         <pc:spChg chg="mod">
-          <ac:chgData name="PATRUNO ANDREA" userId="434c2d3d-d760-4baf-8981-191d7218719d" providerId="ADAL" clId="{D49931E2-CE7A-4E79-93FA-3282CEFD0145}" dt="2026-04-13T08:14:26.475" v="58" actId="20577"/>
+          <ac:chgData name="PATRUNO ANDREA" userId="434c2d3d-d760-4baf-8981-191d7218719d" providerId="ADAL" clId="{D49931E2-CE7A-4E79-93FA-3282CEFD0145}" dt="2026-04-14T08:48:50.934" v="1603"/>
           <ac:spMkLst>
             <pc:docMk/>
             <pc:sldMk cId="0" sldId="257"/>
@@ -297,8 +401,8 @@
             <ac:spMk id="39" creationId="{BE01E4B4-7C3D-675A-E6C8-AD20AC7B11BF}"/>
           </ac:spMkLst>
         </pc:spChg>
-        <pc:spChg chg="add mod">
-          <ac:chgData name="PATRUNO ANDREA" userId="434c2d3d-d760-4baf-8981-191d7218719d" providerId="ADAL" clId="{D49931E2-CE7A-4E79-93FA-3282CEFD0145}" dt="2026-04-13T08:17:41.129" v="86" actId="1076"/>
+        <pc:spChg chg="add del mod">
+          <ac:chgData name="PATRUNO ANDREA" userId="434c2d3d-d760-4baf-8981-191d7218719d" providerId="ADAL" clId="{D49931E2-CE7A-4E79-93FA-3282CEFD0145}" dt="2026-04-14T08:49:04.967" v="1605"/>
           <ac:spMkLst>
             <pc:docMk/>
             <pc:sldMk cId="0" sldId="257"/>
@@ -306,7 +410,7 @@
           </ac:spMkLst>
         </pc:spChg>
         <pc:picChg chg="add mod">
-          <ac:chgData name="PATRUNO ANDREA" userId="434c2d3d-d760-4baf-8981-191d7218719d" providerId="ADAL" clId="{D49931E2-CE7A-4E79-93FA-3282CEFD0145}" dt="2026-04-13T08:16:10.042" v="64" actId="1076"/>
+          <ac:chgData name="PATRUNO ANDREA" userId="434c2d3d-d760-4baf-8981-191d7218719d" providerId="ADAL" clId="{D49931E2-CE7A-4E79-93FA-3282CEFD0145}" dt="2026-04-14T08:48:20.857" v="1590" actId="1076"/>
           <ac:picMkLst>
             <pc:docMk/>
             <pc:sldMk cId="0" sldId="257"/>
@@ -315,7 +419,7 @@
         </pc:picChg>
       </pc:sldChg>
       <pc:sldChg chg="addSp delSp modSp mod">
-        <pc:chgData name="PATRUNO ANDREA" userId="434c2d3d-d760-4baf-8981-191d7218719d" providerId="ADAL" clId="{D49931E2-CE7A-4E79-93FA-3282CEFD0145}" dt="2026-04-13T15:58:34.492" v="1413" actId="478"/>
+        <pc:chgData name="PATRUNO ANDREA" userId="434c2d3d-d760-4baf-8981-191d7218719d" providerId="ADAL" clId="{D49931E2-CE7A-4E79-93FA-3282CEFD0145}" dt="2026-04-14T09:18:01.041" v="1802" actId="1076"/>
         <pc:sldMkLst>
           <pc:docMk/>
           <pc:sldMk cId="0" sldId="258"/>
@@ -328,6 +432,102 @@
             <ac:spMk id="5" creationId="{00000000-0000-0000-0000-000000000000}"/>
           </ac:spMkLst>
         </pc:spChg>
+        <pc:spChg chg="add mod">
+          <ac:chgData name="PATRUNO ANDREA" userId="434c2d3d-d760-4baf-8981-191d7218719d" providerId="ADAL" clId="{D49931E2-CE7A-4E79-93FA-3282CEFD0145}" dt="2026-04-14T09:13:59.687" v="1755" actId="1076"/>
+          <ac:spMkLst>
+            <pc:docMk/>
+            <pc:sldMk cId="0" sldId="258"/>
+            <ac:spMk id="5" creationId="{0B36CE44-39E2-7ECF-48BF-23569CE45FAD}"/>
+          </ac:spMkLst>
+        </pc:spChg>
+        <pc:spChg chg="add del mod">
+          <ac:chgData name="PATRUNO ANDREA" userId="434c2d3d-d760-4baf-8981-191d7218719d" providerId="ADAL" clId="{D49931E2-CE7A-4E79-93FA-3282CEFD0145}" dt="2026-04-14T09:10:46.666" v="1703" actId="21"/>
+          <ac:spMkLst>
+            <pc:docMk/>
+            <pc:sldMk cId="0" sldId="258"/>
+            <ac:spMk id="6" creationId="{00000000-0000-0000-0000-000000000000}"/>
+          </ac:spMkLst>
+        </pc:spChg>
+        <pc:spChg chg="del mod">
+          <ac:chgData name="PATRUNO ANDREA" userId="434c2d3d-d760-4baf-8981-191d7218719d" providerId="ADAL" clId="{D49931E2-CE7A-4E79-93FA-3282CEFD0145}" dt="2026-04-14T09:10:46.666" v="1703" actId="21"/>
+          <ac:spMkLst>
+            <pc:docMk/>
+            <pc:sldMk cId="0" sldId="258"/>
+            <ac:spMk id="7" creationId="{00000000-0000-0000-0000-000000000000}"/>
+          </ac:spMkLst>
+        </pc:spChg>
+        <pc:spChg chg="del mod">
+          <ac:chgData name="PATRUNO ANDREA" userId="434c2d3d-d760-4baf-8981-191d7218719d" providerId="ADAL" clId="{D49931E2-CE7A-4E79-93FA-3282CEFD0145}" dt="2026-04-14T09:10:46.666" v="1703" actId="21"/>
+          <ac:spMkLst>
+            <pc:docMk/>
+            <pc:sldMk cId="0" sldId="258"/>
+            <ac:spMk id="8" creationId="{00000000-0000-0000-0000-000000000000}"/>
+          </ac:spMkLst>
+        </pc:spChg>
+        <pc:spChg chg="del mod">
+          <ac:chgData name="PATRUNO ANDREA" userId="434c2d3d-d760-4baf-8981-191d7218719d" providerId="ADAL" clId="{D49931E2-CE7A-4E79-93FA-3282CEFD0145}" dt="2026-04-14T09:10:46.666" v="1703" actId="21"/>
+          <ac:spMkLst>
+            <pc:docMk/>
+            <pc:sldMk cId="0" sldId="258"/>
+            <ac:spMk id="9" creationId="{00000000-0000-0000-0000-000000000000}"/>
+          </ac:spMkLst>
+        </pc:spChg>
+        <pc:spChg chg="add mod">
+          <ac:chgData name="PATRUNO ANDREA" userId="434c2d3d-d760-4baf-8981-191d7218719d" providerId="ADAL" clId="{D49931E2-CE7A-4E79-93FA-3282CEFD0145}" dt="2026-04-14T09:16:09.241" v="1773" actId="1076"/>
+          <ac:spMkLst>
+            <pc:docMk/>
+            <pc:sldMk cId="0" sldId="258"/>
+            <ac:spMk id="10" creationId="{F3F7F29F-5085-C0C3-D062-20552E9FA42D}"/>
+          </ac:spMkLst>
+        </pc:spChg>
+        <pc:spChg chg="mod">
+          <ac:chgData name="PATRUNO ANDREA" userId="434c2d3d-d760-4baf-8981-191d7218719d" providerId="ADAL" clId="{D49931E2-CE7A-4E79-93FA-3282CEFD0145}" dt="2026-04-14T09:08:44.370" v="1665" actId="1076"/>
+          <ac:spMkLst>
+            <pc:docMk/>
+            <pc:sldMk cId="0" sldId="258"/>
+            <ac:spMk id="11" creationId="{00000000-0000-0000-0000-000000000000}"/>
+          </ac:spMkLst>
+        </pc:spChg>
+        <pc:spChg chg="mod">
+          <ac:chgData name="PATRUNO ANDREA" userId="434c2d3d-d760-4baf-8981-191d7218719d" providerId="ADAL" clId="{D49931E2-CE7A-4E79-93FA-3282CEFD0145}" dt="2026-04-14T09:08:34.251" v="1663" actId="1076"/>
+          <ac:spMkLst>
+            <pc:docMk/>
+            <pc:sldMk cId="0" sldId="258"/>
+            <ac:spMk id="12" creationId="{00000000-0000-0000-0000-000000000000}"/>
+          </ac:spMkLst>
+        </pc:spChg>
+        <pc:spChg chg="mod">
+          <ac:chgData name="PATRUNO ANDREA" userId="434c2d3d-d760-4baf-8981-191d7218719d" providerId="ADAL" clId="{D49931E2-CE7A-4E79-93FA-3282CEFD0145}" dt="2026-04-14T09:17:10.306" v="1788" actId="1076"/>
+          <ac:spMkLst>
+            <pc:docMk/>
+            <pc:sldMk cId="0" sldId="258"/>
+            <ac:spMk id="13" creationId="{00000000-0000-0000-0000-000000000000}"/>
+          </ac:spMkLst>
+        </pc:spChg>
+        <pc:spChg chg="mod">
+          <ac:chgData name="PATRUNO ANDREA" userId="434c2d3d-d760-4baf-8981-191d7218719d" providerId="ADAL" clId="{D49931E2-CE7A-4E79-93FA-3282CEFD0145}" dt="2026-04-14T09:17:12.552" v="1789" actId="20577"/>
+          <ac:spMkLst>
+            <pc:docMk/>
+            <pc:sldMk cId="0" sldId="258"/>
+            <ac:spMk id="14" creationId="{00000000-0000-0000-0000-000000000000}"/>
+          </ac:spMkLst>
+        </pc:spChg>
+        <pc:spChg chg="mod">
+          <ac:chgData name="PATRUNO ANDREA" userId="434c2d3d-d760-4baf-8981-191d7218719d" providerId="ADAL" clId="{D49931E2-CE7A-4E79-93FA-3282CEFD0145}" dt="2026-04-14T09:13:59.687" v="1755" actId="1076"/>
+          <ac:spMkLst>
+            <pc:docMk/>
+            <pc:sldMk cId="0" sldId="258"/>
+            <ac:spMk id="15" creationId="{00000000-0000-0000-0000-000000000000}"/>
+          </ac:spMkLst>
+        </pc:spChg>
+        <pc:spChg chg="add mod">
+          <ac:chgData name="PATRUNO ANDREA" userId="434c2d3d-d760-4baf-8981-191d7218719d" providerId="ADAL" clId="{D49931E2-CE7A-4E79-93FA-3282CEFD0145}" dt="2026-04-14T09:16:10.480" v="1774" actId="20577"/>
+          <ac:spMkLst>
+            <pc:docMk/>
+            <pc:sldMk cId="0" sldId="258"/>
+            <ac:spMk id="16" creationId="{E1C09EEF-1157-51C0-C4B1-91715498ADDF}"/>
+          </ac:spMkLst>
+        </pc:spChg>
         <pc:spChg chg="add del">
           <ac:chgData name="PATRUNO ANDREA" userId="434c2d3d-d760-4baf-8981-191d7218719d" providerId="ADAL" clId="{D49931E2-CE7A-4E79-93FA-3282CEFD0145}" dt="2026-04-13T08:24:08.596" v="149" actId="22"/>
           <ac:spMkLst>
@@ -336,33 +536,281 @@
             <ac:spMk id="16" creationId="{F0F1FF01-D38B-286E-4ABD-907600B68464}"/>
           </ac:spMkLst>
         </pc:spChg>
+        <pc:spChg chg="mod">
+          <ac:chgData name="PATRUNO ANDREA" userId="434c2d3d-d760-4baf-8981-191d7218719d" providerId="ADAL" clId="{D49931E2-CE7A-4E79-93FA-3282CEFD0145}" dt="2026-04-14T09:09:06.730" v="1671" actId="1076"/>
+          <ac:spMkLst>
+            <pc:docMk/>
+            <pc:sldMk cId="0" sldId="258"/>
+            <ac:spMk id="17" creationId="{00000000-0000-0000-0000-000000000000}"/>
+          </ac:spMkLst>
+        </pc:spChg>
+        <pc:spChg chg="mod">
+          <ac:chgData name="PATRUNO ANDREA" userId="434c2d3d-d760-4baf-8981-191d7218719d" providerId="ADAL" clId="{D49931E2-CE7A-4E79-93FA-3282CEFD0145}" dt="2026-04-14T09:13:49.504" v="1753" actId="1076"/>
+          <ac:spMkLst>
+            <pc:docMk/>
+            <pc:sldMk cId="0" sldId="258"/>
+            <ac:spMk id="18" creationId="{00000000-0000-0000-0000-000000000000}"/>
+          </ac:spMkLst>
+        </pc:spChg>
+        <pc:spChg chg="mod">
+          <ac:chgData name="PATRUNO ANDREA" userId="434c2d3d-d760-4baf-8981-191d7218719d" providerId="ADAL" clId="{D49931E2-CE7A-4E79-93FA-3282CEFD0145}" dt="2026-04-14T09:13:59.687" v="1755" actId="1076"/>
+          <ac:spMkLst>
+            <pc:docMk/>
+            <pc:sldMk cId="0" sldId="258"/>
+            <ac:spMk id="19" creationId="{00000000-0000-0000-0000-000000000000}"/>
+          </ac:spMkLst>
+        </pc:spChg>
+        <pc:spChg chg="mod">
+          <ac:chgData name="PATRUNO ANDREA" userId="434c2d3d-d760-4baf-8981-191d7218719d" providerId="ADAL" clId="{D49931E2-CE7A-4E79-93FA-3282CEFD0145}" dt="2026-04-14T09:17:14.216" v="1790" actId="20577"/>
+          <ac:spMkLst>
+            <pc:docMk/>
+            <pc:sldMk cId="0" sldId="258"/>
+            <ac:spMk id="20" creationId="{00000000-0000-0000-0000-000000000000}"/>
+          </ac:spMkLst>
+        </pc:spChg>
+        <pc:spChg chg="mod">
+          <ac:chgData name="PATRUNO ANDREA" userId="434c2d3d-d760-4baf-8981-191d7218719d" providerId="ADAL" clId="{D49931E2-CE7A-4E79-93FA-3282CEFD0145}" dt="2026-04-14T09:09:02.968" v="1670" actId="1076"/>
+          <ac:spMkLst>
+            <pc:docMk/>
+            <pc:sldMk cId="0" sldId="258"/>
+            <ac:spMk id="21" creationId="{00000000-0000-0000-0000-000000000000}"/>
+          </ac:spMkLst>
+        </pc:spChg>
         <pc:spChg chg="add mod">
-          <ac:chgData name="PATRUNO ANDREA" userId="434c2d3d-d760-4baf-8981-191d7218719d" providerId="ADAL" clId="{D49931E2-CE7A-4E79-93FA-3282CEFD0145}" dt="2026-04-13T15:58:11.240" v="1410"/>
+          <ac:chgData name="PATRUNO ANDREA" userId="434c2d3d-d760-4baf-8981-191d7218719d" providerId="ADAL" clId="{D49931E2-CE7A-4E79-93FA-3282CEFD0145}" dt="2026-04-14T09:10:52.160" v="1704" actId="1076"/>
+          <ac:spMkLst>
+            <pc:docMk/>
+            <pc:sldMk cId="0" sldId="258"/>
+            <ac:spMk id="22" creationId="{CC5488AA-3E9E-48FE-0E8D-7949FCB2F955}"/>
+          </ac:spMkLst>
+        </pc:spChg>
+        <pc:spChg chg="add mod">
+          <ac:chgData name="PATRUNO ANDREA" userId="434c2d3d-d760-4baf-8981-191d7218719d" providerId="ADAL" clId="{D49931E2-CE7A-4E79-93FA-3282CEFD0145}" dt="2026-04-14T08:49:43.109" v="1608" actId="1076"/>
           <ac:spMkLst>
             <pc:docMk/>
             <pc:sldMk cId="0" sldId="258"/>
             <ac:spMk id="24" creationId="{DF6454D3-D0F3-FB4E-E0AA-4D0529EBBBE4}"/>
           </ac:spMkLst>
         </pc:spChg>
+        <pc:spChg chg="add mod">
+          <ac:chgData name="PATRUNO ANDREA" userId="434c2d3d-d760-4baf-8981-191d7218719d" providerId="ADAL" clId="{D49931E2-CE7A-4E79-93FA-3282CEFD0145}" dt="2026-04-14T09:11:08.492" v="1711" actId="1076"/>
+          <ac:spMkLst>
+            <pc:docMk/>
+            <pc:sldMk cId="0" sldId="258"/>
+            <ac:spMk id="25" creationId="{1FA43306-5854-3FDC-DC40-64CE2F4EF2FE}"/>
+          </ac:spMkLst>
+        </pc:spChg>
+        <pc:spChg chg="add mod">
+          <ac:chgData name="PATRUNO ANDREA" userId="434c2d3d-d760-4baf-8981-191d7218719d" providerId="ADAL" clId="{D49931E2-CE7A-4E79-93FA-3282CEFD0145}" dt="2026-04-14T09:10:52.160" v="1704" actId="1076"/>
+          <ac:spMkLst>
+            <pc:docMk/>
+            <pc:sldMk cId="0" sldId="258"/>
+            <ac:spMk id="27" creationId="{6D0704E0-3FAC-03DC-9D7A-01DBAF2A4806}"/>
+          </ac:spMkLst>
+        </pc:spChg>
         <pc:spChg chg="mod">
-          <ac:chgData name="PATRUNO ANDREA" userId="434c2d3d-d760-4baf-8981-191d7218719d" providerId="ADAL" clId="{D49931E2-CE7A-4E79-93FA-3282CEFD0145}" dt="2026-04-13T08:20:29.970" v="120" actId="20577"/>
+          <ac:chgData name="PATRUNO ANDREA" userId="434c2d3d-d760-4baf-8981-191d7218719d" providerId="ADAL" clId="{D49931E2-CE7A-4E79-93FA-3282CEFD0145}" dt="2026-04-14T09:13:59.687" v="1755" actId="1076"/>
+          <ac:spMkLst>
+            <pc:docMk/>
+            <pc:sldMk cId="0" sldId="258"/>
+            <ac:spMk id="28" creationId="{00000000-0000-0000-0000-000000000000}"/>
+          </ac:spMkLst>
+        </pc:spChg>
+        <pc:spChg chg="add mod">
+          <ac:chgData name="PATRUNO ANDREA" userId="434c2d3d-d760-4baf-8981-191d7218719d" providerId="ADAL" clId="{D49931E2-CE7A-4E79-93FA-3282CEFD0145}" dt="2026-04-14T09:08:47.867" v="1666"/>
+          <ac:spMkLst>
+            <pc:docMk/>
+            <pc:sldMk cId="0" sldId="258"/>
+            <ac:spMk id="29" creationId="{69F4903D-9185-24ED-347B-0B72E120E38A}"/>
+          </ac:spMkLst>
+        </pc:spChg>
+        <pc:spChg chg="add mod">
+          <ac:chgData name="PATRUNO ANDREA" userId="434c2d3d-d760-4baf-8981-191d7218719d" providerId="ADAL" clId="{D49931E2-CE7A-4E79-93FA-3282CEFD0145}" dt="2026-04-14T09:08:47.867" v="1666"/>
+          <ac:spMkLst>
+            <pc:docMk/>
+            <pc:sldMk cId="0" sldId="258"/>
+            <ac:spMk id="30" creationId="{1E978BC4-872D-2D3D-D25C-3D0E6B63DC3C}"/>
+          </ac:spMkLst>
+        </pc:spChg>
+        <pc:spChg chg="add mod">
+          <ac:chgData name="PATRUNO ANDREA" userId="434c2d3d-d760-4baf-8981-191d7218719d" providerId="ADAL" clId="{D49931E2-CE7A-4E79-93FA-3282CEFD0145}" dt="2026-04-14T09:08:47.867" v="1666"/>
+          <ac:spMkLst>
+            <pc:docMk/>
+            <pc:sldMk cId="0" sldId="258"/>
+            <ac:spMk id="31" creationId="{0D93FB14-4C2B-7F8B-D901-E6D1332B647E}"/>
+          </ac:spMkLst>
+        </pc:spChg>
+        <pc:spChg chg="add mod">
+          <ac:chgData name="PATRUNO ANDREA" userId="434c2d3d-d760-4baf-8981-191d7218719d" providerId="ADAL" clId="{D49931E2-CE7A-4E79-93FA-3282CEFD0145}" dt="2026-04-14T09:08:47.867" v="1666"/>
+          <ac:spMkLst>
+            <pc:docMk/>
+            <pc:sldMk cId="0" sldId="258"/>
+            <ac:spMk id="32" creationId="{34EB40D4-B9D6-C6FB-64D5-5B5D396B7DD7}"/>
+          </ac:spMkLst>
+        </pc:spChg>
+        <pc:spChg chg="add mod">
+          <ac:chgData name="PATRUNO ANDREA" userId="434c2d3d-d760-4baf-8981-191d7218719d" providerId="ADAL" clId="{D49931E2-CE7A-4E79-93FA-3282CEFD0145}" dt="2026-04-14T09:08:47.867" v="1666"/>
+          <ac:spMkLst>
+            <pc:docMk/>
+            <pc:sldMk cId="0" sldId="258"/>
+            <ac:spMk id="33" creationId="{59E5999C-425B-9CE8-B5BF-A1E8AC68DC84}"/>
+          </ac:spMkLst>
+        </pc:spChg>
+        <pc:spChg chg="del mod">
+          <ac:chgData name="PATRUNO ANDREA" userId="434c2d3d-d760-4baf-8981-191d7218719d" providerId="ADAL" clId="{D49931E2-CE7A-4E79-93FA-3282CEFD0145}" dt="2026-04-14T09:10:46.666" v="1703" actId="21"/>
+          <ac:spMkLst>
+            <pc:docMk/>
+            <pc:sldMk cId="0" sldId="258"/>
+            <ac:spMk id="34" creationId="{A356B9A7-E817-A205-774E-1BBCE37F12A5}"/>
+          </ac:spMkLst>
+        </pc:spChg>
+        <pc:spChg chg="add mod">
+          <ac:chgData name="PATRUNO ANDREA" userId="434c2d3d-d760-4baf-8981-191d7218719d" providerId="ADAL" clId="{D49931E2-CE7A-4E79-93FA-3282CEFD0145}" dt="2026-04-14T09:08:47.867" v="1666"/>
+          <ac:spMkLst>
+            <pc:docMk/>
+            <pc:sldMk cId="0" sldId="258"/>
+            <ac:spMk id="35" creationId="{AC703B74-15F7-FB03-9B4B-1906E1C7A6F0}"/>
+          </ac:spMkLst>
+        </pc:spChg>
+        <pc:spChg chg="mod">
+          <ac:chgData name="PATRUNO ANDREA" userId="434c2d3d-d760-4baf-8981-191d7218719d" providerId="ADAL" clId="{D49931E2-CE7A-4E79-93FA-3282CEFD0145}" dt="2026-04-14T09:08:34.251" v="1663" actId="1076"/>
+          <ac:spMkLst>
+            <pc:docMk/>
+            <pc:sldMk cId="0" sldId="258"/>
+            <ac:spMk id="36" creationId="{60961725-D9AD-3387-4C49-2894430F26A9}"/>
+          </ac:spMkLst>
+        </pc:spChg>
+        <pc:spChg chg="add mod">
+          <ac:chgData name="PATRUNO ANDREA" userId="434c2d3d-d760-4baf-8981-191d7218719d" providerId="ADAL" clId="{D49931E2-CE7A-4E79-93FA-3282CEFD0145}" dt="2026-04-14T09:13:59.687" v="1755" actId="1076"/>
+          <ac:spMkLst>
+            <pc:docMk/>
+            <pc:sldMk cId="0" sldId="258"/>
+            <ac:spMk id="37" creationId="{639639AD-186D-5C18-6F39-3D16BB13ECE8}"/>
+          </ac:spMkLst>
+        </pc:spChg>
+        <pc:spChg chg="mod">
+          <ac:chgData name="PATRUNO ANDREA" userId="434c2d3d-d760-4baf-8981-191d7218719d" providerId="ADAL" clId="{D49931E2-CE7A-4E79-93FA-3282CEFD0145}" dt="2026-04-14T09:13:59.687" v="1755" actId="1076"/>
           <ac:spMkLst>
             <pc:docMk/>
             <pc:sldMk cId="0" sldId="258"/>
             <ac:spMk id="38" creationId="{A16E7144-B6A9-C7F4-B894-81441A97DAF5}"/>
           </ac:spMkLst>
         </pc:spChg>
-        <pc:picChg chg="add mod">
-          <ac:chgData name="PATRUNO ANDREA" userId="434c2d3d-d760-4baf-8981-191d7218719d" providerId="ADAL" clId="{D49931E2-CE7A-4E79-93FA-3282CEFD0145}" dt="2026-04-13T15:58:29.813" v="1411" actId="1076"/>
+        <pc:spChg chg="add mod">
+          <ac:chgData name="PATRUNO ANDREA" userId="434c2d3d-d760-4baf-8981-191d7218719d" providerId="ADAL" clId="{D49931E2-CE7A-4E79-93FA-3282CEFD0145}" dt="2026-04-14T09:10:56.263" v="1706" actId="1076"/>
+          <ac:spMkLst>
+            <pc:docMk/>
+            <pc:sldMk cId="0" sldId="258"/>
+            <ac:spMk id="39" creationId="{00000000-0000-0000-0000-000000000000}"/>
+          </ac:spMkLst>
+        </pc:spChg>
+        <pc:spChg chg="add mod">
+          <ac:chgData name="PATRUNO ANDREA" userId="434c2d3d-d760-4baf-8981-191d7218719d" providerId="ADAL" clId="{D49931E2-CE7A-4E79-93FA-3282CEFD0145}" dt="2026-04-14T09:10:56.263" v="1706" actId="1076"/>
+          <ac:spMkLst>
+            <pc:docMk/>
+            <pc:sldMk cId="0" sldId="258"/>
+            <ac:spMk id="40" creationId="{00000000-0000-0000-0000-000000000000}"/>
+          </ac:spMkLst>
+        </pc:spChg>
+        <pc:spChg chg="add mod">
+          <ac:chgData name="PATRUNO ANDREA" userId="434c2d3d-d760-4baf-8981-191d7218719d" providerId="ADAL" clId="{D49931E2-CE7A-4E79-93FA-3282CEFD0145}" dt="2026-04-14T09:16:51.347" v="1781" actId="20577"/>
+          <ac:spMkLst>
+            <pc:docMk/>
+            <pc:sldMk cId="0" sldId="258"/>
+            <ac:spMk id="41" creationId="{00000000-0000-0000-0000-000000000000}"/>
+          </ac:spMkLst>
+        </pc:spChg>
+        <pc:spChg chg="add mod">
+          <ac:chgData name="PATRUNO ANDREA" userId="434c2d3d-d760-4baf-8981-191d7218719d" providerId="ADAL" clId="{D49931E2-CE7A-4E79-93FA-3282CEFD0145}" dt="2026-04-14T09:10:56.263" v="1706" actId="1076"/>
+          <ac:spMkLst>
+            <pc:docMk/>
+            <pc:sldMk cId="0" sldId="258"/>
+            <ac:spMk id="42" creationId="{00000000-0000-0000-0000-000000000000}"/>
+          </ac:spMkLst>
+        </pc:spChg>
+        <pc:spChg chg="add mod">
+          <ac:chgData name="PATRUNO ANDREA" userId="434c2d3d-d760-4baf-8981-191d7218719d" providerId="ADAL" clId="{D49931E2-CE7A-4E79-93FA-3282CEFD0145}" dt="2026-04-14T09:13:59.687" v="1755" actId="1076"/>
+          <ac:spMkLst>
+            <pc:docMk/>
+            <pc:sldMk cId="0" sldId="258"/>
+            <ac:spMk id="43" creationId="{A356B9A7-E817-A205-774E-1BBCE37F12A5}"/>
+          </ac:spMkLst>
+        </pc:spChg>
+        <pc:spChg chg="add mod">
+          <ac:chgData name="PATRUNO ANDREA" userId="434c2d3d-d760-4baf-8981-191d7218719d" providerId="ADAL" clId="{D49931E2-CE7A-4E79-93FA-3282CEFD0145}" dt="2026-04-14T09:15:09.856" v="1761" actId="1076"/>
+          <ac:spMkLst>
+            <pc:docMk/>
+            <pc:sldMk cId="0" sldId="258"/>
+            <ac:spMk id="44" creationId="{EEE10183-B31D-6F61-4075-C84852F47774}"/>
+          </ac:spMkLst>
+        </pc:spChg>
+        <pc:graphicFrameChg chg="add mod">
+          <ac:chgData name="PATRUNO ANDREA" userId="434c2d3d-d760-4baf-8981-191d7218719d" providerId="ADAL" clId="{D49931E2-CE7A-4E79-93FA-3282CEFD0145}" dt="2026-04-14T09:14:55.204" v="1756"/>
+          <ac:graphicFrameMkLst>
+            <pc:docMk/>
+            <pc:sldMk cId="0" sldId="258"/>
+            <ac:graphicFrameMk id="45" creationId="{FD2A6319-DE12-F967-DC9D-BC9C9BB2223C}"/>
+          </ac:graphicFrameMkLst>
+        </pc:graphicFrameChg>
+        <pc:graphicFrameChg chg="add mod">
+          <ac:chgData name="PATRUNO ANDREA" userId="434c2d3d-d760-4baf-8981-191d7218719d" providerId="ADAL" clId="{D49931E2-CE7A-4E79-93FA-3282CEFD0145}" dt="2026-04-14T09:14:57.932" v="1759"/>
+          <ac:graphicFrameMkLst>
+            <pc:docMk/>
+            <pc:sldMk cId="0" sldId="258"/>
+            <ac:graphicFrameMk id="46" creationId="{47616794-8F5D-CB41-D966-6724F700AB51}"/>
+          </ac:graphicFrameMkLst>
+        </pc:graphicFrameChg>
+        <pc:picChg chg="add del mod">
+          <ac:chgData name="PATRUNO ANDREA" userId="434c2d3d-d760-4baf-8981-191d7218719d" providerId="ADAL" clId="{D49931E2-CE7A-4E79-93FA-3282CEFD0145}" dt="2026-04-14T09:13:52.406" v="1754" actId="478"/>
           <ac:picMkLst>
             <pc:docMk/>
             <pc:sldMk cId="0" sldId="258"/>
             <ac:picMk id="26" creationId="{CE1F1071-A53E-FDD3-DBE6-BB965429E0C7}"/>
           </ac:picMkLst>
         </pc:picChg>
+        <pc:picChg chg="add del mod">
+          <ac:chgData name="PATRUNO ANDREA" userId="434c2d3d-d760-4baf-8981-191d7218719d" providerId="ADAL" clId="{D49931E2-CE7A-4E79-93FA-3282CEFD0145}" dt="2026-04-14T09:16:27.954" v="1778" actId="207"/>
+          <ac:picMkLst>
+            <pc:docMk/>
+            <pc:sldMk cId="0" sldId="258"/>
+            <ac:picMk id="48" creationId="{B63065C7-5CF5-6BD2-2233-83164220D182}"/>
+          </ac:picMkLst>
+        </pc:picChg>
+        <pc:picChg chg="add mod">
+          <ac:chgData name="PATRUNO ANDREA" userId="434c2d3d-d760-4baf-8981-191d7218719d" providerId="ADAL" clId="{D49931E2-CE7A-4E79-93FA-3282CEFD0145}" dt="2026-04-14T09:16:39.006" v="1779" actId="931"/>
+          <ac:picMkLst>
+            <pc:docMk/>
+            <pc:sldMk cId="0" sldId="258"/>
+            <ac:picMk id="50" creationId="{B92C75AB-B92D-82BB-4036-08100D897C2A}"/>
+          </ac:picMkLst>
+        </pc:picChg>
+        <pc:picChg chg="add mod">
+          <ac:chgData name="PATRUNO ANDREA" userId="434c2d3d-d760-4baf-8981-191d7218719d" providerId="ADAL" clId="{D49931E2-CE7A-4E79-93FA-3282CEFD0145}" dt="2026-04-14T09:17:05.694" v="1786" actId="207"/>
+          <ac:picMkLst>
+            <pc:docMk/>
+            <pc:sldMk cId="0" sldId="258"/>
+            <ac:picMk id="52" creationId="{766A6417-DD39-A215-3998-DDB32AD04B51}"/>
+          </ac:picMkLst>
+        </pc:picChg>
+        <pc:picChg chg="add mod">
+          <ac:chgData name="PATRUNO ANDREA" userId="434c2d3d-d760-4baf-8981-191d7218719d" providerId="ADAL" clId="{D49931E2-CE7A-4E79-93FA-3282CEFD0145}" dt="2026-04-14T09:17:35.201" v="1796" actId="1076"/>
+          <ac:picMkLst>
+            <pc:docMk/>
+            <pc:sldMk cId="0" sldId="258"/>
+            <ac:picMk id="54" creationId="{C494954C-7CF7-CDCD-C828-29F09920E696}"/>
+          </ac:picMkLst>
+        </pc:picChg>
+        <pc:picChg chg="add mod">
+          <ac:chgData name="PATRUNO ANDREA" userId="434c2d3d-d760-4baf-8981-191d7218719d" providerId="ADAL" clId="{D49931E2-CE7A-4E79-93FA-3282CEFD0145}" dt="2026-04-14T09:18:01.041" v="1802" actId="1076"/>
+          <ac:picMkLst>
+            <pc:docMk/>
+            <pc:sldMk cId="0" sldId="258"/>
+            <ac:picMk id="56" creationId="{BF172172-20C7-5E00-8326-1042DFB5D79F}"/>
+          </ac:picMkLst>
+        </pc:picChg>
       </pc:sldChg>
       <pc:sldChg chg="delSp modSp mod">
-        <pc:chgData name="PATRUNO ANDREA" userId="434c2d3d-d760-4baf-8981-191d7218719d" providerId="ADAL" clId="{D49931E2-CE7A-4E79-93FA-3282CEFD0145}" dt="2026-04-13T15:59:22.058" v="1414" actId="478"/>
+        <pc:chgData name="PATRUNO ANDREA" userId="434c2d3d-d760-4baf-8981-191d7218719d" providerId="ADAL" clId="{D49931E2-CE7A-4E79-93FA-3282CEFD0145}" dt="2026-04-14T09:19:07.332" v="1914" actId="207"/>
         <pc:sldMkLst>
           <pc:docMk/>
           <pc:sldMk cId="0" sldId="259"/>
@@ -384,7 +832,31 @@
           </ac:spMkLst>
         </pc:spChg>
         <pc:spChg chg="mod">
-          <ac:chgData name="PATRUNO ANDREA" userId="434c2d3d-d760-4baf-8981-191d7218719d" providerId="ADAL" clId="{D49931E2-CE7A-4E79-93FA-3282CEFD0145}" dt="2026-04-13T15:35:13.325" v="1314" actId="1076"/>
+          <ac:chgData name="PATRUNO ANDREA" userId="434c2d3d-d760-4baf-8981-191d7218719d" providerId="ADAL" clId="{D49931E2-CE7A-4E79-93FA-3282CEFD0145}" dt="2026-04-14T09:18:33.079" v="1876" actId="20577"/>
+          <ac:spMkLst>
+            <pc:docMk/>
+            <pc:sldMk cId="0" sldId="259"/>
+            <ac:spMk id="13" creationId="{00000000-0000-0000-0000-000000000000}"/>
+          </ac:spMkLst>
+        </pc:spChg>
+        <pc:spChg chg="mod">
+          <ac:chgData name="PATRUNO ANDREA" userId="434c2d3d-d760-4baf-8981-191d7218719d" providerId="ADAL" clId="{D49931E2-CE7A-4E79-93FA-3282CEFD0145}" dt="2026-04-14T09:19:02.848" v="1912" actId="207"/>
+          <ac:spMkLst>
+            <pc:docMk/>
+            <pc:sldMk cId="0" sldId="259"/>
+            <ac:spMk id="14" creationId="{00000000-0000-0000-0000-000000000000}"/>
+          </ac:spMkLst>
+        </pc:spChg>
+        <pc:spChg chg="mod">
+          <ac:chgData name="PATRUNO ANDREA" userId="434c2d3d-d760-4baf-8981-191d7218719d" providerId="ADAL" clId="{D49931E2-CE7A-4E79-93FA-3282CEFD0145}" dt="2026-04-14T09:19:04.976" v="1913" actId="207"/>
+          <ac:spMkLst>
+            <pc:docMk/>
+            <pc:sldMk cId="0" sldId="259"/>
+            <ac:spMk id="19" creationId="{00000000-0000-0000-0000-000000000000}"/>
+          </ac:spMkLst>
+        </pc:spChg>
+        <pc:spChg chg="mod">
+          <ac:chgData name="PATRUNO ANDREA" userId="434c2d3d-d760-4baf-8981-191d7218719d" providerId="ADAL" clId="{D49931E2-CE7A-4E79-93FA-3282CEFD0145}" dt="2026-04-14T09:18:21.954" v="1829" actId="1076"/>
           <ac:spMkLst>
             <pc:docMk/>
             <pc:sldMk cId="0" sldId="259"/>
@@ -392,7 +864,23 @@
           </ac:spMkLst>
         </pc:spChg>
         <pc:spChg chg="mod">
-          <ac:chgData name="PATRUNO ANDREA" userId="434c2d3d-d760-4baf-8981-191d7218719d" providerId="ADAL" clId="{D49931E2-CE7A-4E79-93FA-3282CEFD0145}" dt="2026-04-13T08:27:04.461" v="215" actId="20577"/>
+          <ac:chgData name="PATRUNO ANDREA" userId="434c2d3d-d760-4baf-8981-191d7218719d" providerId="ADAL" clId="{D49931E2-CE7A-4E79-93FA-3282CEFD0145}" dt="2026-04-14T09:18:29.104" v="1859" actId="20577"/>
+          <ac:spMkLst>
+            <pc:docMk/>
+            <pc:sldMk cId="0" sldId="259"/>
+            <ac:spMk id="23" creationId="{00000000-0000-0000-0000-000000000000}"/>
+          </ac:spMkLst>
+        </pc:spChg>
+        <pc:spChg chg="mod">
+          <ac:chgData name="PATRUNO ANDREA" userId="434c2d3d-d760-4baf-8981-191d7218719d" providerId="ADAL" clId="{D49931E2-CE7A-4E79-93FA-3282CEFD0145}" dt="2026-04-14T09:19:07.332" v="1914" actId="207"/>
+          <ac:spMkLst>
+            <pc:docMk/>
+            <pc:sldMk cId="0" sldId="259"/>
+            <ac:spMk id="24" creationId="{00000000-0000-0000-0000-000000000000}"/>
+          </ac:spMkLst>
+        </pc:spChg>
+        <pc:spChg chg="mod">
+          <ac:chgData name="PATRUNO ANDREA" userId="434c2d3d-d760-4baf-8981-191d7218719d" providerId="ADAL" clId="{D49931E2-CE7A-4E79-93FA-3282CEFD0145}" dt="2026-04-14T09:19:01.008" v="1911" actId="207"/>
           <ac:spMkLst>
             <pc:docMk/>
             <pc:sldMk cId="0" sldId="259"/>
@@ -400,7 +888,15 @@
           </ac:spMkLst>
         </pc:spChg>
         <pc:spChg chg="mod">
-          <ac:chgData name="PATRUNO ANDREA" userId="434c2d3d-d760-4baf-8981-191d7218719d" providerId="ADAL" clId="{D49931E2-CE7A-4E79-93FA-3282CEFD0145}" dt="2026-04-13T08:22:07.978" v="139" actId="20577"/>
+          <ac:chgData name="PATRUNO ANDREA" userId="434c2d3d-d760-4baf-8981-191d7218719d" providerId="ADAL" clId="{D49931E2-CE7A-4E79-93FA-3282CEFD0145}" dt="2026-04-14T09:18:43.206" v="1906" actId="20577"/>
+          <ac:spMkLst>
+            <pc:docMk/>
+            <pc:sldMk cId="0" sldId="259"/>
+            <ac:spMk id="31" creationId="{00000000-0000-0000-0000-000000000000}"/>
+          </ac:spMkLst>
+        </pc:spChg>
+        <pc:spChg chg="mod">
+          <ac:chgData name="PATRUNO ANDREA" userId="434c2d3d-d760-4baf-8981-191d7218719d" providerId="ADAL" clId="{D49931E2-CE7A-4E79-93FA-3282CEFD0145}" dt="2026-04-14T09:18:56.431" v="1910" actId="207"/>
           <ac:spMkLst>
             <pc:docMk/>
             <pc:sldMk cId="0" sldId="259"/>
@@ -409,7 +905,7 @@
         </pc:spChg>
       </pc:sldChg>
       <pc:sldChg chg="addSp delSp modSp mod ord">
-        <pc:chgData name="PATRUNO ANDREA" userId="434c2d3d-d760-4baf-8981-191d7218719d" providerId="ADAL" clId="{D49931E2-CE7A-4E79-93FA-3282CEFD0145}" dt="2026-04-13T16:07:51.822" v="1422" actId="478"/>
+        <pc:chgData name="PATRUNO ANDREA" userId="434c2d3d-d760-4baf-8981-191d7218719d" providerId="ADAL" clId="{D49931E2-CE7A-4E79-93FA-3282CEFD0145}" dt="2026-04-14T09:37:50.416" v="2039" actId="20577"/>
         <pc:sldMkLst>
           <pc:docMk/>
           <pc:sldMk cId="0" sldId="260"/>
@@ -422,6 +918,14 @@
             <ac:spMk id="6" creationId="{00000000-0000-0000-0000-000000000000}"/>
           </ac:spMkLst>
         </pc:spChg>
+        <pc:spChg chg="mod">
+          <ac:chgData name="PATRUNO ANDREA" userId="434c2d3d-d760-4baf-8981-191d7218719d" providerId="ADAL" clId="{D49931E2-CE7A-4E79-93FA-3282CEFD0145}" dt="2026-04-14T09:37:50.416" v="2039" actId="20577"/>
+          <ac:spMkLst>
+            <pc:docMk/>
+            <pc:sldMk cId="0" sldId="260"/>
+            <ac:spMk id="8" creationId="{00000000-0000-0000-0000-000000000000}"/>
+          </ac:spMkLst>
+        </pc:spChg>
         <pc:spChg chg="add mod">
           <ac:chgData name="PATRUNO ANDREA" userId="434c2d3d-d760-4baf-8981-191d7218719d" providerId="ADAL" clId="{D49931E2-CE7A-4E79-93FA-3282CEFD0145}" dt="2026-04-13T08:29:47.250" v="218"/>
           <ac:spMkLst>
@@ -430,14 +934,30 @@
             <ac:spMk id="23" creationId="{FDF5BFD2-8BBC-EFAB-CEC4-3914D8BF6992}"/>
           </ac:spMkLst>
         </pc:spChg>
+        <pc:graphicFrameChg chg="modGraphic">
+          <ac:chgData name="PATRUNO ANDREA" userId="434c2d3d-d760-4baf-8981-191d7218719d" providerId="ADAL" clId="{D49931E2-CE7A-4E79-93FA-3282CEFD0145}" dt="2026-04-14T09:37:35.774" v="2033" actId="120"/>
+          <ac:graphicFrameMkLst>
+            <pc:docMk/>
+            <pc:sldMk cId="0" sldId="260"/>
+            <ac:graphicFrameMk id="20" creationId="{00000000-0000-0000-0000-000000000000}"/>
+          </ac:graphicFrameMkLst>
+        </pc:graphicFrameChg>
       </pc:sldChg>
       <pc:sldChg chg="addSp delSp modSp mod">
-        <pc:chgData name="PATRUNO ANDREA" userId="434c2d3d-d760-4baf-8981-191d7218719d" providerId="ADAL" clId="{D49931E2-CE7A-4E79-93FA-3282CEFD0145}" dt="2026-04-13T10:40:53.967" v="1271" actId="14100"/>
+        <pc:chgData name="PATRUNO ANDREA" userId="434c2d3d-d760-4baf-8981-191d7218719d" providerId="ADAL" clId="{D49931E2-CE7A-4E79-93FA-3282CEFD0145}" dt="2026-04-14T09:29:10.793" v="2014" actId="20577"/>
         <pc:sldMkLst>
           <pc:docMk/>
           <pc:sldMk cId="0" sldId="261"/>
         </pc:sldMkLst>
         <pc:spChg chg="del mod">
+          <ac:chgData name="PATRUNO ANDREA" userId="434c2d3d-d760-4baf-8981-191d7218719d" providerId="ADAL" clId="{D49931E2-CE7A-4E79-93FA-3282CEFD0145}" dt="2026-04-14T09:21:47.936" v="1938" actId="478"/>
+          <ac:spMkLst>
+            <pc:docMk/>
+            <pc:sldMk cId="0" sldId="261"/>
+            <ac:spMk id="5" creationId="{00000000-0000-0000-0000-000000000000}"/>
+          </ac:spMkLst>
+        </pc:spChg>
+        <pc:spChg chg="del mod">
           <ac:chgData name="PATRUNO ANDREA" userId="434c2d3d-d760-4baf-8981-191d7218719d" providerId="ADAL" clId="{D49931E2-CE7A-4E79-93FA-3282CEFD0145}" dt="2026-04-13T10:40:20.434" v="1262" actId="478"/>
           <ac:spMkLst>
             <pc:docMk/>
@@ -445,6 +965,14 @@
             <ac:spMk id="6" creationId="{00000000-0000-0000-0000-000000000000}"/>
           </ac:spMkLst>
         </pc:spChg>
+        <pc:spChg chg="add mod">
+          <ac:chgData name="PATRUNO ANDREA" userId="434c2d3d-d760-4baf-8981-191d7218719d" providerId="ADAL" clId="{D49931E2-CE7A-4E79-93FA-3282CEFD0145}" dt="2026-04-14T09:22:47.383" v="2008" actId="1076"/>
+          <ac:spMkLst>
+            <pc:docMk/>
+            <pc:sldMk cId="0" sldId="261"/>
+            <ac:spMk id="6" creationId="{B36C4914-5C96-3AB0-B406-657D3A6D8FD3}"/>
+          </ac:spMkLst>
+        </pc:spChg>
         <pc:spChg chg="del">
           <ac:chgData name="PATRUNO ANDREA" userId="434c2d3d-d760-4baf-8981-191d7218719d" providerId="ADAL" clId="{D49931E2-CE7A-4E79-93FA-3282CEFD0145}" dt="2026-04-13T10:39:38.091" v="1242" actId="478"/>
           <ac:spMkLst>
@@ -453,8 +981,16 @@
             <ac:spMk id="7" creationId="{00000000-0000-0000-0000-000000000000}"/>
           </ac:spMkLst>
         </pc:spChg>
+        <pc:spChg chg="add mod">
+          <ac:chgData name="PATRUNO ANDREA" userId="434c2d3d-d760-4baf-8981-191d7218719d" providerId="ADAL" clId="{D49931E2-CE7A-4E79-93FA-3282CEFD0145}" dt="2026-04-14T09:22:50.612" v="2009" actId="1076"/>
+          <ac:spMkLst>
+            <pc:docMk/>
+            <pc:sldMk cId="0" sldId="261"/>
+            <ac:spMk id="7" creationId="{66C18E67-C6F4-C57F-50EA-2CB591E5CF67}"/>
+          </ac:spMkLst>
+        </pc:spChg>
         <pc:spChg chg="mod">
-          <ac:chgData name="PATRUNO ANDREA" userId="434c2d3d-d760-4baf-8981-191d7218719d" providerId="ADAL" clId="{D49931E2-CE7A-4E79-93FA-3282CEFD0145}" dt="2026-04-13T10:40:24.960" v="1263" actId="1076"/>
+          <ac:chgData name="PATRUNO ANDREA" userId="434c2d3d-d760-4baf-8981-191d7218719d" providerId="ADAL" clId="{D49931E2-CE7A-4E79-93FA-3282CEFD0145}" dt="2026-04-14T09:23:06.965" v="2010" actId="1076"/>
           <ac:spMkLst>
             <pc:docMk/>
             <pc:sldMk cId="0" sldId="261"/>
@@ -462,7 +998,7 @@
           </ac:spMkLst>
         </pc:spChg>
         <pc:spChg chg="mod">
-          <ac:chgData name="PATRUNO ANDREA" userId="434c2d3d-d760-4baf-8981-191d7218719d" providerId="ADAL" clId="{D49931E2-CE7A-4E79-93FA-3282CEFD0145}" dt="2026-04-13T10:40:24.960" v="1263" actId="1076"/>
+          <ac:chgData name="PATRUNO ANDREA" userId="434c2d3d-d760-4baf-8981-191d7218719d" providerId="ADAL" clId="{D49931E2-CE7A-4E79-93FA-3282CEFD0145}" dt="2026-04-14T09:23:06.965" v="2010" actId="1076"/>
           <ac:spMkLst>
             <pc:docMk/>
             <pc:sldMk cId="0" sldId="261"/>
@@ -470,7 +1006,7 @@
           </ac:spMkLst>
         </pc:spChg>
         <pc:spChg chg="mod">
-          <ac:chgData name="PATRUNO ANDREA" userId="434c2d3d-d760-4baf-8981-191d7218719d" providerId="ADAL" clId="{D49931E2-CE7A-4E79-93FA-3282CEFD0145}" dt="2026-04-13T10:40:24.960" v="1263" actId="1076"/>
+          <ac:chgData name="PATRUNO ANDREA" userId="434c2d3d-d760-4baf-8981-191d7218719d" providerId="ADAL" clId="{D49931E2-CE7A-4E79-93FA-3282CEFD0145}" dt="2026-04-14T09:23:06.965" v="2010" actId="1076"/>
           <ac:spMkLst>
             <pc:docMk/>
             <pc:sldMk cId="0" sldId="261"/>
@@ -478,7 +1014,7 @@
           </ac:spMkLst>
         </pc:spChg>
         <pc:spChg chg="mod">
-          <ac:chgData name="PATRUNO ANDREA" userId="434c2d3d-d760-4baf-8981-191d7218719d" providerId="ADAL" clId="{D49931E2-CE7A-4E79-93FA-3282CEFD0145}" dt="2026-04-13T10:40:24.960" v="1263" actId="1076"/>
+          <ac:chgData name="PATRUNO ANDREA" userId="434c2d3d-d760-4baf-8981-191d7218719d" providerId="ADAL" clId="{D49931E2-CE7A-4E79-93FA-3282CEFD0145}" dt="2026-04-14T09:29:10.793" v="2014" actId="20577"/>
           <ac:spMkLst>
             <pc:docMk/>
             <pc:sldMk cId="0" sldId="261"/>
@@ -502,7 +1038,7 @@
           </ac:picMkLst>
         </pc:picChg>
         <pc:picChg chg="add mod">
-          <ac:chgData name="PATRUNO ANDREA" userId="434c2d3d-d760-4baf-8981-191d7218719d" providerId="ADAL" clId="{D49931E2-CE7A-4E79-93FA-3282CEFD0145}" dt="2026-04-13T10:40:53.967" v="1271" actId="14100"/>
+          <ac:chgData name="PATRUNO ANDREA" userId="434c2d3d-d760-4baf-8981-191d7218719d" providerId="ADAL" clId="{D49931E2-CE7A-4E79-93FA-3282CEFD0145}" dt="2026-04-14T09:23:32.939" v="2011"/>
           <ac:picMkLst>
             <pc:docMk/>
             <pc:sldMk cId="0" sldId="261"/>
@@ -511,13 +1047,21 @@
         </pc:picChg>
       </pc:sldChg>
       <pc:sldChg chg="addSp delSp modSp mod">
-        <pc:chgData name="PATRUNO ANDREA" userId="434c2d3d-d760-4baf-8981-191d7218719d" providerId="ADAL" clId="{D49931E2-CE7A-4E79-93FA-3282CEFD0145}" dt="2026-04-13T16:00:03.649" v="1417" actId="478"/>
+        <pc:chgData name="PATRUNO ANDREA" userId="434c2d3d-d760-4baf-8981-191d7218719d" providerId="ADAL" clId="{D49931E2-CE7A-4E79-93FA-3282CEFD0145}" dt="2026-04-14T10:04:37.815" v="2193" actId="1076"/>
         <pc:sldMkLst>
           <pc:docMk/>
           <pc:sldMk cId="0" sldId="262"/>
         </pc:sldMkLst>
         <pc:spChg chg="mod">
-          <ac:chgData name="PATRUNO ANDREA" userId="434c2d3d-d760-4baf-8981-191d7218719d" providerId="ADAL" clId="{D49931E2-CE7A-4E79-93FA-3282CEFD0145}" dt="2026-04-13T15:46:42.702" v="1324" actId="14100"/>
+          <ac:chgData name="PATRUNO ANDREA" userId="434c2d3d-d760-4baf-8981-191d7218719d" providerId="ADAL" clId="{D49931E2-CE7A-4E79-93FA-3282CEFD0145}" dt="2026-04-14T09:42:10.410" v="2117" actId="1076"/>
+          <ac:spMkLst>
+            <pc:docMk/>
+            <pc:sldMk cId="0" sldId="262"/>
+            <ac:spMk id="2" creationId="{00000000-0000-0000-0000-000000000000}"/>
+          </ac:spMkLst>
+        </pc:spChg>
+        <pc:spChg chg="mod">
+          <ac:chgData name="PATRUNO ANDREA" userId="434c2d3d-d760-4baf-8981-191d7218719d" providerId="ADAL" clId="{D49931E2-CE7A-4E79-93FA-3282CEFD0145}" dt="2026-04-14T09:42:12.379" v="2118" actId="1076"/>
           <ac:spMkLst>
             <pc:docMk/>
             <pc:sldMk cId="0" sldId="262"/>
@@ -613,11 +1157,83 @@
           </ac:spMkLst>
         </pc:spChg>
         <pc:spChg chg="mod">
-          <ac:chgData name="PATRUNO ANDREA" userId="434c2d3d-d760-4baf-8981-191d7218719d" providerId="ADAL" clId="{D49931E2-CE7A-4E79-93FA-3282CEFD0145}" dt="2026-04-13T08:36:32.444" v="295" actId="14100"/>
+          <ac:chgData name="PATRUNO ANDREA" userId="434c2d3d-d760-4baf-8981-191d7218719d" providerId="ADAL" clId="{D49931E2-CE7A-4E79-93FA-3282CEFD0145}" dt="2026-04-14T10:04:37.815" v="2193" actId="1076"/>
           <ac:spMkLst>
             <pc:docMk/>
             <pc:sldMk cId="0" sldId="262"/>
             <ac:spMk id="17" creationId="{00000000-0000-0000-0000-000000000000}"/>
+          </ac:spMkLst>
+        </pc:spChg>
+        <pc:spChg chg="mod">
+          <ac:chgData name="PATRUNO ANDREA" userId="434c2d3d-d760-4baf-8981-191d7218719d" providerId="ADAL" clId="{D49931E2-CE7A-4E79-93FA-3282CEFD0145}" dt="2026-04-14T10:04:37.815" v="2193" actId="1076"/>
+          <ac:spMkLst>
+            <pc:docMk/>
+            <pc:sldMk cId="0" sldId="262"/>
+            <ac:spMk id="18" creationId="{00000000-0000-0000-0000-000000000000}"/>
+          </ac:spMkLst>
+        </pc:spChg>
+        <pc:spChg chg="mod">
+          <ac:chgData name="PATRUNO ANDREA" userId="434c2d3d-d760-4baf-8981-191d7218719d" providerId="ADAL" clId="{D49931E2-CE7A-4E79-93FA-3282CEFD0145}" dt="2026-04-14T10:04:37.815" v="2193" actId="1076"/>
+          <ac:spMkLst>
+            <pc:docMk/>
+            <pc:sldMk cId="0" sldId="262"/>
+            <ac:spMk id="19" creationId="{00000000-0000-0000-0000-000000000000}"/>
+          </ac:spMkLst>
+        </pc:spChg>
+        <pc:spChg chg="mod">
+          <ac:chgData name="PATRUNO ANDREA" userId="434c2d3d-d760-4baf-8981-191d7218719d" providerId="ADAL" clId="{D49931E2-CE7A-4E79-93FA-3282CEFD0145}" dt="2026-04-14T10:04:37.815" v="2193" actId="1076"/>
+          <ac:spMkLst>
+            <pc:docMk/>
+            <pc:sldMk cId="0" sldId="262"/>
+            <ac:spMk id="20" creationId="{00000000-0000-0000-0000-000000000000}"/>
+          </ac:spMkLst>
+        </pc:spChg>
+        <pc:spChg chg="mod">
+          <ac:chgData name="PATRUNO ANDREA" userId="434c2d3d-d760-4baf-8981-191d7218719d" providerId="ADAL" clId="{D49931E2-CE7A-4E79-93FA-3282CEFD0145}" dt="2026-04-14T10:04:37.815" v="2193" actId="1076"/>
+          <ac:spMkLst>
+            <pc:docMk/>
+            <pc:sldMk cId="0" sldId="262"/>
+            <ac:spMk id="21" creationId="{00000000-0000-0000-0000-000000000000}"/>
+          </ac:spMkLst>
+        </pc:spChg>
+        <pc:spChg chg="mod">
+          <ac:chgData name="PATRUNO ANDREA" userId="434c2d3d-d760-4baf-8981-191d7218719d" providerId="ADAL" clId="{D49931E2-CE7A-4E79-93FA-3282CEFD0145}" dt="2026-04-14T10:04:37.815" v="2193" actId="1076"/>
+          <ac:spMkLst>
+            <pc:docMk/>
+            <pc:sldMk cId="0" sldId="262"/>
+            <ac:spMk id="22" creationId="{00000000-0000-0000-0000-000000000000}"/>
+          </ac:spMkLst>
+        </pc:spChg>
+        <pc:spChg chg="mod">
+          <ac:chgData name="PATRUNO ANDREA" userId="434c2d3d-d760-4baf-8981-191d7218719d" providerId="ADAL" clId="{D49931E2-CE7A-4E79-93FA-3282CEFD0145}" dt="2026-04-14T10:04:37.815" v="2193" actId="1076"/>
+          <ac:spMkLst>
+            <pc:docMk/>
+            <pc:sldMk cId="0" sldId="262"/>
+            <ac:spMk id="23" creationId="{00000000-0000-0000-0000-000000000000}"/>
+          </ac:spMkLst>
+        </pc:spChg>
+        <pc:spChg chg="mod">
+          <ac:chgData name="PATRUNO ANDREA" userId="434c2d3d-d760-4baf-8981-191d7218719d" providerId="ADAL" clId="{D49931E2-CE7A-4E79-93FA-3282CEFD0145}" dt="2026-04-14T10:04:37.815" v="2193" actId="1076"/>
+          <ac:spMkLst>
+            <pc:docMk/>
+            <pc:sldMk cId="0" sldId="262"/>
+            <ac:spMk id="24" creationId="{00000000-0000-0000-0000-000000000000}"/>
+          </ac:spMkLst>
+        </pc:spChg>
+        <pc:spChg chg="mod">
+          <ac:chgData name="PATRUNO ANDREA" userId="434c2d3d-d760-4baf-8981-191d7218719d" providerId="ADAL" clId="{D49931E2-CE7A-4E79-93FA-3282CEFD0145}" dt="2026-04-14T10:04:37.815" v="2193" actId="1076"/>
+          <ac:spMkLst>
+            <pc:docMk/>
+            <pc:sldMk cId="0" sldId="262"/>
+            <ac:spMk id="25" creationId="{00000000-0000-0000-0000-000000000000}"/>
+          </ac:spMkLst>
+        </pc:spChg>
+        <pc:spChg chg="mod">
+          <ac:chgData name="PATRUNO ANDREA" userId="434c2d3d-d760-4baf-8981-191d7218719d" providerId="ADAL" clId="{D49931E2-CE7A-4E79-93FA-3282CEFD0145}" dt="2026-04-14T10:04:37.815" v="2193" actId="1076"/>
+          <ac:spMkLst>
+            <pc:docMk/>
+            <pc:sldMk cId="0" sldId="262"/>
+            <ac:spMk id="27" creationId="{00000000-0000-0000-0000-000000000000}"/>
           </ac:spMkLst>
         </pc:spChg>
         <pc:spChg chg="mod">
@@ -1025,20 +1641,132 @@
           </ac:spMkLst>
         </pc:spChg>
       </pc:sldChg>
-      <pc:sldChg chg="modSp mod">
-        <pc:chgData name="PATRUNO ANDREA" userId="434c2d3d-d760-4baf-8981-191d7218719d" providerId="ADAL" clId="{D49931E2-CE7A-4E79-93FA-3282CEFD0145}" dt="2026-04-13T15:32:51.014" v="1312" actId="1076"/>
+      <pc:sldChg chg="addSp modSp mod">
+        <pc:chgData name="PATRUNO ANDREA" userId="434c2d3d-d760-4baf-8981-191d7218719d" providerId="ADAL" clId="{D49931E2-CE7A-4E79-93FA-3282CEFD0145}" dt="2026-04-14T08:46:25.017" v="1578" actId="1076"/>
         <pc:sldMkLst>
           <pc:docMk/>
           <pc:sldMk cId="2814612309" sldId="267"/>
         </pc:sldMkLst>
         <pc:spChg chg="mod">
-          <ac:chgData name="PATRUNO ANDREA" userId="434c2d3d-d760-4baf-8981-191d7218719d" providerId="ADAL" clId="{D49931E2-CE7A-4E79-93FA-3282CEFD0145}" dt="2026-04-13T15:32:51.014" v="1312" actId="1076"/>
+          <ac:chgData name="PATRUNO ANDREA" userId="434c2d3d-d760-4baf-8981-191d7218719d" providerId="ADAL" clId="{D49931E2-CE7A-4E79-93FA-3282CEFD0145}" dt="2026-04-14T08:43:41.888" v="1556" actId="1076"/>
+          <ac:spMkLst>
+            <pc:docMk/>
+            <pc:sldMk cId="2814612309" sldId="267"/>
+            <ac:spMk id="12" creationId="{1B05F9B3-10B3-A3E3-EC3D-4FA0CB9B7892}"/>
+          </ac:spMkLst>
+        </pc:spChg>
+        <pc:spChg chg="mod">
+          <ac:chgData name="PATRUNO ANDREA" userId="434c2d3d-d760-4baf-8981-191d7218719d" providerId="ADAL" clId="{D49931E2-CE7A-4E79-93FA-3282CEFD0145}" dt="2026-04-14T08:46:03.443" v="1577" actId="207"/>
+          <ac:spMkLst>
+            <pc:docMk/>
+            <pc:sldMk cId="2814612309" sldId="267"/>
+            <ac:spMk id="13" creationId="{56070D00-0291-9D85-2A52-9D92F4CECE9D}"/>
+          </ac:spMkLst>
+        </pc:spChg>
+        <pc:spChg chg="mod">
+          <ac:chgData name="PATRUNO ANDREA" userId="434c2d3d-d760-4baf-8981-191d7218719d" providerId="ADAL" clId="{D49931E2-CE7A-4E79-93FA-3282CEFD0145}" dt="2026-04-14T08:45:42.899" v="1574" actId="1076"/>
+          <ac:spMkLst>
+            <pc:docMk/>
+            <pc:sldMk cId="2814612309" sldId="267"/>
+            <ac:spMk id="14" creationId="{5FCE51B8-8F77-6AE8-D16E-DC115EED7138}"/>
+          </ac:spMkLst>
+        </pc:spChg>
+        <pc:spChg chg="mod">
+          <ac:chgData name="PATRUNO ANDREA" userId="434c2d3d-d760-4baf-8981-191d7218719d" providerId="ADAL" clId="{D49931E2-CE7A-4E79-93FA-3282CEFD0145}" dt="2026-04-14T08:43:41.888" v="1556" actId="1076"/>
+          <ac:spMkLst>
+            <pc:docMk/>
+            <pc:sldMk cId="2814612309" sldId="267"/>
+            <ac:spMk id="22" creationId="{E4A50B6E-C841-B9C9-F420-D4E056B77277}"/>
+          </ac:spMkLst>
+        </pc:spChg>
+        <pc:spChg chg="mod">
+          <ac:chgData name="PATRUNO ANDREA" userId="434c2d3d-d760-4baf-8981-191d7218719d" providerId="ADAL" clId="{D49931E2-CE7A-4E79-93FA-3282CEFD0145}" dt="2026-04-14T08:43:41.888" v="1556" actId="1076"/>
           <ac:spMkLst>
             <pc:docMk/>
             <pc:sldMk cId="2814612309" sldId="267"/>
             <ac:spMk id="23" creationId="{748A0C6C-4A76-9726-C47E-868FB6B0EF0A}"/>
           </ac:spMkLst>
         </pc:spChg>
+        <pc:spChg chg="mod">
+          <ac:chgData name="PATRUNO ANDREA" userId="434c2d3d-d760-4baf-8981-191d7218719d" providerId="ADAL" clId="{D49931E2-CE7A-4E79-93FA-3282CEFD0145}" dt="2026-04-14T08:43:41.888" v="1556" actId="1076"/>
+          <ac:spMkLst>
+            <pc:docMk/>
+            <pc:sldMk cId="2814612309" sldId="267"/>
+            <ac:spMk id="24" creationId="{FE6430F2-A9C4-9A33-12EA-53B7F8133CD0}"/>
+          </ac:spMkLst>
+        </pc:spChg>
+        <pc:spChg chg="mod">
+          <ac:chgData name="PATRUNO ANDREA" userId="434c2d3d-d760-4baf-8981-191d7218719d" providerId="ADAL" clId="{D49931E2-CE7A-4E79-93FA-3282CEFD0145}" dt="2026-04-14T08:43:41.888" v="1556" actId="1076"/>
+          <ac:spMkLst>
+            <pc:docMk/>
+            <pc:sldMk cId="2814612309" sldId="267"/>
+            <ac:spMk id="25" creationId="{B137F305-C7DC-3D8C-F2DB-34DA219C98C9}"/>
+          </ac:spMkLst>
+        </pc:spChg>
+        <pc:spChg chg="mod">
+          <ac:chgData name="PATRUNO ANDREA" userId="434c2d3d-d760-4baf-8981-191d7218719d" providerId="ADAL" clId="{D49931E2-CE7A-4E79-93FA-3282CEFD0145}" dt="2026-04-14T08:43:41.888" v="1556" actId="1076"/>
+          <ac:spMkLst>
+            <pc:docMk/>
+            <pc:sldMk cId="2814612309" sldId="267"/>
+            <ac:spMk id="26" creationId="{B609A615-04DA-125D-7648-437909D69EA7}"/>
+          </ac:spMkLst>
+        </pc:spChg>
+        <pc:spChg chg="mod">
+          <ac:chgData name="PATRUNO ANDREA" userId="434c2d3d-d760-4baf-8981-191d7218719d" providerId="ADAL" clId="{D49931E2-CE7A-4E79-93FA-3282CEFD0145}" dt="2026-04-14T08:46:25.017" v="1578" actId="1076"/>
+          <ac:spMkLst>
+            <pc:docMk/>
+            <pc:sldMk cId="2814612309" sldId="267"/>
+            <ac:spMk id="35" creationId="{D6E0CC0D-7D94-AA1B-07AF-257B80682547}"/>
+          </ac:spMkLst>
+        </pc:spChg>
+        <pc:spChg chg="mod">
+          <ac:chgData name="PATRUNO ANDREA" userId="434c2d3d-d760-4baf-8981-191d7218719d" providerId="ADAL" clId="{D49931E2-CE7A-4E79-93FA-3282CEFD0145}" dt="2026-04-14T08:43:41.888" v="1556" actId="1076"/>
+          <ac:spMkLst>
+            <pc:docMk/>
+            <pc:sldMk cId="2814612309" sldId="267"/>
+            <ac:spMk id="36" creationId="{981C6F95-42A6-9117-4153-7A82AD31A77B}"/>
+          </ac:spMkLst>
+        </pc:spChg>
+        <pc:spChg chg="mod">
+          <ac:chgData name="PATRUNO ANDREA" userId="434c2d3d-d760-4baf-8981-191d7218719d" providerId="ADAL" clId="{D49931E2-CE7A-4E79-93FA-3282CEFD0145}" dt="2026-04-14T08:44:20.424" v="1559" actId="14100"/>
+          <ac:spMkLst>
+            <pc:docMk/>
+            <pc:sldMk cId="2814612309" sldId="267"/>
+            <ac:spMk id="39" creationId="{65724F8C-93D1-45DB-CCEF-B69D4C41B516}"/>
+          </ac:spMkLst>
+        </pc:spChg>
+        <pc:picChg chg="add mod">
+          <ac:chgData name="PATRUNO ANDREA" userId="434c2d3d-d760-4baf-8981-191d7218719d" providerId="ADAL" clId="{D49931E2-CE7A-4E79-93FA-3282CEFD0145}" dt="2026-04-14T08:41:58.320" v="1537" actId="207"/>
+          <ac:picMkLst>
+            <pc:docMk/>
+            <pc:sldMk cId="2814612309" sldId="267"/>
+            <ac:picMk id="6" creationId="{AA9C7609-2269-BC45-1053-6744CEFBD51A}"/>
+          </ac:picMkLst>
+        </pc:picChg>
+        <pc:picChg chg="add mod">
+          <ac:chgData name="PATRUNO ANDREA" userId="434c2d3d-d760-4baf-8981-191d7218719d" providerId="ADAL" clId="{D49931E2-CE7A-4E79-93FA-3282CEFD0145}" dt="2026-04-14T08:44:41.764" v="1565" actId="207"/>
+          <ac:picMkLst>
+            <pc:docMk/>
+            <pc:sldMk cId="2814612309" sldId="267"/>
+            <ac:picMk id="8" creationId="{2B551850-2098-687C-4E42-99023C6E628A}"/>
+          </ac:picMkLst>
+        </pc:picChg>
+        <pc:picChg chg="add mod">
+          <ac:chgData name="PATRUNO ANDREA" userId="434c2d3d-d760-4baf-8981-191d7218719d" providerId="ADAL" clId="{D49931E2-CE7A-4E79-93FA-3282CEFD0145}" dt="2026-04-14T08:45:19.680" v="1570" actId="1076"/>
+          <ac:picMkLst>
+            <pc:docMk/>
+            <pc:sldMk cId="2814612309" sldId="267"/>
+            <ac:picMk id="10" creationId="{A68B14DE-C534-C503-C04F-A1A49507C342}"/>
+          </ac:picMkLst>
+        </pc:picChg>
+        <pc:picChg chg="add mod">
+          <ac:chgData name="PATRUNO ANDREA" userId="434c2d3d-d760-4baf-8981-191d7218719d" providerId="ADAL" clId="{D49931E2-CE7A-4E79-93FA-3282CEFD0145}" dt="2026-04-14T08:40:03.526" v="1518" actId="27957"/>
+          <ac:picMkLst>
+            <pc:docMk/>
+            <pc:sldMk cId="2814612309" sldId="267"/>
+            <ac:picMk id="41" creationId="{B96C1320-1210-606B-B69D-BC99BF88B19D}"/>
+          </ac:picMkLst>
+        </pc:picChg>
       </pc:sldChg>
       <pc:sldChg chg="addSp delSp modSp new del mod">
         <pc:chgData name="PATRUNO ANDREA" userId="434c2d3d-d760-4baf-8981-191d7218719d" providerId="ADAL" clId="{D49931E2-CE7A-4E79-93FA-3282CEFD0145}" dt="2026-04-13T15:44:47.481" v="1322" actId="2696"/>
@@ -1151,7 +1879,7 @@
         </pc:picChg>
       </pc:sldChg>
       <pc:sldChg chg="addSp delSp modSp new mod ord">
-        <pc:chgData name="PATRUNO ANDREA" userId="434c2d3d-d760-4baf-8981-191d7218719d" providerId="ADAL" clId="{D49931E2-CE7A-4E79-93FA-3282CEFD0145}" dt="2026-04-13T15:47:03.441" v="1326"/>
+        <pc:chgData name="PATRUNO ANDREA" userId="434c2d3d-d760-4baf-8981-191d7218719d" providerId="ADAL" clId="{D49931E2-CE7A-4E79-93FA-3282CEFD0145}" dt="2026-04-14T10:03:35.956" v="2192" actId="1076"/>
         <pc:sldMkLst>
           <pc:docMk/>
           <pc:sldMk cId="2682488855" sldId="270"/>
@@ -1173,6 +1901,38 @@
           </ac:spMkLst>
         </pc:spChg>
         <pc:spChg chg="add mod">
+          <ac:chgData name="PATRUNO ANDREA" userId="434c2d3d-d760-4baf-8981-191d7218719d" providerId="ADAL" clId="{D49931E2-CE7A-4E79-93FA-3282CEFD0145}" dt="2026-04-14T10:02:32.653" v="2141" actId="1076"/>
+          <ac:spMkLst>
+            <pc:docMk/>
+            <pc:sldMk cId="2682488855" sldId="270"/>
+            <ac:spMk id="4" creationId="{5180A067-EC8C-5AE6-E204-2D14688E0B83}"/>
+          </ac:spMkLst>
+        </pc:spChg>
+        <pc:spChg chg="add mod">
+          <ac:chgData name="PATRUNO ANDREA" userId="434c2d3d-d760-4baf-8981-191d7218719d" providerId="ADAL" clId="{D49931E2-CE7A-4E79-93FA-3282CEFD0145}" dt="2026-04-14T10:01:58.590" v="2126" actId="1076"/>
+          <ac:spMkLst>
+            <pc:docMk/>
+            <pc:sldMk cId="2682488855" sldId="270"/>
+            <ac:spMk id="6" creationId="{8A0465AE-E73D-C487-792F-6BCEB46DF753}"/>
+          </ac:spMkLst>
+        </pc:spChg>
+        <pc:spChg chg="add mod">
+          <ac:chgData name="PATRUNO ANDREA" userId="434c2d3d-d760-4baf-8981-191d7218719d" providerId="ADAL" clId="{D49931E2-CE7A-4E79-93FA-3282CEFD0145}" dt="2026-04-14T10:02:10.389" v="2132" actId="1076"/>
+          <ac:spMkLst>
+            <pc:docMk/>
+            <pc:sldMk cId="2682488855" sldId="270"/>
+            <ac:spMk id="7" creationId="{1B561D4F-FA10-4007-36F2-B913EB68A8CF}"/>
+          </ac:spMkLst>
+        </pc:spChg>
+        <pc:spChg chg="add mod">
+          <ac:chgData name="PATRUNO ANDREA" userId="434c2d3d-d760-4baf-8981-191d7218719d" providerId="ADAL" clId="{D49931E2-CE7A-4E79-93FA-3282CEFD0145}" dt="2026-04-14T10:03:03.406" v="2184" actId="20577"/>
+          <ac:spMkLst>
+            <pc:docMk/>
+            <pc:sldMk cId="2682488855" sldId="270"/>
+            <ac:spMk id="8" creationId="{3A1C5DC1-04D7-C368-2DFC-7B956C2406EB}"/>
+          </ac:spMkLst>
+        </pc:spChg>
+        <pc:spChg chg="add mod">
           <ac:chgData name="PATRUNO ANDREA" userId="434c2d3d-d760-4baf-8981-191d7218719d" providerId="ADAL" clId="{D49931E2-CE7A-4E79-93FA-3282CEFD0145}" dt="2026-04-13T09:11:18.501" v="461" actId="20577"/>
           <ac:spMkLst>
             <pc:docMk/>
@@ -1180,12 +1940,28 @@
             <ac:spMk id="10" creationId="{A40446BE-04B7-C200-8C8C-EAF87D0D2DB4}"/>
           </ac:spMkLst>
         </pc:spChg>
-        <pc:spChg chg="add mod">
-          <ac:chgData name="PATRUNO ANDREA" userId="434c2d3d-d760-4baf-8981-191d7218719d" providerId="ADAL" clId="{D49931E2-CE7A-4E79-93FA-3282CEFD0145}" dt="2026-04-13T09:11:57.110" v="486" actId="14100"/>
+        <pc:spChg chg="add del mod">
+          <ac:chgData name="PATRUNO ANDREA" userId="434c2d3d-d760-4baf-8981-191d7218719d" providerId="ADAL" clId="{D49931E2-CE7A-4E79-93FA-3282CEFD0145}" dt="2026-04-14T10:02:22.683" v="2138"/>
           <ac:spMkLst>
             <pc:docMk/>
             <pc:sldMk cId="2682488855" sldId="270"/>
             <ac:spMk id="11" creationId="{FFEF0797-2446-1161-4116-E64572D951EE}"/>
+          </ac:spMkLst>
+        </pc:spChg>
+        <pc:spChg chg="add del mod">
+          <ac:chgData name="PATRUNO ANDREA" userId="434c2d3d-d760-4baf-8981-191d7218719d" providerId="ADAL" clId="{D49931E2-CE7A-4E79-93FA-3282CEFD0145}" dt="2026-04-14T10:03:31.347" v="2191" actId="478"/>
+          <ac:spMkLst>
+            <pc:docMk/>
+            <pc:sldMk cId="2682488855" sldId="270"/>
+            <ac:spMk id="13" creationId="{03AB6348-3611-4D4B-6324-16C073224C1A}"/>
+          </ac:spMkLst>
+        </pc:spChg>
+        <pc:spChg chg="add mod">
+          <ac:chgData name="PATRUNO ANDREA" userId="434c2d3d-d760-4baf-8981-191d7218719d" providerId="ADAL" clId="{D49931E2-CE7A-4E79-93FA-3282CEFD0145}" dt="2026-04-14T10:03:35.956" v="2192" actId="1076"/>
+          <ac:spMkLst>
+            <pc:docMk/>
+            <pc:sldMk cId="2682488855" sldId="270"/>
+            <ac:spMk id="14" creationId="{95172C9F-A163-13F3-8802-B846F8CD132F}"/>
           </ac:spMkLst>
         </pc:spChg>
         <pc:picChg chg="add del mod">
@@ -1194,6 +1970,14 @@
             <pc:docMk/>
             <pc:sldMk cId="2682488855" sldId="270"/>
             <ac:picMk id="5" creationId="{24532568-A40B-BC14-9D24-12D5F2D87028}"/>
+          </ac:picMkLst>
+        </pc:picChg>
+        <pc:picChg chg="add mod">
+          <ac:chgData name="PATRUNO ANDREA" userId="434c2d3d-d760-4baf-8981-191d7218719d" providerId="ADAL" clId="{D49931E2-CE7A-4E79-93FA-3282CEFD0145}" dt="2026-04-14T10:01:58.590" v="2126" actId="1076"/>
+          <ac:picMkLst>
+            <pc:docMk/>
+            <pc:sldMk cId="2682488855" sldId="270"/>
+            <ac:picMk id="5" creationId="{7C015304-FC22-52DD-6728-B98D42B8E6A8}"/>
           </ac:picMkLst>
         </pc:picChg>
         <pc:picChg chg="add del mod">
@@ -1205,7 +1989,7 @@
           </ac:picMkLst>
         </pc:picChg>
         <pc:picChg chg="add mod">
-          <ac:chgData name="PATRUNO ANDREA" userId="434c2d3d-d760-4baf-8981-191d7218719d" providerId="ADAL" clId="{D49931E2-CE7A-4E79-93FA-3282CEFD0145}" dt="2026-04-13T09:10:37.430" v="431" actId="14100"/>
+          <ac:chgData name="PATRUNO ANDREA" userId="434c2d3d-d760-4baf-8981-191d7218719d" providerId="ADAL" clId="{D49931E2-CE7A-4E79-93FA-3282CEFD0145}" dt="2026-04-14T10:02:21.101" v="2136" actId="14100"/>
           <ac:picMkLst>
             <pc:docMk/>
             <pc:sldMk cId="2682488855" sldId="270"/>
@@ -1213,7 +1997,7 @@
           </ac:picMkLst>
         </pc:picChg>
         <pc:picChg chg="add mod">
-          <ac:chgData name="PATRUNO ANDREA" userId="434c2d3d-d760-4baf-8981-191d7218719d" providerId="ADAL" clId="{D49931E2-CE7A-4E79-93FA-3282CEFD0145}" dt="2026-04-13T09:09:22.928" v="415" actId="1076"/>
+          <ac:chgData name="PATRUNO ANDREA" userId="434c2d3d-d760-4baf-8981-191d7218719d" providerId="ADAL" clId="{D49931E2-CE7A-4E79-93FA-3282CEFD0145}" dt="2026-04-14T10:03:14.117" v="2187" actId="1076"/>
           <ac:picMkLst>
             <pc:docMk/>
             <pc:sldMk cId="2682488855" sldId="270"/>
@@ -1222,11 +2006,19 @@
         </pc:picChg>
       </pc:sldChg>
       <pc:sldChg chg="addSp delSp modSp new mod">
-        <pc:chgData name="PATRUNO ANDREA" userId="434c2d3d-d760-4baf-8981-191d7218719d" providerId="ADAL" clId="{D49931E2-CE7A-4E79-93FA-3282CEFD0145}" dt="2026-04-13T09:19:53.016" v="640" actId="113"/>
+        <pc:chgData name="PATRUNO ANDREA" userId="434c2d3d-d760-4baf-8981-191d7218719d" providerId="ADAL" clId="{D49931E2-CE7A-4E79-93FA-3282CEFD0145}" dt="2026-04-14T09:40:48.297" v="2063" actId="1076"/>
         <pc:sldMkLst>
           <pc:docMk/>
           <pc:sldMk cId="1696233361" sldId="271"/>
         </pc:sldMkLst>
+        <pc:spChg chg="add del mod ord">
+          <ac:chgData name="PATRUNO ANDREA" userId="434c2d3d-d760-4baf-8981-191d7218719d" providerId="ADAL" clId="{D49931E2-CE7A-4E79-93FA-3282CEFD0145}" dt="2026-04-14T09:40:02.825" v="2053" actId="21"/>
+          <ac:spMkLst>
+            <pc:docMk/>
+            <pc:sldMk cId="1696233361" sldId="271"/>
+            <ac:spMk id="2" creationId="{5893F8CA-79D9-A5B7-5D55-BA4005756945}"/>
+          </ac:spMkLst>
+        </pc:spChg>
         <pc:spChg chg="add mod">
           <ac:chgData name="PATRUNO ANDREA" userId="434c2d3d-d760-4baf-8981-191d7218719d" providerId="ADAL" clId="{D49931E2-CE7A-4E79-93FA-3282CEFD0145}" dt="2026-04-13T09:18:09.521" v="604" actId="1076"/>
           <ac:spMkLst>
@@ -1251,6 +2043,14 @@
             <ac:spMk id="6" creationId="{5014233A-7D98-8AB1-31B8-CCBFA89505DD}"/>
           </ac:spMkLst>
         </pc:spChg>
+        <pc:spChg chg="add mod ord">
+          <ac:chgData name="PATRUNO ANDREA" userId="434c2d3d-d760-4baf-8981-191d7218719d" providerId="ADAL" clId="{D49931E2-CE7A-4E79-93FA-3282CEFD0145}" dt="2026-04-14T09:40:27.709" v="2061" actId="1076"/>
+          <ac:spMkLst>
+            <pc:docMk/>
+            <pc:sldMk cId="1696233361" sldId="271"/>
+            <ac:spMk id="7" creationId="{5893F8CA-79D9-A5B7-5D55-BA4005756945}"/>
+          </ac:spMkLst>
+        </pc:spChg>
         <pc:spChg chg="add del">
           <ac:chgData name="PATRUNO ANDREA" userId="434c2d3d-d760-4baf-8981-191d7218719d" providerId="ADAL" clId="{D49931E2-CE7A-4E79-93FA-3282CEFD0145}" dt="2026-04-13T09:18:31.237" v="613" actId="22"/>
           <ac:spMkLst>
@@ -1260,7 +2060,7 @@
           </ac:spMkLst>
         </pc:spChg>
         <pc:spChg chg="add mod">
-          <ac:chgData name="PATRUNO ANDREA" userId="434c2d3d-d760-4baf-8981-191d7218719d" providerId="ADAL" clId="{D49931E2-CE7A-4E79-93FA-3282CEFD0145}" dt="2026-04-13T09:19:06.897" v="623" actId="113"/>
+          <ac:chgData name="PATRUNO ANDREA" userId="434c2d3d-d760-4baf-8981-191d7218719d" providerId="ADAL" clId="{D49931E2-CE7A-4E79-93FA-3282CEFD0145}" dt="2026-04-14T09:39:56.688" v="2051" actId="1076"/>
           <ac:spMkLst>
             <pc:docMk/>
             <pc:sldMk cId="1696233361" sldId="271"/>
@@ -1276,7 +2076,7 @@
           </ac:spMkLst>
         </pc:spChg>
         <pc:spChg chg="add mod">
-          <ac:chgData name="PATRUNO ANDREA" userId="434c2d3d-d760-4baf-8981-191d7218719d" providerId="ADAL" clId="{D49931E2-CE7A-4E79-93FA-3282CEFD0145}" dt="2026-04-13T09:19:53.016" v="640" actId="113"/>
+          <ac:chgData name="PATRUNO ANDREA" userId="434c2d3d-d760-4baf-8981-191d7218719d" providerId="ADAL" clId="{D49931E2-CE7A-4E79-93FA-3282CEFD0145}" dt="2026-04-14T09:40:48.297" v="2063" actId="1076"/>
           <ac:spMkLst>
             <pc:docMk/>
             <pc:sldMk cId="1696233361" sldId="271"/>
@@ -1284,7 +2084,7 @@
           </ac:spMkLst>
         </pc:spChg>
         <pc:picChg chg="add mod">
-          <ac:chgData name="PATRUNO ANDREA" userId="434c2d3d-d760-4baf-8981-191d7218719d" providerId="ADAL" clId="{D49931E2-CE7A-4E79-93FA-3282CEFD0145}" dt="2026-04-13T09:18:24.290" v="611" actId="1076"/>
+          <ac:chgData name="PATRUNO ANDREA" userId="434c2d3d-d760-4baf-8981-191d7218719d" providerId="ADAL" clId="{D49931E2-CE7A-4E79-93FA-3282CEFD0145}" dt="2026-04-14T09:40:40.977" v="2062" actId="14100"/>
           <ac:picMkLst>
             <pc:docMk/>
             <pc:sldMk cId="1696233361" sldId="271"/>
@@ -1843,14 +2643,6 @@
           </ac:spMkLst>
         </pc:spChg>
         <pc:picChg chg="mod">
-          <ac:chgData name="PATRUNO ANDREA" userId="434c2d3d-d760-4baf-8981-191d7218719d" providerId="ADAL" clId="{16F693D4-62C4-4BA3-8943-81787A08A71E}" dt="2026-04-10T10:51:32.763" v="11" actId="1076"/>
-          <ac:picMkLst>
-            <pc:docMk/>
-            <pc:sldMk cId="0" sldId="256"/>
-            <ac:picMk id="23" creationId="{09EE11DC-D367-F713-553E-3FD7D36CFAAB}"/>
-          </ac:picMkLst>
-        </pc:picChg>
-        <pc:picChg chg="mod">
           <ac:chgData name="PATRUNO ANDREA" userId="434c2d3d-d760-4baf-8981-191d7218719d" providerId="ADAL" clId="{16F693D4-62C4-4BA3-8943-81787A08A71E}" dt="2026-04-10T10:51:33.843" v="12" actId="1076"/>
           <ac:picMkLst>
             <pc:docMk/>
@@ -1873,38 +2665,6 @@
             <ac:spMk id="2" creationId="{00000000-0000-0000-0000-000000000000}"/>
           </ac:spMkLst>
         </pc:spChg>
-        <pc:spChg chg="mod">
-          <ac:chgData name="PATRUNO ANDREA" userId="434c2d3d-d760-4baf-8981-191d7218719d" providerId="ADAL" clId="{16F693D4-62C4-4BA3-8943-81787A08A71E}" dt="2026-04-10T11:36:46.157" v="658" actId="1076"/>
-          <ac:spMkLst>
-            <pc:docMk/>
-            <pc:sldMk cId="0" sldId="258"/>
-            <ac:spMk id="6" creationId="{00000000-0000-0000-0000-000000000000}"/>
-          </ac:spMkLst>
-        </pc:spChg>
-        <pc:spChg chg="mod">
-          <ac:chgData name="PATRUNO ANDREA" userId="434c2d3d-d760-4baf-8981-191d7218719d" providerId="ADAL" clId="{16F693D4-62C4-4BA3-8943-81787A08A71E}" dt="2026-04-10T11:36:46.157" v="658" actId="1076"/>
-          <ac:spMkLst>
-            <pc:docMk/>
-            <pc:sldMk cId="0" sldId="258"/>
-            <ac:spMk id="7" creationId="{00000000-0000-0000-0000-000000000000}"/>
-          </ac:spMkLst>
-        </pc:spChg>
-        <pc:spChg chg="add del mod">
-          <ac:chgData name="PATRUNO ANDREA" userId="434c2d3d-d760-4baf-8981-191d7218719d" providerId="ADAL" clId="{16F693D4-62C4-4BA3-8943-81787A08A71E}" dt="2026-04-10T11:36:53.259" v="659" actId="14100"/>
-          <ac:spMkLst>
-            <pc:docMk/>
-            <pc:sldMk cId="0" sldId="258"/>
-            <ac:spMk id="8" creationId="{00000000-0000-0000-0000-000000000000}"/>
-          </ac:spMkLst>
-        </pc:spChg>
-        <pc:spChg chg="add del mod">
-          <ac:chgData name="PATRUNO ANDREA" userId="434c2d3d-d760-4baf-8981-191d7218719d" providerId="ADAL" clId="{16F693D4-62C4-4BA3-8943-81787A08A71E}" dt="2026-04-10T11:36:53.259" v="659" actId="14100"/>
-          <ac:spMkLst>
-            <pc:docMk/>
-            <pc:sldMk cId="0" sldId="258"/>
-            <ac:spMk id="9" creationId="{00000000-0000-0000-0000-000000000000}"/>
-          </ac:spMkLst>
-        </pc:spChg>
         <pc:spChg chg="add del mod">
           <ac:chgData name="PATRUNO ANDREA" userId="434c2d3d-d760-4baf-8981-191d7218719d" providerId="ADAL" clId="{16F693D4-62C4-4BA3-8943-81787A08A71E}" dt="2026-04-10T11:37:57.038" v="674" actId="1076"/>
           <ac:spMkLst>
@@ -1999,14 +2759,6 @@
             <pc:docMk/>
             <pc:sldMk cId="0" sldId="258"/>
             <ac:spMk id="28" creationId="{00000000-0000-0000-0000-000000000000}"/>
-          </ac:spMkLst>
-        </pc:spChg>
-        <pc:spChg chg="add mod">
-          <ac:chgData name="PATRUNO ANDREA" userId="434c2d3d-d760-4baf-8981-191d7218719d" providerId="ADAL" clId="{16F693D4-62C4-4BA3-8943-81787A08A71E}" dt="2026-04-10T11:38:05.842" v="676" actId="113"/>
-          <ac:spMkLst>
-            <pc:docMk/>
-            <pc:sldMk cId="0" sldId="258"/>
-            <ac:spMk id="34" creationId="{A356B9A7-E817-A205-774E-1BBCE37F12A5}"/>
           </ac:spMkLst>
         </pc:spChg>
         <pc:spChg chg="add mod">
@@ -2483,6 +3235,13 @@
           </p:nvPr>
         </p:nvSpPr>
         <p:spPr/>
+        <p:txBody>
+          <a:bodyPr/>
+          <a:lstStyle/>
+          <a:p>
+            <a:endParaRPr lang="it-IT"/>
+          </a:p>
+        </p:txBody>
       </p:sp>
       <p:sp>
         <p:nvSpPr>
@@ -2567,6 +3326,13 @@
           </p:nvPr>
         </p:nvSpPr>
         <p:spPr/>
+        <p:txBody>
+          <a:bodyPr/>
+          <a:lstStyle/>
+          <a:p>
+            <a:endParaRPr lang="it-IT"/>
+          </a:p>
+        </p:txBody>
       </p:sp>
       <p:sp>
         <p:nvSpPr>
@@ -2651,6 +3417,13 @@
           </p:nvPr>
         </p:nvSpPr>
         <p:spPr/>
+        <p:txBody>
+          <a:bodyPr/>
+          <a:lstStyle/>
+          <a:p>
+            <a:endParaRPr lang="it-IT"/>
+          </a:p>
+        </p:txBody>
       </p:sp>
       <p:sp>
         <p:nvSpPr>
@@ -2735,6 +3508,13 @@
           </p:nvPr>
         </p:nvSpPr>
         <p:spPr/>
+        <p:txBody>
+          <a:bodyPr/>
+          <a:lstStyle/>
+          <a:p>
+            <a:endParaRPr lang="it-IT"/>
+          </a:p>
+        </p:txBody>
       </p:sp>
       <p:sp>
         <p:nvSpPr>
@@ -2819,6 +3599,13 @@
           </p:nvPr>
         </p:nvSpPr>
         <p:spPr/>
+        <p:txBody>
+          <a:bodyPr/>
+          <a:lstStyle/>
+          <a:p>
+            <a:endParaRPr lang="it-IT"/>
+          </a:p>
+        </p:txBody>
       </p:sp>
       <p:sp>
         <p:nvSpPr>
@@ -2903,6 +3690,13 @@
           </p:nvPr>
         </p:nvSpPr>
         <p:spPr/>
+        <p:txBody>
+          <a:bodyPr/>
+          <a:lstStyle/>
+          <a:p>
+            <a:endParaRPr lang="it-IT"/>
+          </a:p>
+        </p:txBody>
       </p:sp>
       <p:sp>
         <p:nvSpPr>
@@ -2987,6 +3781,13 @@
           </p:nvPr>
         </p:nvSpPr>
         <p:spPr/>
+        <p:txBody>
+          <a:bodyPr/>
+          <a:lstStyle/>
+          <a:p>
+            <a:endParaRPr lang="it-IT"/>
+          </a:p>
+        </p:txBody>
       </p:sp>
       <p:sp>
         <p:nvSpPr>
@@ -3071,6 +3872,13 @@
           </p:nvPr>
         </p:nvSpPr>
         <p:spPr/>
+        <p:txBody>
+          <a:bodyPr/>
+          <a:lstStyle/>
+          <a:p>
+            <a:endParaRPr lang="it-IT"/>
+          </a:p>
+        </p:txBody>
       </p:sp>
       <p:sp>
         <p:nvSpPr>
@@ -3155,6 +3963,13 @@
           </p:nvPr>
         </p:nvSpPr>
         <p:spPr/>
+        <p:txBody>
+          <a:bodyPr/>
+          <a:lstStyle/>
+          <a:p>
+            <a:endParaRPr lang="it-IT"/>
+          </a:p>
+        </p:txBody>
       </p:sp>
       <p:sp>
         <p:nvSpPr>
@@ -3239,6 +4054,13 @@
           </p:nvPr>
         </p:nvSpPr>
         <p:spPr/>
+        <p:txBody>
+          <a:bodyPr/>
+          <a:lstStyle/>
+          <a:p>
+            <a:endParaRPr lang="it-IT"/>
+          </a:p>
+        </p:txBody>
       </p:sp>
       <p:sp>
         <p:nvSpPr>
@@ -3323,6 +4145,13 @@
           </p:nvPr>
         </p:nvSpPr>
         <p:spPr/>
+        <p:txBody>
+          <a:bodyPr/>
+          <a:lstStyle/>
+          <a:p>
+            <a:endParaRPr lang="it-IT"/>
+          </a:p>
+        </p:txBody>
       </p:sp>
       <p:sp>
         <p:nvSpPr>
@@ -3750,46 +4579,14 @@
       </p:sp>
       <p:sp>
         <p:nvSpPr>
-          <p:cNvPr id="4" name="Shape 2"/>
-          <p:cNvSpPr/>
-          <p:nvPr/>
-        </p:nvSpPr>
-        <p:spPr>
-          <a:xfrm>
-            <a:off x="3492304" y="609922"/>
-            <a:ext cx="2399045" cy="418192"/>
-          </a:xfrm>
-          <a:prstGeom prst="rect">
-            <a:avLst/>
-          </a:prstGeom>
-          <a:solidFill>
-            <a:srgbClr val="028090"/>
-          </a:solidFill>
-          <a:ln w="12700">
-            <a:solidFill>
-              <a:srgbClr val="028090"/>
-            </a:solidFill>
-            <a:prstDash val="solid"/>
-          </a:ln>
-        </p:spPr>
-        <p:txBody>
-          <a:bodyPr/>
-          <a:lstStyle/>
-          <a:p>
-            <a:endParaRPr lang="it-IT" dirty="0"/>
-          </a:p>
-        </p:txBody>
-      </p:sp>
-      <p:sp>
-        <p:nvSpPr>
-          <p:cNvPr id="5" name="Text 3"/>
-          <p:cNvSpPr/>
-          <p:nvPr/>
-        </p:nvSpPr>
-        <p:spPr>
-          <a:xfrm>
-            <a:off x="3293976" y="536155"/>
-            <a:ext cx="2665828" cy="502920"/>
+          <p:cNvPr id="6" name="Text 4"/>
+          <p:cNvSpPr/>
+          <p:nvPr/>
+        </p:nvSpPr>
+        <p:spPr>
+          <a:xfrm>
+            <a:off x="2046849" y="872022"/>
+            <a:ext cx="5050302" cy="2514600"/>
           </a:xfrm>
           <a:prstGeom prst="rect">
             <a:avLst/>
@@ -3805,7 +4602,7 @@
               <a:buNone/>
             </a:pPr>
             <a:r>
-              <a:rPr lang="en-US" b="1" kern="0" spc="150" dirty="0">
+              <a:rPr lang="en-US" sz="4000" b="1" dirty="0">
                 <a:solidFill>
                   <a:srgbClr val="FFFFFF"/>
                 </a:solidFill>
@@ -3813,32 +4610,10 @@
                 <a:ea typeface="Calibri" pitchFamily="34" charset="-122"/>
                 <a:cs typeface="Calibri" pitchFamily="34" charset="-120"/>
               </a:rPr>
-              <a:t>PROJECT WORK</a:t>
-            </a:r>
-            <a:endParaRPr lang="en-US" dirty="0"/>
-          </a:p>
-        </p:txBody>
-      </p:sp>
-      <p:sp>
-        <p:nvSpPr>
-          <p:cNvPr id="6" name="Text 4"/>
-          <p:cNvSpPr/>
-          <p:nvPr/>
-        </p:nvSpPr>
-        <p:spPr>
-          <a:xfrm>
-            <a:off x="2300067" y="1077761"/>
-            <a:ext cx="5050302" cy="2514600"/>
-          </a:xfrm>
-          <a:prstGeom prst="rect">
-            <a:avLst/>
-          </a:prstGeom>
-          <a:noFill/>
-          <a:ln/>
-        </p:spPr>
-        <p:txBody>
-          <a:bodyPr wrap="square" lIns="0" tIns="0" rIns="0" bIns="0" rtlCol="0" anchor="ctr"/>
-          <a:lstStyle/>
+              <a:t>SVD &amp; PCA</a:t>
+            </a:r>
+            <a:endParaRPr lang="en-US" sz="4000" dirty="0"/>
+          </a:p>
           <a:p>
             <a:pPr marL="0" indent="0" algn="ctr">
               <a:buNone/>
@@ -3852,16 +4627,10 @@
                 <a:ea typeface="Calibri" pitchFamily="34" charset="-122"/>
                 <a:cs typeface="Calibri" pitchFamily="34" charset="-120"/>
               </a:rPr>
-              <a:t>SVD &amp; PCA</a:t>
-            </a:r>
-            <a:endParaRPr lang="en-US" sz="4000" dirty="0"/>
-          </a:p>
-          <a:p>
-            <a:pPr marL="0" indent="0" algn="ctr">
-              <a:buNone/>
-            </a:pPr>
-            <a:r>
-              <a:rPr lang="en-US" sz="4000" b="1" dirty="0">
+              <a:t>per </a:t>
+            </a:r>
+            <a:r>
+              <a:rPr lang="en-US" sz="4000" b="1" dirty="0" err="1">
                 <a:solidFill>
                   <a:srgbClr val="FFFFFF"/>
                 </a:solidFill>
@@ -3869,7 +4638,18 @@
                 <a:ea typeface="Calibri" pitchFamily="34" charset="-122"/>
                 <a:cs typeface="Calibri" pitchFamily="34" charset="-120"/>
               </a:rPr>
-              <a:t>per l'Analisi di</a:t>
+              <a:t>l'Analisi</a:t>
+            </a:r>
+            <a:r>
+              <a:rPr lang="en-US" sz="4000" b="1" dirty="0">
+                <a:solidFill>
+                  <a:srgbClr val="FFFFFF"/>
+                </a:solidFill>
+                <a:latin typeface="Calibri" pitchFamily="34" charset="0"/>
+                <a:ea typeface="Calibri" pitchFamily="34" charset="-122"/>
+                <a:cs typeface="Calibri" pitchFamily="34" charset="-120"/>
+              </a:rPr>
+              <a:t> di</a:t>
             </a:r>
             <a:endParaRPr lang="en-US" sz="4000" dirty="0"/>
           </a:p>
@@ -4188,36 +4968,6 @@
           </a:p>
         </p:txBody>
       </p:sp>
-      <p:pic>
-        <p:nvPicPr>
-          <p:cNvPr id="23" name="Immagine 22">
-            <a:extLst>
-              <a:ext uri="{FF2B5EF4-FFF2-40B4-BE49-F238E27FC236}">
-                <a16:creationId xmlns:a16="http://schemas.microsoft.com/office/drawing/2014/main" id="{09EE11DC-D367-F713-553E-3FD7D36CFAAB}"/>
-              </a:ext>
-            </a:extLst>
-          </p:cNvPr>
-          <p:cNvPicPr>
-            <a:picLocks noChangeAspect="1"/>
-          </p:cNvPicPr>
-          <p:nvPr/>
-        </p:nvPicPr>
-        <p:blipFill>
-          <a:blip r:embed="rId3"/>
-          <a:stretch>
-            <a:fillRect/>
-          </a:stretch>
-        </p:blipFill>
-        <p:spPr>
-          <a:xfrm>
-            <a:off x="7131341" y="536155"/>
-            <a:ext cx="1736203" cy="1713781"/>
-          </a:xfrm>
-          <a:prstGeom prst="rect">
-            <a:avLst/>
-          </a:prstGeom>
-        </p:spPr>
-      </p:pic>
       <p:pic>
         <p:nvPicPr>
           <p:cNvPr id="25" name="Immagine 24">
@@ -4233,15 +4983,43 @@
           <p:nvPr/>
         </p:nvPicPr>
         <p:blipFill>
+          <a:blip r:embed="rId3"/>
+          <a:srcRect/>
+          <a:stretch/>
+        </p:blipFill>
+        <p:spPr>
+          <a:xfrm>
+            <a:off x="283372" y="557784"/>
+            <a:ext cx="2185357" cy="879894"/>
+          </a:xfrm>
+          <a:prstGeom prst="rect">
+            <a:avLst/>
+          </a:prstGeom>
+        </p:spPr>
+      </p:pic>
+      <p:pic>
+        <p:nvPicPr>
+          <p:cNvPr id="16" name="Immagine 15">
+            <a:extLst>
+              <a:ext uri="{FF2B5EF4-FFF2-40B4-BE49-F238E27FC236}">
+                <a16:creationId xmlns:a16="http://schemas.microsoft.com/office/drawing/2014/main" id="{C0F8BD52-01F8-965A-3310-531DE91C3412}"/>
+              </a:ext>
+            </a:extLst>
+          </p:cNvPr>
+          <p:cNvPicPr>
+            <a:picLocks noChangeAspect="1"/>
+          </p:cNvPicPr>
+          <p:nvPr/>
+        </p:nvPicPr>
+        <p:blipFill>
           <a:blip r:embed="rId4"/>
-          <a:stretch>
-            <a:fillRect/>
-          </a:stretch>
+          <a:srcRect/>
+          <a:stretch/>
         </p:blipFill>
         <p:spPr>
           <a:xfrm>
-            <a:off x="276456" y="557784"/>
-            <a:ext cx="2199190" cy="879894"/>
+            <a:off x="6865887" y="341227"/>
+            <a:ext cx="2078631" cy="1796551"/>
           </a:xfrm>
           <a:prstGeom prst="rect">
             <a:avLst/>
@@ -4353,8 +5131,8 @@
         </p:nvSpPr>
         <p:spPr>
           <a:xfrm>
-            <a:off x="365760" y="73152"/>
-            <a:ext cx="1178490" cy="530352"/>
+            <a:off x="320040" y="196515"/>
+            <a:ext cx="4970417" cy="530352"/>
           </a:xfrm>
           <a:prstGeom prst="rect">
             <a:avLst/>
@@ -4378,7 +5156,7 @@
                 <a:ea typeface="Calibri" pitchFamily="34" charset="-122"/>
                 <a:cs typeface="Calibri" pitchFamily="34" charset="-120"/>
               </a:rPr>
-              <a:t>PCA</a:t>
+              <a:t>PCA – Principal Component Analysis </a:t>
             </a:r>
             <a:endParaRPr lang="en-US" sz="2200" dirty="0"/>
           </a:p>
@@ -4392,7 +5170,7 @@
         </p:nvSpPr>
         <p:spPr>
           <a:xfrm>
-            <a:off x="4754880" y="1097280"/>
+            <a:off x="209006" y="1163302"/>
             <a:ext cx="4206240" cy="2020824"/>
           </a:xfrm>
           <a:prstGeom prst="rect">
@@ -4431,7 +5209,7 @@
         </p:nvSpPr>
         <p:spPr>
           <a:xfrm>
-            <a:off x="4754880" y="1097280"/>
+            <a:off x="209006" y="1163302"/>
             <a:ext cx="4206240" cy="438912"/>
           </a:xfrm>
           <a:prstGeom prst="rect">
@@ -4463,7 +5241,7 @@
         </p:nvSpPr>
         <p:spPr>
           <a:xfrm>
-            <a:off x="4846320" y="1097280"/>
+            <a:off x="300446" y="1163302"/>
             <a:ext cx="4023360" cy="438912"/>
           </a:xfrm>
           <a:prstGeom prst="rect">
@@ -4502,7 +5280,7 @@
         </p:nvSpPr>
         <p:spPr>
           <a:xfrm>
-            <a:off x="4937760" y="1645920"/>
+            <a:off x="391886" y="1711942"/>
             <a:ext cx="1005840" cy="320040"/>
           </a:xfrm>
           <a:prstGeom prst="rect">
@@ -4541,7 +5319,7 @@
         </p:nvSpPr>
         <p:spPr>
           <a:xfrm>
-            <a:off x="5943600" y="1645920"/>
+            <a:off x="1397726" y="1711942"/>
             <a:ext cx="2834640" cy="320040"/>
           </a:xfrm>
           <a:prstGeom prst="rect">
@@ -4580,7 +5358,7 @@
         </p:nvSpPr>
         <p:spPr>
           <a:xfrm>
-            <a:off x="4937760" y="2029968"/>
+            <a:off x="391886" y="2095990"/>
             <a:ext cx="1005840" cy="320040"/>
           </a:xfrm>
           <a:prstGeom prst="rect">
@@ -4619,7 +5397,7 @@
         </p:nvSpPr>
         <p:spPr>
           <a:xfrm>
-            <a:off x="5943600" y="2029968"/>
+            <a:off x="1397726" y="2095990"/>
             <a:ext cx="2834640" cy="320040"/>
           </a:xfrm>
           <a:prstGeom prst="rect">
@@ -4658,7 +5436,7 @@
         </p:nvSpPr>
         <p:spPr>
           <a:xfrm>
-            <a:off x="4937760" y="2414016"/>
+            <a:off x="391886" y="2480038"/>
             <a:ext cx="1005840" cy="320040"/>
           </a:xfrm>
           <a:prstGeom prst="rect">
@@ -4697,7 +5475,7 @@
         </p:nvSpPr>
         <p:spPr>
           <a:xfrm>
-            <a:off x="5943600" y="2414016"/>
+            <a:off x="1397726" y="2480038"/>
             <a:ext cx="2834640" cy="320040"/>
           </a:xfrm>
           <a:prstGeom prst="rect">
@@ -4736,7 +5514,7 @@
         </p:nvSpPr>
         <p:spPr>
           <a:xfrm>
-            <a:off x="4937760" y="2798064"/>
+            <a:off x="391886" y="2864086"/>
             <a:ext cx="1005840" cy="320040"/>
           </a:xfrm>
           <a:prstGeom prst="rect">
@@ -4775,7 +5553,7 @@
         </p:nvSpPr>
         <p:spPr>
           <a:xfrm>
-            <a:off x="5943600" y="2798064"/>
+            <a:off x="1397726" y="2864086"/>
             <a:ext cx="2834640" cy="320040"/>
           </a:xfrm>
           <a:prstGeom prst="rect">
@@ -5806,7 +6584,7 @@
         </p:blipFill>
         <p:spPr>
           <a:xfrm>
-            <a:off x="71285" y="1345843"/>
+            <a:off x="129466" y="1592572"/>
             <a:ext cx="4582962" cy="2881464"/>
           </a:xfrm>
           <a:prstGeom prst="rect">
@@ -5912,8 +6690,8 @@
         </p:blipFill>
         <p:spPr>
           <a:xfrm>
-            <a:off x="4778359" y="2253583"/>
-            <a:ext cx="4294355" cy="1162601"/>
+            <a:off x="4888776" y="1586797"/>
+            <a:ext cx="3804556" cy="1162601"/>
           </a:xfrm>
           <a:prstGeom prst="rect">
             <a:avLst/>
@@ -5965,56 +6743,165 @@
       </p:sp>
       <p:sp>
         <p:nvSpPr>
-          <p:cNvPr id="11" name="CasellaDiTesto 10">
+          <p:cNvPr id="4" name="Shape 6">
             <a:extLst>
               <a:ext uri="{FF2B5EF4-FFF2-40B4-BE49-F238E27FC236}">
-                <a16:creationId xmlns:a16="http://schemas.microsoft.com/office/drawing/2014/main" id="{FFEF0797-2446-1161-4116-E64572D951EE}"/>
+                <a16:creationId xmlns:a16="http://schemas.microsoft.com/office/drawing/2014/main" id="{5180A067-EC8C-5AE6-E204-2D14688E0B83}"/>
               </a:ext>
             </a:extLst>
           </p:cNvPr>
-          <p:cNvSpPr txBox="1"/>
-          <p:nvPr/>
-        </p:nvSpPr>
-        <p:spPr>
-          <a:xfrm>
-            <a:off x="4712428" y="1932753"/>
-            <a:ext cx="1538150" cy="253916"/>
+          <p:cNvSpPr/>
+          <p:nvPr/>
+        </p:nvSpPr>
+        <p:spPr>
+          <a:xfrm>
+            <a:off x="129466" y="1205055"/>
+            <a:ext cx="4582962" cy="384048"/>
+          </a:xfrm>
+          <a:prstGeom prst="rect">
+            <a:avLst/>
+          </a:prstGeom>
+          <a:solidFill>
+            <a:srgbClr val="1E2D40"/>
+          </a:solidFill>
+          <a:ln w="12700">
+            <a:solidFill>
+              <a:srgbClr val="1E2D40"/>
+            </a:solidFill>
+            <a:prstDash val="solid"/>
+          </a:ln>
+        </p:spPr>
+        <p:txBody>
+          <a:bodyPr/>
+          <a:lstStyle/>
+          <a:p>
+            <a:endParaRPr lang="it-IT" dirty="0"/>
+          </a:p>
+        </p:txBody>
+      </p:sp>
+      <p:sp>
+        <p:nvSpPr>
+          <p:cNvPr id="7" name="Shape 6">
+            <a:extLst>
+              <a:ext uri="{FF2B5EF4-FFF2-40B4-BE49-F238E27FC236}">
+                <a16:creationId xmlns:a16="http://schemas.microsoft.com/office/drawing/2014/main" id="{1B561D4F-FA10-4007-36F2-B913EB68A8CF}"/>
+              </a:ext>
+            </a:extLst>
+          </p:cNvPr>
+          <p:cNvSpPr/>
+          <p:nvPr/>
+        </p:nvSpPr>
+        <p:spPr>
+          <a:xfrm>
+            <a:off x="4888776" y="1202749"/>
+            <a:ext cx="3804555" cy="384048"/>
+          </a:xfrm>
+          <a:prstGeom prst="rect">
+            <a:avLst/>
+          </a:prstGeom>
+          <a:solidFill>
+            <a:srgbClr val="1E2D40"/>
+          </a:solidFill>
+          <a:ln w="12700">
+            <a:solidFill>
+              <a:srgbClr val="1E2D40"/>
+            </a:solidFill>
+            <a:prstDash val="solid"/>
+          </a:ln>
+        </p:spPr>
+        <p:txBody>
+          <a:bodyPr/>
+          <a:lstStyle/>
+          <a:p>
+            <a:endParaRPr lang="it-IT" dirty="0"/>
+          </a:p>
+        </p:txBody>
+      </p:sp>
+      <p:sp>
+        <p:nvSpPr>
+          <p:cNvPr id="8" name="Text 7">
+            <a:extLst>
+              <a:ext uri="{FF2B5EF4-FFF2-40B4-BE49-F238E27FC236}">
+                <a16:creationId xmlns:a16="http://schemas.microsoft.com/office/drawing/2014/main" id="{3A1C5DC1-04D7-C368-2DFC-7B956C2406EB}"/>
+              </a:ext>
+            </a:extLst>
+          </p:cNvPr>
+          <p:cNvSpPr/>
+          <p:nvPr/>
+        </p:nvSpPr>
+        <p:spPr>
+          <a:xfrm>
+            <a:off x="209006" y="1208524"/>
+            <a:ext cx="1181026" cy="384048"/>
           </a:xfrm>
           <a:prstGeom prst="rect">
             <a:avLst/>
           </a:prstGeom>
           <a:noFill/>
-        </p:spPr>
-        <p:txBody>
-          <a:bodyPr wrap="square">
-            <a:spAutoFit/>
-          </a:bodyPr>
-          <a:lstStyle/>
-          <a:p>
-            <a:r>
-              <a:rPr lang="it-IT" sz="1050" dirty="0">
-                <a:solidFill>
-                  <a:srgbClr val="0D1B4B"/>
-                </a:solidFill>
-              </a:rPr>
-              <a:t>Nel </a:t>
-            </a:r>
-            <a:r>
-              <a:rPr lang="it-IT" sz="1050" dirty="0" err="1">
-                <a:solidFill>
-                  <a:srgbClr val="0D1B4B"/>
-                </a:solidFill>
-              </a:rPr>
-              <a:t>jupyter</a:t>
-            </a:r>
-            <a:r>
-              <a:rPr lang="it-IT" sz="1050" dirty="0">
-                <a:solidFill>
-                  <a:srgbClr val="0D1B4B"/>
-                </a:solidFill>
-              </a:rPr>
-              <a:t> notebook:</a:t>
-            </a:r>
+          <a:ln/>
+        </p:spPr>
+        <p:txBody>
+          <a:bodyPr wrap="square" lIns="0" tIns="0" rIns="0" bIns="0" rtlCol="0" anchor="ctr"/>
+          <a:lstStyle/>
+          <a:p>
+            <a:pPr marL="0" indent="0">
+              <a:buNone/>
+            </a:pPr>
+            <a:r>
+              <a:rPr lang="en-US" sz="1100" dirty="0">
+                <a:solidFill>
+                  <a:srgbClr val="02C39A"/>
+                </a:solidFill>
+                <a:latin typeface="Consolas" pitchFamily="34" charset="0"/>
+                <a:ea typeface="Consolas" pitchFamily="34" charset="-122"/>
+                <a:cs typeface="Consolas" pitchFamily="34" charset="-120"/>
+              </a:rPr>
+              <a:t>pca_engine.py</a:t>
+            </a:r>
+            <a:endParaRPr lang="en-US" sz="1100" dirty="0"/>
+          </a:p>
+        </p:txBody>
+      </p:sp>
+      <p:sp>
+        <p:nvSpPr>
+          <p:cNvPr id="14" name="Text 7">
+            <a:extLst>
+              <a:ext uri="{FF2B5EF4-FFF2-40B4-BE49-F238E27FC236}">
+                <a16:creationId xmlns:a16="http://schemas.microsoft.com/office/drawing/2014/main" id="{95172C9F-A163-13F3-8802-B846F8CD132F}"/>
+              </a:ext>
+            </a:extLst>
+          </p:cNvPr>
+          <p:cNvSpPr/>
+          <p:nvPr/>
+        </p:nvSpPr>
+        <p:spPr>
+          <a:xfrm>
+            <a:off x="4946508" y="1208524"/>
+            <a:ext cx="2854236" cy="384048"/>
+          </a:xfrm>
+          <a:prstGeom prst="rect">
+            <a:avLst/>
+          </a:prstGeom>
+          <a:noFill/>
+          <a:ln/>
+        </p:spPr>
+        <p:txBody>
+          <a:bodyPr wrap="square" lIns="0" tIns="0" rIns="0" bIns="0" rtlCol="0" anchor="ctr"/>
+          <a:lstStyle/>
+          <a:p>
+            <a:pPr marL="0" indent="0">
+              <a:buNone/>
+            </a:pPr>
+            <a:r>
+              <a:rPr lang="en-US" sz="1100" dirty="0">
+                <a:solidFill>
+                  <a:srgbClr val="02C39A"/>
+                </a:solidFill>
+                <a:latin typeface="Consolas" pitchFamily="34" charset="0"/>
+              </a:rPr>
+              <a:t>medical_image_svd_pca.ipynb</a:t>
+            </a:r>
+            <a:endParaRPr lang="en-US" sz="1100" dirty="0"/>
           </a:p>
         </p:txBody>
       </p:sp>
@@ -12306,12 +13193,14 @@
               </a:ext>
             </a:extLst>
           </p:cNvPr>
-          <p:cNvSpPr/>
-          <p:nvPr/>
-        </p:nvSpPr>
-        <p:spPr>
-          <a:xfrm>
-            <a:off x="102322" y="1200839"/>
+          <p:cNvSpPr>
+            <a:spLocks/>
+          </p:cNvSpPr>
+          <p:nvPr/>
+        </p:nvSpPr>
+        <p:spPr>
+          <a:xfrm>
+            <a:off x="121913" y="1852336"/>
             <a:ext cx="3968931" cy="2099787"/>
           </a:xfrm>
           <a:prstGeom prst="rect">
@@ -12354,24 +13243,24 @@
               </a:ext>
             </a:extLst>
           </p:cNvPr>
-          <p:cNvSpPr/>
-          <p:nvPr/>
-        </p:nvSpPr>
-        <p:spPr>
-          <a:xfrm>
-            <a:off x="102322" y="1117678"/>
-            <a:ext cx="3968931" cy="416372"/>
+          <p:cNvSpPr>
+            <a:spLocks/>
+          </p:cNvSpPr>
+          <p:nvPr/>
+        </p:nvSpPr>
+        <p:spPr>
+          <a:xfrm>
+            <a:off x="121913" y="1769175"/>
+            <a:ext cx="3988522" cy="416371"/>
           </a:xfrm>
           <a:prstGeom prst="rect">
             <a:avLst/>
           </a:prstGeom>
           <a:solidFill>
-            <a:srgbClr val="505E82"/>
+            <a:srgbClr val="0D1B4B"/>
           </a:solidFill>
           <a:ln w="12700">
-            <a:solidFill>
-              <a:srgbClr val="0D1B4B"/>
-            </a:solidFill>
+            <a:noFill/>
             <a:prstDash val="solid"/>
           </a:ln>
         </p:spPr>
@@ -12396,13 +13285,15 @@
               </a:ext>
             </a:extLst>
           </p:cNvPr>
-          <p:cNvSpPr/>
-          <p:nvPr/>
-        </p:nvSpPr>
-        <p:spPr>
-          <a:xfrm>
-            <a:off x="102322" y="1117678"/>
-            <a:ext cx="3988522" cy="416372"/>
+          <p:cNvSpPr>
+            <a:spLocks/>
+          </p:cNvSpPr>
+          <p:nvPr/>
+        </p:nvSpPr>
+        <p:spPr>
+          <a:xfrm>
+            <a:off x="1664423" y="1841946"/>
+            <a:ext cx="883909" cy="239097"/>
           </a:xfrm>
           <a:prstGeom prst="rect">
             <a:avLst/>
@@ -12418,7 +13309,7 @@
               <a:buNone/>
             </a:pPr>
             <a:r>
-              <a:rPr lang="en-US" sz="1600" b="1" dirty="0" err="1">
+              <a:rPr lang="en-US" sz="1600" b="1" dirty="0">
                 <a:solidFill>
                   <a:srgbClr val="FFFFFF"/>
                 </a:solidFill>
@@ -12441,12 +13332,14 @@
               </a:ext>
             </a:extLst>
           </p:cNvPr>
-          <p:cNvSpPr/>
-          <p:nvPr/>
-        </p:nvSpPr>
-        <p:spPr>
-          <a:xfrm>
-            <a:off x="304071" y="1687901"/>
+          <p:cNvSpPr>
+            <a:spLocks/>
+          </p:cNvSpPr>
+          <p:nvPr/>
+        </p:nvSpPr>
+        <p:spPr>
+          <a:xfrm>
+            <a:off x="323662" y="2339398"/>
             <a:ext cx="2117177" cy="303605"/>
           </a:xfrm>
           <a:prstGeom prst="rect">
@@ -12475,12 +13368,14 @@
               </a:ext>
             </a:extLst>
           </p:cNvPr>
-          <p:cNvSpPr/>
-          <p:nvPr/>
-        </p:nvSpPr>
-        <p:spPr>
-          <a:xfrm>
-            <a:off x="4855031" y="1567541"/>
+          <p:cNvSpPr>
+            <a:spLocks/>
+          </p:cNvSpPr>
+          <p:nvPr/>
+        </p:nvSpPr>
+        <p:spPr>
+          <a:xfrm>
+            <a:off x="4874622" y="2219038"/>
             <a:ext cx="4206240" cy="1733085"/>
           </a:xfrm>
           <a:prstGeom prst="rect">
@@ -12520,12 +13415,14 @@
               </a:ext>
             </a:extLst>
           </p:cNvPr>
-          <p:cNvSpPr/>
-          <p:nvPr/>
-        </p:nvSpPr>
-        <p:spPr>
-          <a:xfrm>
-            <a:off x="4846320" y="1117678"/>
+          <p:cNvSpPr>
+            <a:spLocks/>
+          </p:cNvSpPr>
+          <p:nvPr/>
+        </p:nvSpPr>
+        <p:spPr>
+          <a:xfrm>
+            <a:off x="4865911" y="1769175"/>
             <a:ext cx="4206240" cy="438912"/>
           </a:xfrm>
           <a:prstGeom prst="rect">
@@ -12558,12 +13455,14 @@
               </a:ext>
             </a:extLst>
           </p:cNvPr>
-          <p:cNvSpPr/>
-          <p:nvPr/>
-        </p:nvSpPr>
-        <p:spPr>
-          <a:xfrm>
-            <a:off x="4937760" y="1117678"/>
+          <p:cNvSpPr>
+            <a:spLocks/>
+          </p:cNvSpPr>
+          <p:nvPr/>
+        </p:nvSpPr>
+        <p:spPr>
+          <a:xfrm>
+            <a:off x="4957351" y="1769175"/>
             <a:ext cx="4023360" cy="438912"/>
           </a:xfrm>
           <a:prstGeom prst="rect">
@@ -12580,7 +13479,7 @@
               <a:buNone/>
             </a:pPr>
             <a:r>
-              <a:rPr lang="en-US" sz="1600" b="1" dirty="0" err="1">
+              <a:rPr lang="en-US" sz="1600" b="1" dirty="0">
                 <a:solidFill>
                   <a:srgbClr val="FFFFFF"/>
                 </a:solidFill>
@@ -12588,29 +13487,7 @@
                 <a:ea typeface="Calibri" pitchFamily="34" charset="-122"/>
                 <a:cs typeface="Calibri" pitchFamily="34" charset="-120"/>
               </a:rPr>
-              <a:t>Obiettivi</a:t>
-            </a:r>
-            <a:r>
-              <a:rPr lang="en-US" sz="1600" b="1" dirty="0">
-                <a:solidFill>
-                  <a:srgbClr val="FFFFFF"/>
-                </a:solidFill>
-                <a:latin typeface="Calibri" pitchFamily="34" charset="0"/>
-                <a:ea typeface="Calibri" pitchFamily="34" charset="-122"/>
-                <a:cs typeface="Calibri" pitchFamily="34" charset="-120"/>
-              </a:rPr>
-              <a:t> del </a:t>
-            </a:r>
-            <a:r>
-              <a:rPr lang="en-US" sz="1600" b="1" dirty="0" err="1">
-                <a:solidFill>
-                  <a:srgbClr val="FFFFFF"/>
-                </a:solidFill>
-                <a:latin typeface="Calibri" pitchFamily="34" charset="0"/>
-                <a:ea typeface="Calibri" pitchFamily="34" charset="-122"/>
-                <a:cs typeface="Calibri" pitchFamily="34" charset="-120"/>
-              </a:rPr>
-              <a:t>progetto</a:t>
+              <a:t>Obiettivi del progetto</a:t>
             </a:r>
             <a:endParaRPr lang="en-US" sz="1600" dirty="0"/>
           </a:p>
@@ -12625,13 +13502,15 @@
               </a:ext>
             </a:extLst>
           </p:cNvPr>
-          <p:cNvSpPr/>
-          <p:nvPr/>
-        </p:nvSpPr>
-        <p:spPr>
-          <a:xfrm>
-            <a:off x="5050244" y="1625652"/>
-            <a:ext cx="3773716" cy="841922"/>
+          <p:cNvSpPr>
+            <a:spLocks/>
+          </p:cNvSpPr>
+          <p:nvPr/>
+        </p:nvSpPr>
+        <p:spPr>
+          <a:xfrm>
+            <a:off x="5069835" y="2188300"/>
+            <a:ext cx="3773716" cy="738725"/>
           </a:xfrm>
           <a:prstGeom prst="rect">
             <a:avLst/>
@@ -12646,50 +13525,6 @@
             <a:pPr marL="0" indent="0" algn="just">
               <a:buNone/>
             </a:pPr>
-            <a:r>
-              <a:rPr lang="it-IT" sz="1200" b="1" dirty="0">
-                <a:solidFill>
-                  <a:srgbClr val="028090"/>
-                </a:solidFill>
-                <a:latin typeface="Calibri" pitchFamily="34" charset="0"/>
-                <a:ea typeface="Calibri" pitchFamily="34" charset="-122"/>
-                <a:cs typeface="Calibri" pitchFamily="34" charset="-120"/>
-              </a:rPr>
-              <a:t>Compressione (SVD): </a:t>
-            </a:r>
-            <a:r>
-              <a:rPr lang="it-IT" sz="1200" dirty="0">
-                <a:solidFill>
-                  <a:srgbClr val="028090"/>
-                </a:solidFill>
-                <a:latin typeface="Calibri" pitchFamily="34" charset="0"/>
-                <a:ea typeface="Calibri" pitchFamily="34" charset="-122"/>
-                <a:cs typeface="Calibri" pitchFamily="34" charset="-120"/>
-              </a:rPr>
-              <a:t>La </a:t>
-            </a:r>
-            <a:r>
-              <a:rPr lang="it-IT" sz="1200" b="1" dirty="0">
-                <a:solidFill>
-                  <a:srgbClr val="028090"/>
-                </a:solidFill>
-                <a:latin typeface="Calibri" pitchFamily="34" charset="0"/>
-                <a:ea typeface="Calibri" pitchFamily="34" charset="-122"/>
-                <a:cs typeface="Calibri" pitchFamily="34" charset="-120"/>
-              </a:rPr>
-              <a:t>SVD</a:t>
-            </a:r>
-            <a:r>
-              <a:rPr lang="it-IT" sz="1200" dirty="0">
-                <a:solidFill>
-                  <a:srgbClr val="028090"/>
-                </a:solidFill>
-                <a:latin typeface="Calibri" pitchFamily="34" charset="0"/>
-                <a:ea typeface="Calibri" pitchFamily="34" charset="-122"/>
-                <a:cs typeface="Calibri" pitchFamily="34" charset="-120"/>
-              </a:rPr>
-              <a:t> può comprimere le radiografie toraciche preservando le informazioni clinicamente rilevanti?</a:t>
-            </a:r>
             <a:endParaRPr lang="en-US" sz="1200" dirty="0"/>
           </a:p>
         </p:txBody>
@@ -12703,13 +13538,15 @@
               </a:ext>
             </a:extLst>
           </p:cNvPr>
-          <p:cNvSpPr txBox="1"/>
-          <p:nvPr/>
-        </p:nvSpPr>
-        <p:spPr>
-          <a:xfrm>
-            <a:off x="148042" y="1654336"/>
-            <a:ext cx="3417389" cy="523220"/>
+          <p:cNvSpPr txBox="1">
+            <a:spLocks/>
+          </p:cNvSpPr>
+          <p:nvPr/>
+        </p:nvSpPr>
+        <p:spPr>
+          <a:xfrm>
+            <a:off x="141808" y="2363882"/>
+            <a:ext cx="3405054" cy="646331"/>
           </a:xfrm>
           <a:prstGeom prst="rect">
             <a:avLst/>
@@ -12723,13 +13560,26 @@
           <a:lstStyle/>
           <a:p>
             <a:r>
-              <a:rPr lang="it-IT" sz="1400" b="1" dirty="0">
+              <a:rPr lang="it-IT" sz="1200" b="1" dirty="0">
                 <a:solidFill>
                   <a:srgbClr val="0D1B4B"/>
                 </a:solidFill>
               </a:rPr>
-              <a:t>Le radiografie ad alta risoluzione generano enormi moli di dati </a:t>
-            </a:r>
+              <a:t>Dominio Medico:</a:t>
+            </a:r>
+            <a:r>
+              <a:rPr lang="it-IT" sz="1200" dirty="0">
+                <a:solidFill>
+                  <a:srgbClr val="0D1B4B"/>
+                </a:solidFill>
+              </a:rPr>
+              <a:t> Le radiografie polmonari sono essenziali per il triage e la diagnosi di patologie respiratorie critiche.</a:t>
+            </a:r>
+            <a:endParaRPr lang="it-IT" sz="1200" b="1" dirty="0">
+              <a:solidFill>
+                <a:srgbClr val="0D1B4B"/>
+              </a:solidFill>
+            </a:endParaRPr>
           </a:p>
         </p:txBody>
       </p:sp>
@@ -12742,13 +13592,15 @@
               </a:ext>
             </a:extLst>
           </p:cNvPr>
-          <p:cNvSpPr/>
-          <p:nvPr/>
-        </p:nvSpPr>
-        <p:spPr>
-          <a:xfrm>
-            <a:off x="193762" y="2355450"/>
-            <a:ext cx="3417389" cy="523220"/>
+          <p:cNvSpPr>
+            <a:spLocks/>
+          </p:cNvSpPr>
+          <p:nvPr/>
+        </p:nvSpPr>
+        <p:spPr>
+          <a:xfrm>
+            <a:off x="213354" y="3161694"/>
+            <a:ext cx="3079074" cy="702340"/>
           </a:xfrm>
           <a:prstGeom prst="rect">
             <a:avLst/>
@@ -12761,45 +13613,21 @@
           <a:lstStyle/>
           <a:p>
             <a:r>
-              <a:rPr lang="en-US" sz="1200" b="1" dirty="0" err="1">
+              <a:rPr lang="it-IT" sz="1200" b="1" dirty="0">
                 <a:solidFill>
                   <a:srgbClr val="0D1B4B"/>
                 </a:solidFill>
-                <a:latin typeface="Calibri" pitchFamily="34" charset="0"/>
-                <a:ea typeface="Calibri" pitchFamily="34" charset="-122"/>
-                <a:cs typeface="Calibri" pitchFamily="34" charset="-120"/>
-              </a:rPr>
-              <a:t>Conseguenza</a:t>
-            </a:r>
-            <a:r>
-              <a:rPr lang="en-US" sz="1200" b="1" dirty="0">
+              </a:rPr>
+              <a:t>Il Problema dei Dati:</a:t>
+            </a:r>
+            <a:r>
+              <a:rPr lang="it-IT" sz="1200" dirty="0">
                 <a:solidFill>
                   <a:srgbClr val="0D1B4B"/>
                 </a:solidFill>
-                <a:latin typeface="Calibri" pitchFamily="34" charset="0"/>
-                <a:ea typeface="Calibri" pitchFamily="34" charset="-122"/>
-                <a:cs typeface="Calibri" pitchFamily="34" charset="-120"/>
-              </a:rPr>
-              <a:t>: </a:t>
-            </a:r>
-            <a:r>
-              <a:rPr lang="it-IT" sz="1200" dirty="0">
-                <a:solidFill>
-                  <a:srgbClr val="64748B"/>
-                </a:solidFill>
-              </a:rPr>
-              <a:t>Alta ridondanza spaziale e necessità di ottimizzazione</a:t>
-            </a:r>
-            <a:endParaRPr lang="en-US" sz="1200" dirty="0">
-              <a:solidFill>
-                <a:srgbClr val="64748B"/>
-              </a:solidFill>
-            </a:endParaRPr>
-          </a:p>
-          <a:p>
-            <a:pPr marL="0" indent="0">
-              <a:buNone/>
-            </a:pPr>
+              </a:rPr>
+              <a:t> Le immagini radiografiche sono matrici ad altissima dimensionalità. L'elaborazione diretta dei pixel grezzi è computazionalmente pesante</a:t>
+            </a:r>
             <a:endParaRPr lang="en-US" sz="1200" b="1" dirty="0">
               <a:solidFill>
                 <a:srgbClr val="0D1B4B"/>
@@ -12817,13 +13645,15 @@
               </a:ext>
             </a:extLst>
           </p:cNvPr>
-          <p:cNvSpPr/>
-          <p:nvPr/>
-        </p:nvSpPr>
-        <p:spPr>
-          <a:xfrm>
-            <a:off x="5050244" y="2182435"/>
-            <a:ext cx="3773716" cy="841922"/>
+          <p:cNvSpPr>
+            <a:spLocks/>
+          </p:cNvSpPr>
+          <p:nvPr/>
+        </p:nvSpPr>
+        <p:spPr>
+          <a:xfrm>
+            <a:off x="5045013" y="2242226"/>
+            <a:ext cx="3537284" cy="1391500"/>
           </a:xfrm>
           <a:prstGeom prst="rect">
             <a:avLst/>
@@ -12840,6 +13670,60 @@
                 <a:solidFill>
                   <a:srgbClr val="028090"/>
                 </a:solidFill>
+                <a:latin typeface="Calibri" pitchFamily="34" charset="0"/>
+                <a:ea typeface="Calibri" pitchFamily="34" charset="-122"/>
+                <a:cs typeface="Calibri" pitchFamily="34" charset="-120"/>
+              </a:rPr>
+              <a:t>Compressione (SVD): </a:t>
+            </a:r>
+            <a:r>
+              <a:rPr lang="it-IT" sz="1200" dirty="0">
+                <a:solidFill>
+                  <a:srgbClr val="028090"/>
+                </a:solidFill>
+                <a:latin typeface="Calibri" pitchFamily="34" charset="0"/>
+                <a:ea typeface="Calibri" pitchFamily="34" charset="-122"/>
+                <a:cs typeface="Calibri" pitchFamily="34" charset="-120"/>
+              </a:rPr>
+              <a:t>La </a:t>
+            </a:r>
+            <a:r>
+              <a:rPr lang="it-IT" sz="1200" b="1" dirty="0">
+                <a:solidFill>
+                  <a:srgbClr val="028090"/>
+                </a:solidFill>
+                <a:latin typeface="Calibri" pitchFamily="34" charset="0"/>
+                <a:ea typeface="Calibri" pitchFamily="34" charset="-122"/>
+                <a:cs typeface="Calibri" pitchFamily="34" charset="-120"/>
+              </a:rPr>
+              <a:t>SVD</a:t>
+            </a:r>
+            <a:r>
+              <a:rPr lang="it-IT" sz="1200" dirty="0">
+                <a:solidFill>
+                  <a:srgbClr val="028090"/>
+                </a:solidFill>
+                <a:latin typeface="Calibri" pitchFamily="34" charset="0"/>
+                <a:ea typeface="Calibri" pitchFamily="34" charset="-122"/>
+                <a:cs typeface="Calibri" pitchFamily="34" charset="-120"/>
+              </a:rPr>
+              <a:t> può comprimere le radiografie toraciche preservando le informazioni clinicamente rilevanti?</a:t>
+            </a:r>
+            <a:endParaRPr lang="en-US" sz="1200" dirty="0"/>
+          </a:p>
+          <a:p>
+            <a:br>
+              <a:rPr lang="it-IT" sz="1200" b="1" dirty="0">
+                <a:solidFill>
+                  <a:srgbClr val="028090"/>
+                </a:solidFill>
+              </a:rPr>
+            </a:br>
+            <a:r>
+              <a:rPr lang="it-IT" sz="1200" b="1" dirty="0">
+                <a:solidFill>
+                  <a:srgbClr val="028090"/>
+                </a:solidFill>
               </a:rPr>
               <a:t>Classificazione (PCA):</a:t>
             </a:r>
@@ -12872,7 +13756,7 @@
       </p:sp>
       <p:pic>
         <p:nvPicPr>
-          <p:cNvPr id="41" name="Elemento grafico 40" descr="Database con riempimento a tinta unita">
+          <p:cNvPr id="41" name="Elemento grafico 40" descr="Stethoscope">
             <a:extLst>
               <a:ext uri="{FF2B5EF4-FFF2-40B4-BE49-F238E27FC236}">
                 <a16:creationId xmlns:a16="http://schemas.microsoft.com/office/drawing/2014/main" id="{B96C1320-1210-606B-B69D-BC99BF88B19D}"/>
@@ -12887,6 +13771,9 @@
         <p:blipFill>
           <a:blip>
             <a:extLst>
+              <a:ext uri="{28A0092B-C50C-407E-A947-70E740481C1C}">
+                <a14:useLocalDpi xmlns:a14="http://schemas.microsoft.com/office/drawing/2010/main" val="0"/>
+              </a:ext>
               <a:ext uri="{96DAC541-7B7A-43D3-8B79-37D633B846F1}">
                 <asvg:svgBlip xmlns:asvg="http://schemas.microsoft.com/office/drawing/2016/SVG/main" r:embed="rId2"/>
               </a:ext>
@@ -12898,8 +13785,8 @@
         </p:blipFill>
         <p:spPr>
           <a:xfrm>
-            <a:off x="3430444" y="1556590"/>
-            <a:ext cx="660400" cy="660400"/>
+            <a:off x="3509639" y="2435655"/>
+            <a:ext cx="466574" cy="466574"/>
           </a:xfrm>
           <a:prstGeom prst="rect">
             <a:avLst/>
@@ -12934,8 +13821,116 @@
         </p:blipFill>
         <p:spPr>
           <a:xfrm flipH="1">
-            <a:off x="4056615" y="2008271"/>
+            <a:off x="4076206" y="2659768"/>
             <a:ext cx="818133" cy="818133"/>
+          </a:xfrm>
+          <a:prstGeom prst="rect">
+            <a:avLst/>
+          </a:prstGeom>
+        </p:spPr>
+      </p:pic>
+      <p:pic>
+        <p:nvPicPr>
+          <p:cNvPr id="6" name="Elemento grafico 5" descr="Database contorno">
+            <a:extLst>
+              <a:ext uri="{FF2B5EF4-FFF2-40B4-BE49-F238E27FC236}">
+                <a16:creationId xmlns:a16="http://schemas.microsoft.com/office/drawing/2014/main" id="{AA9C7609-2269-BC45-1053-6744CEFBD51A}"/>
+              </a:ext>
+            </a:extLst>
+          </p:cNvPr>
+          <p:cNvPicPr>
+            <a:picLocks noChangeAspect="1"/>
+          </p:cNvPicPr>
+          <p:nvPr/>
+        </p:nvPicPr>
+        <p:blipFill>
+          <a:blip>
+            <a:extLst>
+              <a:ext uri="{96DAC541-7B7A-43D3-8B79-37D633B846F1}">
+                <asvg:svgBlip xmlns:asvg="http://schemas.microsoft.com/office/drawing/2016/SVG/main" r:embed="rId4"/>
+              </a:ext>
+            </a:extLst>
+          </a:blip>
+          <a:stretch>
+            <a:fillRect/>
+          </a:stretch>
+        </p:blipFill>
+        <p:spPr>
+          <a:xfrm>
+            <a:off x="3448432" y="3255484"/>
+            <a:ext cx="530168" cy="530168"/>
+          </a:xfrm>
+          <a:prstGeom prst="rect">
+            <a:avLst/>
+          </a:prstGeom>
+        </p:spPr>
+      </p:pic>
+      <p:pic>
+        <p:nvPicPr>
+          <p:cNvPr id="8" name="Elemento grafico 7" descr="Priorità con riempimento a tinta unita">
+            <a:extLst>
+              <a:ext uri="{FF2B5EF4-FFF2-40B4-BE49-F238E27FC236}">
+                <a16:creationId xmlns:a16="http://schemas.microsoft.com/office/drawing/2014/main" id="{2B551850-2098-687C-4E42-99023C6E628A}"/>
+              </a:ext>
+            </a:extLst>
+          </p:cNvPr>
+          <p:cNvPicPr>
+            <a:picLocks noChangeAspect="1"/>
+          </p:cNvPicPr>
+          <p:nvPr/>
+        </p:nvPicPr>
+        <p:blipFill>
+          <a:blip>
+            <a:extLst>
+              <a:ext uri="{96DAC541-7B7A-43D3-8B79-37D633B846F1}">
+                <asvg:svgBlip xmlns:asvg="http://schemas.microsoft.com/office/drawing/2016/SVG/main" r:embed="rId5"/>
+              </a:ext>
+            </a:extLst>
+          </a:blip>
+          <a:stretch>
+            <a:fillRect/>
+          </a:stretch>
+        </p:blipFill>
+        <p:spPr>
+          <a:xfrm>
+            <a:off x="8472995" y="3085580"/>
+            <a:ext cx="519952" cy="519952"/>
+          </a:xfrm>
+          <a:prstGeom prst="rect">
+            <a:avLst/>
+          </a:prstGeom>
+        </p:spPr>
+      </p:pic>
+      <p:pic>
+        <p:nvPicPr>
+          <p:cNvPr id="10" name="Elemento grafico 9" descr="Grafico a barre con riempimento a tinta unita">
+            <a:extLst>
+              <a:ext uri="{FF2B5EF4-FFF2-40B4-BE49-F238E27FC236}">
+                <a16:creationId xmlns:a16="http://schemas.microsoft.com/office/drawing/2014/main" id="{A68B14DE-C534-C503-C04F-A1A49507C342}"/>
+              </a:ext>
+            </a:extLst>
+          </p:cNvPr>
+          <p:cNvPicPr>
+            <a:picLocks noChangeAspect="1"/>
+          </p:cNvPicPr>
+          <p:nvPr/>
+        </p:nvPicPr>
+        <p:blipFill>
+          <a:blip>
+            <a:extLst>
+              <a:ext uri="{96DAC541-7B7A-43D3-8B79-37D633B846F1}">
+                <asvg:svgBlip xmlns:asvg="http://schemas.microsoft.com/office/drawing/2016/SVG/main" r:embed="rId6"/>
+              </a:ext>
+            </a:extLst>
+          </a:blip>
+          <a:stretch>
+            <a:fillRect/>
+          </a:stretch>
+        </p:blipFill>
+        <p:spPr>
+          <a:xfrm>
+            <a:off x="8456974" y="2285053"/>
+            <a:ext cx="545218" cy="545218"/>
           </a:xfrm>
           <a:prstGeom prst="rect">
             <a:avLst/>
@@ -14562,7 +15557,7 @@
         <p:spPr>
           <a:xfrm>
             <a:off x="365760" y="566928"/>
-            <a:ext cx="6858000" cy="292608"/>
+            <a:ext cx="8020594" cy="292608"/>
           </a:xfrm>
           <a:prstGeom prst="rect">
             <a:avLst/>
@@ -14586,7 +15581,7 @@
                 <a:ea typeface="Calibri" pitchFamily="34" charset="-122"/>
                 <a:cs typeface="Calibri" pitchFamily="34" charset="-120"/>
               </a:rPr>
-              <a:t>4 classi diagnostiche — max 120 immagini per classe — 256×256 </a:t>
+              <a:t>4 </a:t>
             </a:r>
             <a:r>
               <a:rPr lang="en-US" sz="1100" i="1" dirty="0" err="1">
@@ -14597,8 +15592,57 @@
                 <a:ea typeface="Calibri" pitchFamily="34" charset="-122"/>
                 <a:cs typeface="Calibri" pitchFamily="34" charset="-120"/>
               </a:rPr>
-              <a:t>px</a:t>
-            </a:r>
+              <a:t>classi</a:t>
+            </a:r>
+            <a:r>
+              <a:rPr lang="en-US" sz="1100" i="1" dirty="0">
+                <a:solidFill>
+                  <a:srgbClr val="02C39A"/>
+                </a:solidFill>
+                <a:latin typeface="Calibri" pitchFamily="34" charset="0"/>
+                <a:ea typeface="Calibri" pitchFamily="34" charset="-122"/>
+                <a:cs typeface="Calibri" pitchFamily="34" charset="-120"/>
+              </a:rPr>
+              <a:t> </a:t>
+            </a:r>
+            <a:r>
+              <a:rPr lang="en-US" sz="1100" i="1" dirty="0" err="1">
+                <a:solidFill>
+                  <a:srgbClr val="02C39A"/>
+                </a:solidFill>
+                <a:latin typeface="Calibri" pitchFamily="34" charset="0"/>
+                <a:ea typeface="Calibri" pitchFamily="34" charset="-122"/>
+                <a:cs typeface="Calibri" pitchFamily="34" charset="-120"/>
+              </a:rPr>
+              <a:t>diagnostiche</a:t>
+            </a:r>
+            <a:r>
+              <a:rPr lang="en-US" sz="1100" i="1" dirty="0">
+                <a:solidFill>
+                  <a:srgbClr val="02C39A"/>
+                </a:solidFill>
+                <a:latin typeface="Calibri" pitchFamily="34" charset="0"/>
+                <a:ea typeface="Calibri" pitchFamily="34" charset="-122"/>
+                <a:cs typeface="Calibri" pitchFamily="34" charset="-120"/>
+              </a:rPr>
+              <a:t>: </a:t>
+            </a:r>
+            <a:r>
+              <a:rPr lang="it-IT" sz="1100" i="1" dirty="0">
+                <a:solidFill>
+                  <a:srgbClr val="02C39A"/>
+                </a:solidFill>
+                <a:latin typeface="Calibri" pitchFamily="34" charset="0"/>
+                <a:ea typeface="Calibri" pitchFamily="34" charset="-122"/>
+                <a:cs typeface="Calibri" pitchFamily="34" charset="-120"/>
+              </a:rPr>
+              <a:t>COVID ha toni medio-alti (opacità), la polmonite concentra toni scuri (addensamenti visibili).</a:t>
+            </a:r>
+          </a:p>
+          <a:p>
+            <a:pPr marL="0" indent="0">
+              <a:buNone/>
+            </a:pPr>
             <a:endParaRPr lang="en-US" sz="1100" dirty="0"/>
           </a:p>
         </p:txBody>
@@ -14625,59 +15669,14 @@
         </p:blipFill>
         <p:spPr>
           <a:xfrm>
-            <a:off x="717151" y="1078992"/>
-            <a:ext cx="7610421" cy="3491489"/>
+            <a:off x="0" y="978404"/>
+            <a:ext cx="9078686" cy="4165096"/>
           </a:xfrm>
           <a:prstGeom prst="rect">
             <a:avLst/>
           </a:prstGeom>
         </p:spPr>
       </p:pic>
-      <p:sp>
-        <p:nvSpPr>
-          <p:cNvPr id="41" name="CasellaDiTesto 40">
-            <a:extLst>
-              <a:ext uri="{FF2B5EF4-FFF2-40B4-BE49-F238E27FC236}">
-                <a16:creationId xmlns:a16="http://schemas.microsoft.com/office/drawing/2014/main" id="{73C7781D-04BA-29A7-10E8-BA5A51A13BC2}"/>
-              </a:ext>
-            </a:extLst>
-          </p:cNvPr>
-          <p:cNvSpPr txBox="1"/>
-          <p:nvPr/>
-        </p:nvSpPr>
-        <p:spPr>
-          <a:xfrm>
-            <a:off x="717151" y="4680209"/>
-            <a:ext cx="5568042" cy="261610"/>
-          </a:xfrm>
-          <a:prstGeom prst="rect">
-            <a:avLst/>
-          </a:prstGeom>
-          <a:noFill/>
-        </p:spPr>
-        <p:txBody>
-          <a:bodyPr wrap="square">
-            <a:spAutoFit/>
-          </a:bodyPr>
-          <a:lstStyle/>
-          <a:p>
-            <a:r>
-              <a:rPr lang="it-IT" sz="1100" b="1" i="0" dirty="0">
-                <a:solidFill>
-                  <a:srgbClr val="0D1B4B"/>
-                </a:solidFill>
-                <a:effectLst/>
-              </a:rPr>
-              <a:t>COVID ha toni medio-alti (opacità), la polmonite concentra toni scuri (addensamenti visibili).</a:t>
-            </a:r>
-            <a:endParaRPr lang="it-IT" sz="1100" b="1" dirty="0">
-              <a:solidFill>
-                <a:srgbClr val="0D1B4B"/>
-              </a:solidFill>
-            </a:endParaRPr>
-          </a:p>
-        </p:txBody>
-      </p:sp>
     </p:spTree>
   </p:cSld>
   <p:clrMapOvr>
@@ -14816,14 +15815,53 @@
       </p:sp>
       <p:sp>
         <p:nvSpPr>
-          <p:cNvPr id="6" name="Shape 4"/>
-          <p:cNvSpPr/>
-          <p:nvPr/>
-        </p:nvSpPr>
-        <p:spPr>
-          <a:xfrm>
-            <a:off x="832103" y="1479218"/>
-            <a:ext cx="2334535" cy="2845894"/>
+          <p:cNvPr id="11" name="Text 9"/>
+          <p:cNvSpPr/>
+          <p:nvPr/>
+        </p:nvSpPr>
+        <p:spPr>
+          <a:xfrm>
+            <a:off x="2063219" y="2530481"/>
+            <a:ext cx="456664" cy="540066"/>
+          </a:xfrm>
+          <a:prstGeom prst="rect">
+            <a:avLst/>
+          </a:prstGeom>
+          <a:noFill/>
+          <a:ln/>
+        </p:spPr>
+        <p:txBody>
+          <a:bodyPr wrap="square" lIns="0" tIns="0" rIns="0" bIns="0" rtlCol="0" anchor="ctr"/>
+          <a:lstStyle/>
+          <a:p>
+            <a:pPr marL="0" indent="0" algn="ctr">
+              <a:buNone/>
+            </a:pPr>
+            <a:r>
+              <a:rPr lang="en-US" sz="3200" dirty="0">
+                <a:solidFill>
+                  <a:srgbClr val="028090"/>
+                </a:solidFill>
+                <a:latin typeface="Calibri" pitchFamily="34" charset="0"/>
+                <a:ea typeface="Calibri" pitchFamily="34" charset="-122"/>
+                <a:cs typeface="Calibri" pitchFamily="34" charset="-120"/>
+              </a:rPr>
+              <a:t>▶</a:t>
+            </a:r>
+            <a:endParaRPr lang="en-US" sz="3200" dirty="0"/>
+          </a:p>
+        </p:txBody>
+      </p:sp>
+      <p:sp>
+        <p:nvSpPr>
+          <p:cNvPr id="12" name="Shape 10"/>
+          <p:cNvSpPr/>
+          <p:nvPr/>
+        </p:nvSpPr>
+        <p:spPr>
+          <a:xfrm>
+            <a:off x="4791376" y="1412368"/>
+            <a:ext cx="1937187" cy="2880360"/>
           </a:xfrm>
           <a:prstGeom prst="rect">
             <a:avLst/>
@@ -14855,14 +15893,14 @@
       </p:sp>
       <p:sp>
         <p:nvSpPr>
-          <p:cNvPr id="7" name="Shape 5"/>
-          <p:cNvSpPr/>
-          <p:nvPr/>
-        </p:nvSpPr>
-        <p:spPr>
-          <a:xfrm>
-            <a:off x="832103" y="1444751"/>
-            <a:ext cx="2334535" cy="616610"/>
+          <p:cNvPr id="13" name="Shape 11"/>
+          <p:cNvSpPr/>
+          <p:nvPr/>
+        </p:nvSpPr>
+        <p:spPr>
+          <a:xfrm>
+            <a:off x="4814236" y="1412367"/>
+            <a:ext cx="1937187" cy="624078"/>
           </a:xfrm>
           <a:prstGeom prst="rect">
             <a:avLst/>
@@ -14887,14 +15925,14 @@
       </p:sp>
       <p:sp>
         <p:nvSpPr>
-          <p:cNvPr id="8" name="Text 6"/>
-          <p:cNvSpPr/>
-          <p:nvPr/>
-        </p:nvSpPr>
-        <p:spPr>
-          <a:xfrm>
-            <a:off x="832103" y="1444751"/>
-            <a:ext cx="2334535" cy="616610"/>
+          <p:cNvPr id="14" name="Text 12"/>
+          <p:cNvSpPr/>
+          <p:nvPr/>
+        </p:nvSpPr>
+        <p:spPr>
+          <a:xfrm>
+            <a:off x="4814236" y="1412367"/>
+            <a:ext cx="1937187" cy="624078"/>
           </a:xfrm>
           <a:prstGeom prst="rect">
             <a:avLst/>
@@ -14909,131 +15947,87 @@
             <a:pPr marL="0" indent="0" algn="ctr">
               <a:buNone/>
             </a:pPr>
-            <a:r>
-              <a:rPr lang="en-US" sz="1200" b="1" dirty="0">
-                <a:solidFill>
-                  <a:srgbClr val="02C39A"/>
+            <a:endParaRPr lang="en-US" sz="1600" dirty="0"/>
+          </a:p>
+        </p:txBody>
+      </p:sp>
+      <p:sp>
+        <p:nvSpPr>
+          <p:cNvPr id="15" name="Text 13"/>
+          <p:cNvSpPr/>
+          <p:nvPr/>
+        </p:nvSpPr>
+        <p:spPr>
+          <a:xfrm>
+            <a:off x="4905677" y="1961007"/>
+            <a:ext cx="1759464" cy="540067"/>
+          </a:xfrm>
+          <a:prstGeom prst="rect">
+            <a:avLst/>
+          </a:prstGeom>
+          <a:noFill/>
+          <a:ln/>
+        </p:spPr>
+        <p:txBody>
+          <a:bodyPr wrap="square" lIns="0" tIns="0" rIns="0" bIns="0" rtlCol="0" anchor="ctr"/>
+          <a:lstStyle/>
+          <a:p>
+            <a:pPr marL="0" indent="0" algn="ctr">
+              <a:buNone/>
+            </a:pPr>
+            <a:endParaRPr lang="en-US" sz="1200" dirty="0"/>
+          </a:p>
+        </p:txBody>
+      </p:sp>
+      <p:sp>
+        <p:nvSpPr>
+          <p:cNvPr id="17" name="Text 15"/>
+          <p:cNvSpPr/>
+          <p:nvPr/>
+        </p:nvSpPr>
+        <p:spPr>
+          <a:xfrm>
+            <a:off x="6751423" y="2641329"/>
+            <a:ext cx="315920" cy="481252"/>
+          </a:xfrm>
+          <a:prstGeom prst="rect">
+            <a:avLst/>
+          </a:prstGeom>
+          <a:noFill/>
+          <a:ln/>
+        </p:spPr>
+        <p:txBody>
+          <a:bodyPr wrap="square" lIns="0" tIns="0" rIns="0" bIns="0" rtlCol="0" anchor="ctr"/>
+          <a:lstStyle/>
+          <a:p>
+            <a:pPr marL="0" indent="0" algn="ctr">
+              <a:buNone/>
+            </a:pPr>
+            <a:r>
+              <a:rPr lang="en-US" sz="3200" dirty="0">
+                <a:solidFill>
+                  <a:srgbClr val="028090"/>
                 </a:solidFill>
                 <a:latin typeface="Calibri" pitchFamily="34" charset="0"/>
                 <a:ea typeface="Calibri" pitchFamily="34" charset="-122"/>
                 <a:cs typeface="Calibri" pitchFamily="34" charset="-120"/>
               </a:rPr>
-              <a:t>STEP 1</a:t>
-            </a:r>
-            <a:endParaRPr lang="en-US" sz="1200" dirty="0"/>
-          </a:p>
-        </p:txBody>
-      </p:sp>
-      <p:sp>
-        <p:nvSpPr>
-          <p:cNvPr id="9" name="Text 7"/>
-          <p:cNvSpPr/>
-          <p:nvPr/>
-        </p:nvSpPr>
-        <p:spPr>
-          <a:xfrm>
-            <a:off x="923544" y="1993391"/>
-            <a:ext cx="2120358" cy="533605"/>
-          </a:xfrm>
-          <a:prstGeom prst="rect">
-            <a:avLst/>
-          </a:prstGeom>
-          <a:noFill/>
-          <a:ln/>
-        </p:spPr>
-        <p:txBody>
-          <a:bodyPr wrap="square" lIns="0" tIns="0" rIns="0" bIns="0" rtlCol="0" anchor="ctr"/>
-          <a:lstStyle/>
-          <a:p>
-            <a:pPr marL="0" indent="0" algn="ctr">
-              <a:buNone/>
-            </a:pPr>
-            <a:r>
-              <a:rPr lang="en-US" sz="1200" b="1" dirty="0" err="1">
-                <a:solidFill>
-                  <a:srgbClr val="0D1B4B"/>
-                </a:solidFill>
-                <a:latin typeface="Calibri" pitchFamily="34" charset="0"/>
-                <a:ea typeface="Calibri" pitchFamily="34" charset="-122"/>
-                <a:cs typeface="Calibri" pitchFamily="34" charset="-120"/>
-              </a:rPr>
-              <a:t>Standardizzazione</a:t>
-            </a:r>
-            <a:r>
-              <a:rPr lang="en-US" sz="1200" b="1" dirty="0">
-                <a:solidFill>
-                  <a:srgbClr val="0D1B4B"/>
-                </a:solidFill>
-                <a:latin typeface="Calibri" pitchFamily="34" charset="0"/>
-                <a:ea typeface="Calibri" pitchFamily="34" charset="-122"/>
-                <a:cs typeface="Calibri" pitchFamily="34" charset="-120"/>
-              </a:rPr>
-              <a:t> </a:t>
-            </a:r>
-            <a:r>
-              <a:rPr lang="en-US" sz="1200" b="1" dirty="0" err="1">
-                <a:solidFill>
-                  <a:srgbClr val="0D1B4B"/>
-                </a:solidFill>
-                <a:latin typeface="Calibri" pitchFamily="34" charset="0"/>
-                <a:ea typeface="Calibri" pitchFamily="34" charset="-122"/>
-                <a:cs typeface="Calibri" pitchFamily="34" charset="-120"/>
-              </a:rPr>
-              <a:t>spaziale</a:t>
-            </a:r>
-            <a:endParaRPr lang="en-US" sz="1200" dirty="0"/>
-          </a:p>
-        </p:txBody>
-      </p:sp>
-      <p:sp>
-        <p:nvSpPr>
-          <p:cNvPr id="11" name="Text 9"/>
-          <p:cNvSpPr/>
-          <p:nvPr/>
-        </p:nvSpPr>
-        <p:spPr>
-          <a:xfrm>
-            <a:off x="3256893" y="2308932"/>
-            <a:ext cx="160633" cy="415026"/>
-          </a:xfrm>
-          <a:prstGeom prst="rect">
-            <a:avLst/>
-          </a:prstGeom>
-          <a:noFill/>
-          <a:ln/>
-        </p:spPr>
-        <p:txBody>
-          <a:bodyPr wrap="square" lIns="0" tIns="0" rIns="0" bIns="0" rtlCol="0" anchor="ctr"/>
-          <a:lstStyle/>
-          <a:p>
-            <a:pPr marL="0" indent="0" algn="ctr">
-              <a:buNone/>
-            </a:pPr>
-            <a:r>
-              <a:rPr lang="en-US" sz="1400" dirty="0">
-                <a:solidFill>
-                  <a:srgbClr val="028090"/>
-                </a:solidFill>
-                <a:latin typeface="Calibri" pitchFamily="34" charset="0"/>
-                <a:ea typeface="Calibri" pitchFamily="34" charset="-122"/>
-                <a:cs typeface="Calibri" pitchFamily="34" charset="-120"/>
-              </a:rPr>
               <a:t>▶</a:t>
             </a:r>
-            <a:endParaRPr lang="en-US" sz="1400" dirty="0"/>
-          </a:p>
-        </p:txBody>
-      </p:sp>
-      <p:sp>
-        <p:nvSpPr>
-          <p:cNvPr id="12" name="Shape 10"/>
-          <p:cNvSpPr/>
-          <p:nvPr/>
-        </p:nvSpPr>
-        <p:spPr>
-          <a:xfrm>
-            <a:off x="3462060" y="1444752"/>
-            <a:ext cx="2334535" cy="2845894"/>
+            <a:endParaRPr lang="en-US" sz="3200" dirty="0"/>
+          </a:p>
+        </p:txBody>
+      </p:sp>
+      <p:sp>
+        <p:nvSpPr>
+          <p:cNvPr id="18" name="Shape 16"/>
+          <p:cNvSpPr/>
+          <p:nvPr/>
+        </p:nvSpPr>
+        <p:spPr>
+          <a:xfrm>
+            <a:off x="7056186" y="1412368"/>
+            <a:ext cx="1937187" cy="2880360"/>
           </a:xfrm>
           <a:prstGeom prst="rect">
             <a:avLst/>
@@ -15065,14 +16059,14 @@
       </p:sp>
       <p:sp>
         <p:nvSpPr>
-          <p:cNvPr id="13" name="Shape 11"/>
-          <p:cNvSpPr/>
-          <p:nvPr/>
-        </p:nvSpPr>
-        <p:spPr>
-          <a:xfrm>
-            <a:off x="3484920" y="1444751"/>
-            <a:ext cx="2334535" cy="616610"/>
+          <p:cNvPr id="19" name="Shape 17"/>
+          <p:cNvSpPr/>
+          <p:nvPr/>
+        </p:nvSpPr>
+        <p:spPr>
+          <a:xfrm>
+            <a:off x="7056186" y="1412367"/>
+            <a:ext cx="1937187" cy="624078"/>
           </a:xfrm>
           <a:prstGeom prst="rect">
             <a:avLst/>
@@ -15097,14 +16091,14 @@
       </p:sp>
       <p:sp>
         <p:nvSpPr>
-          <p:cNvPr id="14" name="Text 12"/>
-          <p:cNvSpPr/>
-          <p:nvPr/>
-        </p:nvSpPr>
-        <p:spPr>
-          <a:xfrm>
-            <a:off x="3484920" y="1444751"/>
-            <a:ext cx="2334535" cy="616610"/>
+          <p:cNvPr id="20" name="Text 18"/>
+          <p:cNvSpPr/>
+          <p:nvPr/>
+        </p:nvSpPr>
+        <p:spPr>
+          <a:xfrm>
+            <a:off x="7056186" y="1412367"/>
+            <a:ext cx="1937187" cy="624078"/>
           </a:xfrm>
           <a:prstGeom prst="rect">
             <a:avLst/>
@@ -15119,31 +16113,58 @@
             <a:pPr marL="0" indent="0" algn="ctr">
               <a:buNone/>
             </a:pPr>
-            <a:r>
-              <a:rPr lang="en-US" sz="1200" b="1" dirty="0">
-                <a:solidFill>
-                  <a:srgbClr val="02C39A"/>
-                </a:solidFill>
-                <a:latin typeface="Calibri" pitchFamily="34" charset="0"/>
-                <a:ea typeface="Calibri" pitchFamily="34" charset="-122"/>
-                <a:cs typeface="Calibri" pitchFamily="34" charset="-120"/>
-              </a:rPr>
-              <a:t>STEP 2</a:t>
-            </a:r>
-            <a:endParaRPr lang="en-US" sz="1200" dirty="0"/>
-          </a:p>
-        </p:txBody>
-      </p:sp>
-      <p:sp>
-        <p:nvSpPr>
-          <p:cNvPr id="15" name="Text 13"/>
-          <p:cNvSpPr/>
-          <p:nvPr/>
-        </p:nvSpPr>
-        <p:spPr>
-          <a:xfrm>
-            <a:off x="3576361" y="1993391"/>
-            <a:ext cx="2120358" cy="533605"/>
+            <a:endParaRPr lang="en-US" sz="1600" dirty="0"/>
+          </a:p>
+        </p:txBody>
+      </p:sp>
+      <p:sp>
+        <p:nvSpPr>
+          <p:cNvPr id="21" name="Text 19"/>
+          <p:cNvSpPr/>
+          <p:nvPr/>
+        </p:nvSpPr>
+        <p:spPr>
+          <a:xfrm>
+            <a:off x="7147627" y="1961007"/>
+            <a:ext cx="1759464" cy="540067"/>
+          </a:xfrm>
+          <a:prstGeom prst="rect">
+            <a:avLst/>
+          </a:prstGeom>
+          <a:noFill/>
+          <a:ln/>
+        </p:spPr>
+        <p:txBody>
+          <a:bodyPr wrap="square" lIns="0" tIns="0" rIns="0" bIns="0" rtlCol="0" anchor="ctr"/>
+          <a:lstStyle/>
+          <a:p>
+            <a:pPr algn="ctr"/>
+            <a:r>
+              <a:rPr lang="it-IT" sz="1200" b="1" dirty="0">
+                <a:solidFill>
+                  <a:srgbClr val="0D1B4B"/>
+                </a:solidFill>
+              </a:rPr>
+              <a:t>Normalizzazione e Centratura</a:t>
+            </a:r>
+            <a:endParaRPr lang="en-US" sz="1200" b="1" dirty="0">
+              <a:solidFill>
+                <a:srgbClr val="0D1B4B"/>
+              </a:solidFill>
+            </a:endParaRPr>
+          </a:p>
+        </p:txBody>
+      </p:sp>
+      <p:sp>
+        <p:nvSpPr>
+          <p:cNvPr id="23" name="Text 21"/>
+          <p:cNvSpPr/>
+          <p:nvPr/>
+        </p:nvSpPr>
+        <p:spPr>
+          <a:xfrm>
+            <a:off x="8991768" y="1958173"/>
+            <a:ext cx="133293" cy="420052"/>
           </a:xfrm>
           <a:prstGeom prst="rect">
             <a:avLst/>
@@ -15158,20 +16179,20 @@
             <a:pPr marL="0" indent="0" algn="ctr">
               <a:buNone/>
             </a:pPr>
-            <a:endParaRPr lang="en-US" sz="1200" dirty="0"/>
-          </a:p>
-        </p:txBody>
-      </p:sp>
-      <p:sp>
-        <p:nvSpPr>
-          <p:cNvPr id="17" name="Text 15"/>
-          <p:cNvSpPr/>
-          <p:nvPr/>
-        </p:nvSpPr>
-        <p:spPr>
-          <a:xfrm>
-            <a:off x="5919332" y="2317650"/>
-            <a:ext cx="160633" cy="415026"/>
+            <a:endParaRPr lang="en-US" sz="1400" dirty="0"/>
+          </a:p>
+        </p:txBody>
+      </p:sp>
+      <p:sp>
+        <p:nvSpPr>
+          <p:cNvPr id="28" name="Text 26"/>
+          <p:cNvSpPr/>
+          <p:nvPr/>
+        </p:nvSpPr>
+        <p:spPr>
+          <a:xfrm>
+            <a:off x="7193347" y="2501075"/>
+            <a:ext cx="1759464" cy="1628024"/>
           </a:xfrm>
           <a:prstGeom prst="rect">
             <a:avLst/>
@@ -15183,34 +16204,289 @@
           <a:bodyPr wrap="square" lIns="0" tIns="0" rIns="0" bIns="0" rtlCol="0" anchor="ctr"/>
           <a:lstStyle/>
           <a:p>
-            <a:pPr marL="0" indent="0" algn="ctr">
-              <a:buNone/>
+            <a:r>
+              <a:rPr lang="it-IT" sz="1100" b="1" i="1" dirty="0" err="1">
+                <a:solidFill>
+                  <a:srgbClr val="0D1B4B"/>
+                </a:solidFill>
+              </a:rPr>
+              <a:t>Flattening</a:t>
+            </a:r>
+            <a:r>
+              <a:rPr lang="it-IT" sz="1100" dirty="0">
+                <a:solidFill>
+                  <a:srgbClr val="0D1B4B"/>
+                </a:solidFill>
+              </a:rPr>
+              <a:t> (Vettore da 65.536 elementi) e sottrazione della media.</a:t>
+            </a:r>
+          </a:p>
+          <a:p>
+            <a:endParaRPr lang="it-IT" sz="1100" dirty="0">
+              <a:solidFill>
+                <a:srgbClr val="0D1B4B"/>
+              </a:solidFill>
+            </a:endParaRPr>
+          </a:p>
+          <a:p>
+            <a:r>
+              <a:rPr lang="it-IT" sz="1100" b="1" i="1" dirty="0">
+                <a:solidFill>
+                  <a:srgbClr val="0D1B4B"/>
+                </a:solidFill>
+              </a:rPr>
+              <a:t>Normalizzazione</a:t>
+            </a:r>
+            <a:r>
+              <a:rPr lang="it-IT" sz="1100" dirty="0">
+                <a:solidFill>
+                  <a:srgbClr val="0D1B4B"/>
+                </a:solidFill>
+              </a:rPr>
+              <a:t>: Mappatura dei valori di intensità dei pixel nel range continuo </a:t>
+            </a:r>
+            <a:r>
+              <a:rPr lang="it-IT" sz="1100" b="1" dirty="0">
+                <a:solidFill>
+                  <a:srgbClr val="0D1B4B"/>
+                </a:solidFill>
+              </a:rPr>
+              <a:t>[0, 1]</a:t>
+            </a:r>
+            <a:r>
+              <a:rPr lang="it-IT" sz="1100" dirty="0">
+                <a:solidFill>
+                  <a:srgbClr val="0D1B4B"/>
+                </a:solidFill>
+              </a:rPr>
+              <a:t>.</a:t>
+            </a:r>
+          </a:p>
+          <a:p>
+            <a:endParaRPr lang="it-IT" sz="1100" dirty="0">
+              <a:solidFill>
+                <a:srgbClr val="0D1B4B"/>
+              </a:solidFill>
+            </a:endParaRPr>
+          </a:p>
+          <a:p>
+            <a:endParaRPr lang="en-US" sz="1100" dirty="0">
+              <a:solidFill>
+                <a:srgbClr val="0D1B4B"/>
+              </a:solidFill>
+            </a:endParaRPr>
+          </a:p>
+        </p:txBody>
+      </p:sp>
+      <p:sp>
+        <p:nvSpPr>
+          <p:cNvPr id="36" name="Text 19">
+            <a:extLst>
+              <a:ext uri="{FF2B5EF4-FFF2-40B4-BE49-F238E27FC236}">
+                <a16:creationId xmlns:a16="http://schemas.microsoft.com/office/drawing/2014/main" id="{60961725-D9AD-3387-4C49-2894430F26A9}"/>
+              </a:ext>
+            </a:extLst>
+          </p:cNvPr>
+          <p:cNvSpPr/>
+          <p:nvPr/>
+        </p:nvSpPr>
+        <p:spPr>
+          <a:xfrm>
+            <a:off x="4814237" y="1950456"/>
+            <a:ext cx="1870540" cy="540067"/>
+          </a:xfrm>
+          <a:prstGeom prst="rect">
+            <a:avLst/>
+          </a:prstGeom>
+          <a:noFill/>
+          <a:ln/>
+        </p:spPr>
+        <p:txBody>
+          <a:bodyPr wrap="square" lIns="0" tIns="0" rIns="0" bIns="0" rtlCol="0" anchor="ctr"/>
+          <a:lstStyle/>
+          <a:p>
+            <a:pPr algn="ctr"/>
+            <a:r>
+              <a:rPr lang="it-IT" sz="1200" b="1" dirty="0">
+                <a:solidFill>
+                  <a:srgbClr val="0D1B4B"/>
+                </a:solidFill>
+              </a:rPr>
+              <a:t>Correzione dell’inclinazione</a:t>
+            </a:r>
+            <a:endParaRPr lang="en-US" sz="1200" b="1" dirty="0">
+              <a:solidFill>
+                <a:srgbClr val="0D1B4B"/>
+              </a:solidFill>
+            </a:endParaRPr>
+          </a:p>
+        </p:txBody>
+      </p:sp>
+      <p:sp>
+        <p:nvSpPr>
+          <p:cNvPr id="38" name="Text 14">
+            <a:extLst>
+              <a:ext uri="{FF2B5EF4-FFF2-40B4-BE49-F238E27FC236}">
+                <a16:creationId xmlns:a16="http://schemas.microsoft.com/office/drawing/2014/main" id="{A16E7144-B6A9-C7F4-B894-81441A97DAF5}"/>
+              </a:ext>
+            </a:extLst>
+          </p:cNvPr>
+          <p:cNvSpPr/>
+          <p:nvPr/>
+        </p:nvSpPr>
+        <p:spPr>
+          <a:xfrm>
+            <a:off x="4928537" y="2271903"/>
+            <a:ext cx="1759464" cy="1848231"/>
+          </a:xfrm>
+          <a:prstGeom prst="rect">
+            <a:avLst/>
+          </a:prstGeom>
+          <a:noFill/>
+          <a:ln/>
+        </p:spPr>
+        <p:txBody>
+          <a:bodyPr wrap="square" lIns="0" tIns="0" rIns="0" bIns="0" rtlCol="0" anchor="ctr"/>
+          <a:lstStyle/>
+          <a:p>
+            <a:pPr algn="l"/>
+            <a:r>
+              <a:rPr lang="it-IT" sz="1100" b="1" dirty="0">
+                <a:solidFill>
+                  <a:srgbClr val="0D1B4B"/>
+                </a:solidFill>
+              </a:rPr>
+              <a:t>Rilevamento</a:t>
+            </a:r>
+            <a:r>
+              <a:rPr lang="it-IT" sz="1100" dirty="0">
+                <a:solidFill>
+                  <a:srgbClr val="0D1B4B"/>
+                </a:solidFill>
+              </a:rPr>
+              <a:t> e </a:t>
+            </a:r>
+            <a:r>
+              <a:rPr lang="it-IT" sz="1100" b="1" dirty="0">
+                <a:solidFill>
+                  <a:srgbClr val="0D1B4B"/>
+                </a:solidFill>
+              </a:rPr>
+              <a:t>rotazione</a:t>
+            </a:r>
+            <a:r>
+              <a:rPr lang="it-IT" sz="1100" dirty="0">
+                <a:solidFill>
+                  <a:srgbClr val="0D1B4B"/>
+                </a:solidFill>
+              </a:rPr>
+              <a:t> automatica dell'inclinazione. </a:t>
+            </a:r>
+          </a:p>
+          <a:p>
+            <a:pPr algn="l"/>
+            <a:endParaRPr lang="it-IT" altLang="it-IT" sz="1100" dirty="0">
+              <a:solidFill>
+                <a:srgbClr val="0D1B4B"/>
+              </a:solidFill>
+            </a:endParaRPr>
+          </a:p>
+          <a:p>
+            <a:pPr lvl="0" eaLnBrk="0" fontAlgn="base" hangingPunct="0">
+              <a:spcBef>
+                <a:spcPct val="0"/>
+              </a:spcBef>
+              <a:spcAft>
+                <a:spcPct val="0"/>
+              </a:spcAft>
             </a:pPr>
             <a:r>
-              <a:rPr lang="en-US" sz="1400" dirty="0">
+              <a:rPr lang="it-IT" sz="1100" b="1" i="1" dirty="0">
+                <a:solidFill>
+                  <a:srgbClr val="0D1B4B"/>
+                </a:solidFill>
+              </a:rPr>
+              <a:t>Perché</a:t>
+            </a:r>
+            <a:r>
+              <a:rPr lang="it-IT" sz="1100" i="1" dirty="0">
+                <a:solidFill>
+                  <a:srgbClr val="0D1B4B"/>
+                </a:solidFill>
+              </a:rPr>
+              <a:t>:</a:t>
+            </a:r>
+            <a:r>
+              <a:rPr lang="it-IT" sz="1100" dirty="0">
+                <a:solidFill>
+                  <a:srgbClr val="0D1B4B"/>
+                </a:solidFill>
+              </a:rPr>
+              <a:t> La PCA è sensibile all'allineamento; radiografie storte creerebbero "falsa varianza".</a:t>
+            </a:r>
+            <a:endParaRPr lang="it-IT" altLang="it-IT" sz="1100" dirty="0">
+              <a:solidFill>
+                <a:srgbClr val="0D1B4B"/>
+              </a:solidFill>
+            </a:endParaRPr>
+          </a:p>
+        </p:txBody>
+      </p:sp>
+      <p:sp>
+        <p:nvSpPr>
+          <p:cNvPr id="24" name="CasellaDiTesto 23">
+            <a:extLst>
+              <a:ext uri="{FF2B5EF4-FFF2-40B4-BE49-F238E27FC236}">
+                <a16:creationId xmlns:a16="http://schemas.microsoft.com/office/drawing/2014/main" id="{DF6454D3-D0F3-FB4E-E0AA-4D0529EBBBE4}"/>
+              </a:ext>
+            </a:extLst>
+          </p:cNvPr>
+          <p:cNvSpPr txBox="1"/>
+          <p:nvPr/>
+        </p:nvSpPr>
+        <p:spPr>
+          <a:xfrm>
+            <a:off x="288456" y="569428"/>
+            <a:ext cx="5510892" cy="261610"/>
+          </a:xfrm>
+          <a:prstGeom prst="rect">
+            <a:avLst/>
+          </a:prstGeom>
+          <a:noFill/>
+        </p:spPr>
+        <p:txBody>
+          <a:bodyPr wrap="square">
+            <a:spAutoFit/>
+          </a:bodyPr>
+          <a:lstStyle/>
+          <a:p>
+            <a:r>
+              <a:rPr lang="it-IT" sz="1100" b="1" dirty="0">
                 <a:solidFill>
                   <a:srgbClr val="028090"/>
                 </a:solidFill>
-                <a:latin typeface="Calibri" pitchFamily="34" charset="0"/>
-                <a:ea typeface="Calibri" pitchFamily="34" charset="-122"/>
-                <a:cs typeface="Calibri" pitchFamily="34" charset="-120"/>
-              </a:rPr>
-              <a:t>▶</a:t>
-            </a:r>
-            <a:endParaRPr lang="en-US" sz="1400" dirty="0"/>
-          </a:p>
-        </p:txBody>
-      </p:sp>
-      <p:sp>
-        <p:nvSpPr>
-          <p:cNvPr id="18" name="Shape 16"/>
-          <p:cNvSpPr/>
-          <p:nvPr/>
-        </p:nvSpPr>
-        <p:spPr>
-          <a:xfrm>
-            <a:off x="6137738" y="1444752"/>
-            <a:ext cx="2334535" cy="2845894"/>
+              </a:rPr>
+              <a:t>Problema iniziale: Le immagini mediche grezze contenevano inclinazione e bordi incorretti</a:t>
+            </a:r>
+          </a:p>
+        </p:txBody>
+      </p:sp>
+      <p:sp>
+        <p:nvSpPr>
+          <p:cNvPr id="5" name="Shape 10">
+            <a:extLst>
+              <a:ext uri="{FF2B5EF4-FFF2-40B4-BE49-F238E27FC236}">
+                <a16:creationId xmlns:a16="http://schemas.microsoft.com/office/drawing/2014/main" id="{0B36CE44-39E2-7ECF-48BF-23569CE45FAD}"/>
+              </a:ext>
+            </a:extLst>
+          </p:cNvPr>
+          <p:cNvSpPr/>
+          <p:nvPr/>
+        </p:nvSpPr>
+        <p:spPr>
+          <a:xfrm>
+            <a:off x="103172" y="1433400"/>
+            <a:ext cx="1937187" cy="2880360"/>
           </a:xfrm>
           <a:prstGeom prst="rect">
             <a:avLst/>
@@ -15242,14 +16518,20 @@
       </p:sp>
       <p:sp>
         <p:nvSpPr>
-          <p:cNvPr id="19" name="Shape 17"/>
-          <p:cNvSpPr/>
-          <p:nvPr/>
-        </p:nvSpPr>
-        <p:spPr>
-          <a:xfrm>
-            <a:off x="6137738" y="1444751"/>
-            <a:ext cx="2334535" cy="616610"/>
+          <p:cNvPr id="10" name="Shape 11">
+            <a:extLst>
+              <a:ext uri="{FF2B5EF4-FFF2-40B4-BE49-F238E27FC236}">
+                <a16:creationId xmlns:a16="http://schemas.microsoft.com/office/drawing/2014/main" id="{F3F7F29F-5085-C0C3-D062-20552E9FA42D}"/>
+              </a:ext>
+            </a:extLst>
+          </p:cNvPr>
+          <p:cNvSpPr/>
+          <p:nvPr/>
+        </p:nvSpPr>
+        <p:spPr>
+          <a:xfrm>
+            <a:off x="126032" y="1433399"/>
+            <a:ext cx="1937187" cy="624078"/>
           </a:xfrm>
           <a:prstGeom prst="rect">
             <a:avLst/>
@@ -15274,14 +16556,20 @@
       </p:sp>
       <p:sp>
         <p:nvSpPr>
-          <p:cNvPr id="20" name="Text 18"/>
-          <p:cNvSpPr/>
-          <p:nvPr/>
-        </p:nvSpPr>
-        <p:spPr>
-          <a:xfrm>
-            <a:off x="6137738" y="1444751"/>
-            <a:ext cx="2334535" cy="616610"/>
+          <p:cNvPr id="16" name="Text 12">
+            <a:extLst>
+              <a:ext uri="{FF2B5EF4-FFF2-40B4-BE49-F238E27FC236}">
+                <a16:creationId xmlns:a16="http://schemas.microsoft.com/office/drawing/2014/main" id="{E1C09EEF-1157-51C0-C4B1-91715498ADDF}"/>
+              </a:ext>
+            </a:extLst>
+          </p:cNvPr>
+          <p:cNvSpPr/>
+          <p:nvPr/>
+        </p:nvSpPr>
+        <p:spPr>
+          <a:xfrm>
+            <a:off x="126032" y="1433399"/>
+            <a:ext cx="1937187" cy="624078"/>
           </a:xfrm>
           <a:prstGeom prst="rect">
             <a:avLst/>
@@ -15296,31 +16584,26 @@
             <a:pPr marL="0" indent="0" algn="ctr">
               <a:buNone/>
             </a:pPr>
-            <a:r>
-              <a:rPr lang="en-US" sz="1200" b="1" dirty="0">
-                <a:solidFill>
-                  <a:srgbClr val="02C39A"/>
-                </a:solidFill>
-                <a:latin typeface="Calibri" pitchFamily="34" charset="0"/>
-                <a:ea typeface="Calibri" pitchFamily="34" charset="-122"/>
-                <a:cs typeface="Calibri" pitchFamily="34" charset="-120"/>
-              </a:rPr>
-              <a:t>STEP 3</a:t>
-            </a:r>
-            <a:endParaRPr lang="en-US" sz="1200" dirty="0"/>
-          </a:p>
-        </p:txBody>
-      </p:sp>
-      <p:sp>
-        <p:nvSpPr>
-          <p:cNvPr id="21" name="Text 19"/>
-          <p:cNvSpPr/>
-          <p:nvPr/>
-        </p:nvSpPr>
-        <p:spPr>
-          <a:xfrm>
-            <a:off x="6229179" y="1993391"/>
-            <a:ext cx="2120358" cy="533605"/>
+            <a:endParaRPr lang="en-US" sz="1600" dirty="0"/>
+          </a:p>
+        </p:txBody>
+      </p:sp>
+      <p:sp>
+        <p:nvSpPr>
+          <p:cNvPr id="22" name="Text 13">
+            <a:extLst>
+              <a:ext uri="{FF2B5EF4-FFF2-40B4-BE49-F238E27FC236}">
+                <a16:creationId xmlns:a16="http://schemas.microsoft.com/office/drawing/2014/main" id="{CC5488AA-3E9E-48FE-0E8D-7949FCB2F955}"/>
+              </a:ext>
+            </a:extLst>
+          </p:cNvPr>
+          <p:cNvSpPr/>
+          <p:nvPr/>
+        </p:nvSpPr>
+        <p:spPr>
+          <a:xfrm>
+            <a:off x="217473" y="1982039"/>
+            <a:ext cx="1759464" cy="540067"/>
           </a:xfrm>
           <a:prstGeom prst="rect">
             <a:avLst/>
@@ -15332,6 +16615,40 @@
           <a:bodyPr wrap="square" lIns="0" tIns="0" rIns="0" bIns="0" rtlCol="0" anchor="ctr"/>
           <a:lstStyle/>
           <a:p>
+            <a:pPr marL="0" indent="0" algn="ctr">
+              <a:buNone/>
+            </a:pPr>
+            <a:endParaRPr lang="en-US" sz="1200" dirty="0"/>
+          </a:p>
+        </p:txBody>
+      </p:sp>
+      <p:sp>
+        <p:nvSpPr>
+          <p:cNvPr id="25" name="Text 19">
+            <a:extLst>
+              <a:ext uri="{FF2B5EF4-FFF2-40B4-BE49-F238E27FC236}">
+                <a16:creationId xmlns:a16="http://schemas.microsoft.com/office/drawing/2014/main" id="{1FA43306-5854-3FDC-DC40-64CE2F4EF2FE}"/>
+              </a:ext>
+            </a:extLst>
+          </p:cNvPr>
+          <p:cNvSpPr/>
+          <p:nvPr/>
+        </p:nvSpPr>
+        <p:spPr>
+          <a:xfrm>
+            <a:off x="197837" y="2106838"/>
+            <a:ext cx="1696236" cy="321447"/>
+          </a:xfrm>
+          <a:prstGeom prst="rect">
+            <a:avLst/>
+          </a:prstGeom>
+          <a:noFill/>
+          <a:ln/>
+        </p:spPr>
+        <p:txBody>
+          <a:bodyPr wrap="square" lIns="0" tIns="0" rIns="0" bIns="0" rtlCol="0" anchor="ctr"/>
+          <a:lstStyle/>
+          <a:p>
             <a:pPr algn="ctr"/>
             <a:r>
               <a:rPr lang="it-IT" sz="1200" b="1" dirty="0">
@@ -15339,7 +16656,7 @@
                   <a:srgbClr val="0D1B4B"/>
                 </a:solidFill>
               </a:rPr>
-              <a:t>Normalizzazione e Centratura</a:t>
+              <a:t>Filtraggio e validazione</a:t>
             </a:r>
             <a:endParaRPr lang="en-US" sz="1200" b="1" dirty="0">
               <a:solidFill>
@@ -15351,14 +16668,20 @@
       </p:sp>
       <p:sp>
         <p:nvSpPr>
-          <p:cNvPr id="23" name="Text 21"/>
-          <p:cNvSpPr/>
-          <p:nvPr/>
-        </p:nvSpPr>
-        <p:spPr>
-          <a:xfrm>
-            <a:off x="8131131" y="2304287"/>
-            <a:ext cx="160633" cy="415026"/>
+          <p:cNvPr id="27" name="Text 14">
+            <a:extLst>
+              <a:ext uri="{FF2B5EF4-FFF2-40B4-BE49-F238E27FC236}">
+                <a16:creationId xmlns:a16="http://schemas.microsoft.com/office/drawing/2014/main" id="{6D0704E0-3FAC-03DC-9D7A-01DBAF2A4806}"/>
+              </a:ext>
+            </a:extLst>
+          </p:cNvPr>
+          <p:cNvSpPr/>
+          <p:nvPr/>
+        </p:nvSpPr>
+        <p:spPr>
+          <a:xfrm>
+            <a:off x="240333" y="2292935"/>
+            <a:ext cx="1759464" cy="1848231"/>
           </a:xfrm>
           <a:prstGeom prst="rect">
             <a:avLst/>
@@ -15370,122 +16693,223 @@
           <a:bodyPr wrap="square" lIns="0" tIns="0" rIns="0" bIns="0" rtlCol="0" anchor="ctr"/>
           <a:lstStyle/>
           <a:p>
-            <a:pPr marL="0" indent="0" algn="ctr">
-              <a:buNone/>
-            </a:pPr>
-            <a:endParaRPr lang="en-US" sz="1400" dirty="0"/>
-          </a:p>
-        </p:txBody>
-      </p:sp>
-      <p:sp>
-        <p:nvSpPr>
-          <p:cNvPr id="28" name="Text 26"/>
-          <p:cNvSpPr/>
-          <p:nvPr/>
-        </p:nvSpPr>
-        <p:spPr>
-          <a:xfrm>
-            <a:off x="6274899" y="2421753"/>
-            <a:ext cx="2120358" cy="1555208"/>
-          </a:xfrm>
-          <a:prstGeom prst="rect">
-            <a:avLst/>
-          </a:prstGeom>
-          <a:noFill/>
-          <a:ln/>
-        </p:spPr>
-        <p:txBody>
-          <a:bodyPr wrap="square" lIns="0" tIns="0" rIns="0" bIns="0" rtlCol="0" anchor="ctr"/>
-          <a:lstStyle/>
-          <a:p>
-            <a:r>
-              <a:rPr lang="it-IT" sz="1100" b="1" i="1" dirty="0" err="1">
-                <a:solidFill>
-                  <a:srgbClr val="0D1B4B"/>
-                </a:solidFill>
-              </a:rPr>
-              <a:t>Flattening</a:t>
-            </a:r>
-            <a:r>
-              <a:rPr lang="it-IT" sz="1100" dirty="0">
-                <a:solidFill>
-                  <a:srgbClr val="0D1B4B"/>
-                </a:solidFill>
-              </a:rPr>
-              <a:t> (Vettore da 65.536 elementi) e sottrazione della media.</a:t>
-            </a:r>
-          </a:p>
-          <a:p>
-            <a:pPr lvl="0" eaLnBrk="0" fontAlgn="base" hangingPunct="0">
-              <a:spcBef>
-                <a:spcPct val="0"/>
-              </a:spcBef>
-              <a:spcAft>
-                <a:spcPct val="0"/>
-              </a:spcAft>
-            </a:pPr>
-            <a:r>
-              <a:rPr lang="it-IT" altLang="it-IT" sz="1100" b="1" i="1" dirty="0">
-                <a:solidFill>
-                  <a:srgbClr val="0D1B4B"/>
-                </a:solidFill>
-                <a:latin typeface="Google Sans Text"/>
-              </a:rPr>
-              <a:t>Perché</a:t>
-            </a:r>
-            <a:r>
-              <a:rPr lang="it-IT" altLang="it-IT" sz="1100" i="1" dirty="0">
-                <a:solidFill>
-                  <a:srgbClr val="0D1B4B"/>
-                </a:solidFill>
-                <a:latin typeface="Google Sans Text"/>
-              </a:rPr>
-              <a:t>:</a:t>
-            </a:r>
-            <a:r>
-              <a:rPr lang="it-IT" altLang="it-IT" sz="1100" dirty="0">
-                <a:solidFill>
-                  <a:srgbClr val="0D1B4B"/>
-                </a:solidFill>
-              </a:rPr>
-              <a:t> Preparare la matrice </a:t>
-            </a:r>
-            <a:r>
-              <a:rPr lang="it-IT" altLang="it-IT" sz="1100" dirty="0">
-                <a:solidFill>
-                  <a:srgbClr val="0D1B4B"/>
-                </a:solidFill>
-                <a:latin typeface="Google Sans Text"/>
-              </a:rPr>
-              <a:t>X</a:t>
-            </a:r>
-            <a:r>
-              <a:rPr lang="it-IT" altLang="it-IT" sz="1100" dirty="0">
-                <a:solidFill>
-                  <a:srgbClr val="0D1B4B"/>
-                </a:solidFill>
-              </a:rPr>
-              <a:t> per l'estrazione delle componenti principali.</a:t>
-            </a:r>
+            <a:pPr algn="l"/>
             <a:endParaRPr lang="it-IT" altLang="it-IT" sz="1100" dirty="0">
               <a:solidFill>
                 <a:srgbClr val="0D1B4B"/>
               </a:solidFill>
-              <a:latin typeface="Arial" panose="020B0604020202020204" pitchFamily="34" charset="0"/>
             </a:endParaRPr>
           </a:p>
-          <a:p>
-            <a:endParaRPr lang="en-US" sz="1100" dirty="0">
-              <a:solidFill>
-                <a:srgbClr val="0D1B4B"/>
-              </a:solidFill>
-            </a:endParaRPr>
-          </a:p>
-        </p:txBody>
-      </p:sp>
-      <p:sp>
-        <p:nvSpPr>
-          <p:cNvPr id="34" name="Text 14">
+        </p:txBody>
+      </p:sp>
+      <p:sp>
+        <p:nvSpPr>
+          <p:cNvPr id="37" name="Text 9">
+            <a:extLst>
+              <a:ext uri="{FF2B5EF4-FFF2-40B4-BE49-F238E27FC236}">
+                <a16:creationId xmlns:a16="http://schemas.microsoft.com/office/drawing/2014/main" id="{639639AD-186D-5C18-6F39-3D16BB13ECE8}"/>
+              </a:ext>
+            </a:extLst>
+          </p:cNvPr>
+          <p:cNvSpPr/>
+          <p:nvPr/>
+        </p:nvSpPr>
+        <p:spPr>
+          <a:xfrm>
+            <a:off x="4377339" y="2582515"/>
+            <a:ext cx="456664" cy="540066"/>
+          </a:xfrm>
+          <a:prstGeom prst="rect">
+            <a:avLst/>
+          </a:prstGeom>
+          <a:noFill/>
+          <a:ln/>
+        </p:spPr>
+        <p:txBody>
+          <a:bodyPr wrap="square" lIns="0" tIns="0" rIns="0" bIns="0" rtlCol="0" anchor="ctr"/>
+          <a:lstStyle/>
+          <a:p>
+            <a:pPr marL="0" indent="0" algn="ctr">
+              <a:buNone/>
+            </a:pPr>
+            <a:r>
+              <a:rPr lang="en-US" sz="3200" dirty="0">
+                <a:solidFill>
+                  <a:srgbClr val="028090"/>
+                </a:solidFill>
+                <a:latin typeface="Calibri" pitchFamily="34" charset="0"/>
+                <a:ea typeface="Calibri" pitchFamily="34" charset="-122"/>
+                <a:cs typeface="Calibri" pitchFamily="34" charset="-120"/>
+              </a:rPr>
+              <a:t>▶</a:t>
+            </a:r>
+            <a:endParaRPr lang="en-US" sz="3200" dirty="0"/>
+          </a:p>
+        </p:txBody>
+      </p:sp>
+      <p:sp>
+        <p:nvSpPr>
+          <p:cNvPr id="39" name="Shape 4"/>
+          <p:cNvSpPr/>
+          <p:nvPr/>
+        </p:nvSpPr>
+        <p:spPr>
+          <a:xfrm>
+            <a:off x="2463012" y="1446834"/>
+            <a:ext cx="1937187" cy="2880360"/>
+          </a:xfrm>
+          <a:prstGeom prst="rect">
+            <a:avLst/>
+          </a:prstGeom>
+          <a:solidFill>
+            <a:srgbClr val="FFFFFF"/>
+          </a:solidFill>
+          <a:ln w="6350">
+            <a:solidFill>
+              <a:srgbClr val="CBD5E1"/>
+            </a:solidFill>
+            <a:prstDash val="solid"/>
+          </a:ln>
+          <a:effectLst>
+            <a:outerShdw blurRad="101600" dist="38100" dir="8100000" algn="bl" rotWithShape="0">
+              <a:srgbClr val="000000">
+                <a:alpha val="10000"/>
+              </a:srgbClr>
+            </a:outerShdw>
+          </a:effectLst>
+        </p:spPr>
+        <p:txBody>
+          <a:bodyPr/>
+          <a:lstStyle/>
+          <a:p>
+            <a:endParaRPr lang="it-IT" dirty="0"/>
+          </a:p>
+        </p:txBody>
+      </p:sp>
+      <p:sp>
+        <p:nvSpPr>
+          <p:cNvPr id="40" name="Shape 5"/>
+          <p:cNvSpPr/>
+          <p:nvPr/>
+        </p:nvSpPr>
+        <p:spPr>
+          <a:xfrm>
+            <a:off x="2463012" y="1412367"/>
+            <a:ext cx="1937187" cy="624078"/>
+          </a:xfrm>
+          <a:prstGeom prst="rect">
+            <a:avLst/>
+          </a:prstGeom>
+          <a:solidFill>
+            <a:srgbClr val="0D1B4B"/>
+          </a:solidFill>
+          <a:ln w="12700">
+            <a:solidFill>
+              <a:srgbClr val="0D1B4B"/>
+            </a:solidFill>
+            <a:prstDash val="solid"/>
+          </a:ln>
+        </p:spPr>
+        <p:txBody>
+          <a:bodyPr/>
+          <a:lstStyle/>
+          <a:p>
+            <a:endParaRPr lang="it-IT" dirty="0"/>
+          </a:p>
+        </p:txBody>
+      </p:sp>
+      <p:sp>
+        <p:nvSpPr>
+          <p:cNvPr id="41" name="Text 6"/>
+          <p:cNvSpPr/>
+          <p:nvPr/>
+        </p:nvSpPr>
+        <p:spPr>
+          <a:xfrm>
+            <a:off x="2463012" y="1412367"/>
+            <a:ext cx="1937187" cy="624078"/>
+          </a:xfrm>
+          <a:prstGeom prst="rect">
+            <a:avLst/>
+          </a:prstGeom>
+          <a:noFill/>
+          <a:ln/>
+        </p:spPr>
+        <p:txBody>
+          <a:bodyPr wrap="square" lIns="0" tIns="0" rIns="0" bIns="0" rtlCol="0" anchor="ctr"/>
+          <a:lstStyle/>
+          <a:p>
+            <a:pPr marL="0" indent="0" algn="ctr">
+              <a:buNone/>
+            </a:pPr>
+            <a:endParaRPr lang="en-US" sz="1600" dirty="0"/>
+          </a:p>
+        </p:txBody>
+      </p:sp>
+      <p:sp>
+        <p:nvSpPr>
+          <p:cNvPr id="42" name="Text 7"/>
+          <p:cNvSpPr/>
+          <p:nvPr/>
+        </p:nvSpPr>
+        <p:spPr>
+          <a:xfrm>
+            <a:off x="2554453" y="1961007"/>
+            <a:ext cx="1759464" cy="540067"/>
+          </a:xfrm>
+          <a:prstGeom prst="rect">
+            <a:avLst/>
+          </a:prstGeom>
+          <a:noFill/>
+          <a:ln/>
+        </p:spPr>
+        <p:txBody>
+          <a:bodyPr wrap="square" lIns="0" tIns="0" rIns="0" bIns="0" rtlCol="0" anchor="ctr"/>
+          <a:lstStyle/>
+          <a:p>
+            <a:pPr marL="0" indent="0" algn="ctr">
+              <a:buNone/>
+            </a:pPr>
+            <a:r>
+              <a:rPr lang="en-US" sz="1200" b="1" dirty="0" err="1">
+                <a:solidFill>
+                  <a:srgbClr val="0D1B4B"/>
+                </a:solidFill>
+                <a:latin typeface="Calibri" pitchFamily="34" charset="0"/>
+                <a:ea typeface="Calibri" pitchFamily="34" charset="-122"/>
+                <a:cs typeface="Calibri" pitchFamily="34" charset="-120"/>
+              </a:rPr>
+              <a:t>Standardizzazione</a:t>
+            </a:r>
+            <a:r>
+              <a:rPr lang="en-US" sz="1200" b="1" dirty="0">
+                <a:solidFill>
+                  <a:srgbClr val="0D1B4B"/>
+                </a:solidFill>
+                <a:latin typeface="Calibri" pitchFamily="34" charset="0"/>
+                <a:ea typeface="Calibri" pitchFamily="34" charset="-122"/>
+                <a:cs typeface="Calibri" pitchFamily="34" charset="-120"/>
+              </a:rPr>
+              <a:t> </a:t>
+            </a:r>
+            <a:r>
+              <a:rPr lang="en-US" sz="1200" b="1" dirty="0" err="1">
+                <a:solidFill>
+                  <a:srgbClr val="0D1B4B"/>
+                </a:solidFill>
+                <a:latin typeface="Calibri" pitchFamily="34" charset="0"/>
+                <a:ea typeface="Calibri" pitchFamily="34" charset="-122"/>
+                <a:cs typeface="Calibri" pitchFamily="34" charset="-120"/>
+              </a:rPr>
+              <a:t>spaziale</a:t>
+            </a:r>
+            <a:endParaRPr lang="en-US" sz="1200" dirty="0"/>
+          </a:p>
+        </p:txBody>
+      </p:sp>
+      <p:sp>
+        <p:nvSpPr>
+          <p:cNvPr id="43" name="Text 14">
             <a:extLst>
               <a:ext uri="{FF2B5EF4-FFF2-40B4-BE49-F238E27FC236}">
                 <a16:creationId xmlns:a16="http://schemas.microsoft.com/office/drawing/2014/main" id="{A356B9A7-E817-A205-774E-1BBCE37F12A5}"/>
@@ -15497,8 +16921,8 @@
         </p:nvSpPr>
         <p:spPr>
           <a:xfrm>
-            <a:off x="969264" y="2397837"/>
-            <a:ext cx="2120358" cy="1586222"/>
+            <a:off x="2600173" y="2365453"/>
+            <a:ext cx="1759464" cy="1605432"/>
           </a:xfrm>
           <a:prstGeom prst="rect">
             <a:avLst/>
@@ -15593,10 +17017,10 @@
       </p:sp>
       <p:sp>
         <p:nvSpPr>
-          <p:cNvPr id="36" name="Text 19">
+          <p:cNvPr id="44" name="Text 14">
             <a:extLst>
               <a:ext uri="{FF2B5EF4-FFF2-40B4-BE49-F238E27FC236}">
-                <a16:creationId xmlns:a16="http://schemas.microsoft.com/office/drawing/2014/main" id="{60961725-D9AD-3387-4C49-2894430F26A9}"/>
+                <a16:creationId xmlns:a16="http://schemas.microsoft.com/office/drawing/2014/main" id="{EEE10183-B31D-6F61-4075-C84852F47774}"/>
               </a:ext>
             </a:extLst>
           </p:cNvPr>
@@ -15605,8 +17029,8 @@
         </p:nvSpPr>
         <p:spPr>
           <a:xfrm>
-            <a:off x="3484921" y="1982840"/>
-            <a:ext cx="2254218" cy="533605"/>
+            <a:off x="209221" y="2841570"/>
+            <a:ext cx="1759464" cy="708895"/>
           </a:xfrm>
           <a:prstGeom prst="rect">
             <a:avLst/>
@@ -15618,170 +17042,77 @@
           <a:bodyPr wrap="square" lIns="0" tIns="0" rIns="0" bIns="0" rtlCol="0" anchor="ctr"/>
           <a:lstStyle/>
           <a:p>
-            <a:pPr algn="ctr"/>
-            <a:r>
-              <a:rPr lang="it-IT" sz="1200" b="1" dirty="0">
+            <a:r>
+              <a:rPr lang="it-IT" sz="1100" b="1" dirty="0">
                 <a:solidFill>
                   <a:srgbClr val="0D1B4B"/>
                 </a:solidFill>
               </a:rPr>
-              <a:t>Correzione del Tilt</a:t>
-            </a:r>
-            <a:endParaRPr lang="en-US" sz="1200" b="1" dirty="0">
+              <a:t>Scarto</a:t>
+            </a:r>
+            <a:r>
+              <a:rPr lang="it-IT" sz="1100" dirty="0">
+                <a:solidFill>
+                  <a:srgbClr val="0D1B4B"/>
+                </a:solidFill>
+              </a:rPr>
+              <a:t> automatico di radiografie laterali, file </a:t>
+            </a:r>
+            <a:r>
+              <a:rPr lang="it-IT" sz="1100" b="1" dirty="0">
+                <a:solidFill>
+                  <a:srgbClr val="0D1B4B"/>
+                </a:solidFill>
+              </a:rPr>
+              <a:t>corrotti</a:t>
+            </a:r>
+            <a:r>
+              <a:rPr lang="it-IT" sz="1100" dirty="0">
+                <a:solidFill>
+                  <a:srgbClr val="0D1B4B"/>
+                </a:solidFill>
+              </a:rPr>
+              <a:t> e immagini con </a:t>
+            </a:r>
+            <a:r>
+              <a:rPr lang="it-IT" sz="1100" b="1" dirty="0">
+                <a:solidFill>
+                  <a:srgbClr val="0D1B4B"/>
+                </a:solidFill>
+              </a:rPr>
+              <a:t>inclinazioni</a:t>
+            </a:r>
+            <a:r>
+              <a:rPr lang="it-IT" sz="1100" dirty="0">
+                <a:solidFill>
+                  <a:srgbClr val="0D1B4B"/>
+                </a:solidFill>
+              </a:rPr>
+              <a:t> irrecuperabili (&gt; 10°).</a:t>
+            </a:r>
+          </a:p>
+          <a:p>
+            <a:endParaRPr lang="it-IT" sz="1100" dirty="0">
               <a:solidFill>
                 <a:srgbClr val="0D1B4B"/>
               </a:solidFill>
             </a:endParaRPr>
           </a:p>
-        </p:txBody>
-      </p:sp>
-      <p:sp>
-        <p:nvSpPr>
-          <p:cNvPr id="38" name="Text 14">
-            <a:extLst>
-              <a:ext uri="{FF2B5EF4-FFF2-40B4-BE49-F238E27FC236}">
-                <a16:creationId xmlns:a16="http://schemas.microsoft.com/office/drawing/2014/main" id="{A16E7144-B6A9-C7F4-B894-81441A97DAF5}"/>
-              </a:ext>
-            </a:extLst>
-          </p:cNvPr>
-          <p:cNvSpPr/>
-          <p:nvPr/>
-        </p:nvSpPr>
-        <p:spPr>
-          <a:xfrm>
-            <a:off x="3599221" y="2304287"/>
-            <a:ext cx="2120358" cy="1826115"/>
-          </a:xfrm>
-          <a:prstGeom prst="rect">
-            <a:avLst/>
-          </a:prstGeom>
-          <a:noFill/>
-          <a:ln/>
-        </p:spPr>
-        <p:txBody>
-          <a:bodyPr wrap="square" lIns="0" tIns="0" rIns="0" bIns="0" rtlCol="0" anchor="ctr"/>
-          <a:lstStyle/>
-          <a:p>
-            <a:pPr algn="l"/>
-            <a:r>
-              <a:rPr lang="it-IT" sz="1100" dirty="0">
-                <a:solidFill>
-                  <a:srgbClr val="0D1B4B"/>
-                </a:solidFill>
-              </a:rPr>
-              <a:t>Rilevamento e rotazione automatica dell'inclinazione. </a:t>
-            </a:r>
-            <a:r>
-              <a:rPr lang="it-IT" sz="1100" b="0" i="0" dirty="0">
-                <a:solidFill>
-                  <a:srgbClr val="0D1B4B"/>
-                </a:solidFill>
-                <a:effectLst/>
-              </a:rPr>
-              <a:t>Scarto immagini laterali o pesantemente ruotate (&gt;10 gradi).</a:t>
-            </a:r>
-          </a:p>
-          <a:p>
-            <a:pPr lvl="0" eaLnBrk="0" fontAlgn="base" hangingPunct="0">
-              <a:spcBef>
-                <a:spcPct val="0"/>
-              </a:spcBef>
-              <a:spcAft>
-                <a:spcPct val="0"/>
-              </a:spcAft>
-            </a:pPr>
-            <a:endParaRPr lang="it-IT" altLang="it-IT" sz="1100" dirty="0">
+          <a:p>
+            <a:endParaRPr lang="en-US" sz="1100" dirty="0">
               <a:solidFill>
                 <a:srgbClr val="0D1B4B"/>
               </a:solidFill>
             </a:endParaRPr>
           </a:p>
-          <a:p>
-            <a:pPr lvl="0" eaLnBrk="0" fontAlgn="base" hangingPunct="0">
-              <a:spcBef>
-                <a:spcPct val="0"/>
-              </a:spcBef>
-              <a:spcAft>
-                <a:spcPct val="0"/>
-              </a:spcAft>
-            </a:pPr>
-            <a:r>
-              <a:rPr lang="it-IT" sz="1100" b="1" i="1" dirty="0">
-                <a:solidFill>
-                  <a:srgbClr val="0D1B4B"/>
-                </a:solidFill>
-              </a:rPr>
-              <a:t>Perché</a:t>
-            </a:r>
-            <a:r>
-              <a:rPr lang="it-IT" sz="1100" i="1" dirty="0">
-                <a:solidFill>
-                  <a:srgbClr val="0D1B4B"/>
-                </a:solidFill>
-              </a:rPr>
-              <a:t>:</a:t>
-            </a:r>
-            <a:r>
-              <a:rPr lang="it-IT" sz="1100" dirty="0">
-                <a:solidFill>
-                  <a:srgbClr val="0D1B4B"/>
-                </a:solidFill>
-              </a:rPr>
-              <a:t> La PCA è sensibile all'allineamento; radiografie storte creerebbero "falsa varianza".</a:t>
-            </a:r>
-            <a:endParaRPr lang="it-IT" altLang="it-IT" sz="1100" dirty="0">
-              <a:solidFill>
-                <a:srgbClr val="0D1B4B"/>
-              </a:solidFill>
-            </a:endParaRPr>
-          </a:p>
-        </p:txBody>
-      </p:sp>
-      <p:sp>
-        <p:nvSpPr>
-          <p:cNvPr id="24" name="CasellaDiTesto 23">
+        </p:txBody>
+      </p:sp>
+      <p:pic>
+        <p:nvPicPr>
+          <p:cNvPr id="48" name="Elemento grafico 47" descr="Badge 1 con riempimento a tinta unita">
             <a:extLst>
               <a:ext uri="{FF2B5EF4-FFF2-40B4-BE49-F238E27FC236}">
-                <a16:creationId xmlns:a16="http://schemas.microsoft.com/office/drawing/2014/main" id="{DF6454D3-D0F3-FB4E-E0AA-4D0529EBBBE4}"/>
-              </a:ext>
-            </a:extLst>
-          </p:cNvPr>
-          <p:cNvSpPr txBox="1"/>
-          <p:nvPr/>
-        </p:nvSpPr>
-        <p:spPr>
-          <a:xfrm>
-            <a:off x="1712868" y="1057588"/>
-            <a:ext cx="5510892" cy="261610"/>
-          </a:xfrm>
-          <a:prstGeom prst="rect">
-            <a:avLst/>
-          </a:prstGeom>
-          <a:noFill/>
-        </p:spPr>
-        <p:txBody>
-          <a:bodyPr wrap="square">
-            <a:spAutoFit/>
-          </a:bodyPr>
-          <a:lstStyle/>
-          <a:p>
-            <a:r>
-              <a:rPr lang="it-IT" sz="1100" b="1" dirty="0">
-                <a:solidFill>
-                  <a:srgbClr val="0D1B4B"/>
-                </a:solidFill>
-              </a:rPr>
-              <a:t>Problema iniziale: Le immagini mediche grezze contenevano inclinazione e bordi incorretti</a:t>
-            </a:r>
-          </a:p>
-        </p:txBody>
-      </p:sp>
-      <p:pic>
-        <p:nvPicPr>
-          <p:cNvPr id="26" name="Immagine 25">
-            <a:extLst>
-              <a:ext uri="{FF2B5EF4-FFF2-40B4-BE49-F238E27FC236}">
-                <a16:creationId xmlns:a16="http://schemas.microsoft.com/office/drawing/2014/main" id="{CE1F1071-A53E-FDD3-DBE6-BB965429E0C7}"/>
+                <a16:creationId xmlns:a16="http://schemas.microsoft.com/office/drawing/2014/main" id="{B63065C7-5CF5-6BD2-2233-83164220D182}"/>
               </a:ext>
             </a:extLst>
           </p:cNvPr>
@@ -15791,15 +17122,129 @@
           <p:nvPr/>
         </p:nvPicPr>
         <p:blipFill>
-          <a:blip r:embed="rId3"/>
+          <a:blip>
+            <a:extLst>
+              <a:ext uri="{96DAC541-7B7A-43D3-8B79-37D633B846F1}">
+                <asvg:svgBlip xmlns:asvg="http://schemas.microsoft.com/office/drawing/2016/SVG/main" r:embed="rId3"/>
+              </a:ext>
+            </a:extLst>
+          </a:blip>
           <a:stretch>
             <a:fillRect/>
           </a:stretch>
         </p:blipFill>
         <p:spPr>
           <a:xfrm>
-            <a:off x="1999370" y="4380047"/>
-            <a:ext cx="4850259" cy="674489"/>
+            <a:off x="847350" y="1472950"/>
+            <a:ext cx="540067" cy="540067"/>
+          </a:xfrm>
+          <a:prstGeom prst="rect">
+            <a:avLst/>
+          </a:prstGeom>
+        </p:spPr>
+      </p:pic>
+      <p:pic>
+        <p:nvPicPr>
+          <p:cNvPr id="52" name="Elemento grafico 51" descr="Badge con riempimento a tinta unita">
+            <a:extLst>
+              <a:ext uri="{FF2B5EF4-FFF2-40B4-BE49-F238E27FC236}">
+                <a16:creationId xmlns:a16="http://schemas.microsoft.com/office/drawing/2014/main" id="{766A6417-DD39-A215-3998-DDB32AD04B51}"/>
+              </a:ext>
+            </a:extLst>
+          </p:cNvPr>
+          <p:cNvPicPr>
+            <a:picLocks noChangeAspect="1"/>
+          </p:cNvPicPr>
+          <p:nvPr/>
+        </p:nvPicPr>
+        <p:blipFill>
+          <a:blip>
+            <a:extLst>
+              <a:ext uri="{96DAC541-7B7A-43D3-8B79-37D633B846F1}">
+                <asvg:svgBlip xmlns:asvg="http://schemas.microsoft.com/office/drawing/2016/SVG/main" r:embed="rId4"/>
+              </a:ext>
+            </a:extLst>
+          </a:blip>
+          <a:stretch>
+            <a:fillRect/>
+          </a:stretch>
+        </p:blipFill>
+        <p:spPr>
+          <a:xfrm>
+            <a:off x="3203372" y="1466450"/>
+            <a:ext cx="553066" cy="553066"/>
+          </a:xfrm>
+          <a:prstGeom prst="rect">
+            <a:avLst/>
+          </a:prstGeom>
+        </p:spPr>
+      </p:pic>
+      <p:pic>
+        <p:nvPicPr>
+          <p:cNvPr id="54" name="Elemento grafico 53" descr="Badge 3 con riempimento a tinta unita">
+            <a:extLst>
+              <a:ext uri="{FF2B5EF4-FFF2-40B4-BE49-F238E27FC236}">
+                <a16:creationId xmlns:a16="http://schemas.microsoft.com/office/drawing/2014/main" id="{C494954C-7CF7-CDCD-C828-29F09920E696}"/>
+              </a:ext>
+            </a:extLst>
+          </p:cNvPr>
+          <p:cNvPicPr>
+            <a:picLocks noChangeAspect="1"/>
+          </p:cNvPicPr>
+          <p:nvPr/>
+        </p:nvPicPr>
+        <p:blipFill>
+          <a:blip>
+            <a:extLst>
+              <a:ext uri="{96DAC541-7B7A-43D3-8B79-37D633B846F1}">
+                <asvg:svgBlip xmlns:asvg="http://schemas.microsoft.com/office/drawing/2016/SVG/main" r:embed="rId5"/>
+              </a:ext>
+            </a:extLst>
+          </a:blip>
+          <a:stretch>
+            <a:fillRect/>
+          </a:stretch>
+        </p:blipFill>
+        <p:spPr>
+          <a:xfrm>
+            <a:off x="5512807" y="1456442"/>
+            <a:ext cx="573082" cy="573082"/>
+          </a:xfrm>
+          <a:prstGeom prst="rect">
+            <a:avLst/>
+          </a:prstGeom>
+        </p:spPr>
+      </p:pic>
+      <p:pic>
+        <p:nvPicPr>
+          <p:cNvPr id="56" name="Elemento grafico 55" descr="Badge 4 con riempimento a tinta unita">
+            <a:extLst>
+              <a:ext uri="{FF2B5EF4-FFF2-40B4-BE49-F238E27FC236}">
+                <a16:creationId xmlns:a16="http://schemas.microsoft.com/office/drawing/2014/main" id="{BF172172-20C7-5E00-8326-1042DFB5D79F}"/>
+              </a:ext>
+            </a:extLst>
+          </p:cNvPr>
+          <p:cNvPicPr>
+            <a:picLocks noChangeAspect="1"/>
+          </p:cNvPicPr>
+          <p:nvPr/>
+        </p:nvPicPr>
+        <p:blipFill>
+          <a:blip>
+            <a:extLst>
+              <a:ext uri="{96DAC541-7B7A-43D3-8B79-37D633B846F1}">
+                <asvg:svgBlip xmlns:asvg="http://schemas.microsoft.com/office/drawing/2016/SVG/main" r:embed="rId6"/>
+              </a:ext>
+            </a:extLst>
+          </a:blip>
+          <a:stretch>
+            <a:fillRect/>
+          </a:stretch>
+        </p:blipFill>
+        <p:spPr>
+          <a:xfrm>
+            <a:off x="7733258" y="1430306"/>
+            <a:ext cx="581439" cy="581439"/>
           </a:xfrm>
           <a:prstGeom prst="rect">
             <a:avLst/>
@@ -16234,7 +17679,40 @@
                 <a:ea typeface="Calibri" pitchFamily="34" charset="-122"/>
                 <a:cs typeface="Calibri" pitchFamily="34" charset="-120"/>
               </a:rPr>
-              <a:t>Left singular vectors</a:t>
+              <a:t>Vettori </a:t>
+            </a:r>
+            <a:r>
+              <a:rPr lang="en-US" sz="1100" i="1" dirty="0" err="1">
+                <a:solidFill>
+                  <a:srgbClr val="028090"/>
+                </a:solidFill>
+                <a:latin typeface="Calibri" pitchFamily="34" charset="0"/>
+                <a:ea typeface="Calibri" pitchFamily="34" charset="-122"/>
+                <a:cs typeface="Calibri" pitchFamily="34" charset="-120"/>
+              </a:rPr>
+              <a:t>singolari</a:t>
+            </a:r>
+            <a:r>
+              <a:rPr lang="en-US" sz="1100" i="1" dirty="0">
+                <a:solidFill>
+                  <a:srgbClr val="028090"/>
+                </a:solidFill>
+                <a:latin typeface="Calibri" pitchFamily="34" charset="0"/>
+                <a:ea typeface="Calibri" pitchFamily="34" charset="-122"/>
+                <a:cs typeface="Calibri" pitchFamily="34" charset="-120"/>
+              </a:rPr>
+              <a:t> </a:t>
+            </a:r>
+            <a:r>
+              <a:rPr lang="en-US" sz="1100" i="1" dirty="0" err="1">
+                <a:solidFill>
+                  <a:srgbClr val="028090"/>
+                </a:solidFill>
+                <a:latin typeface="Calibri" pitchFamily="34" charset="0"/>
+                <a:ea typeface="Calibri" pitchFamily="34" charset="-122"/>
+                <a:cs typeface="Calibri" pitchFamily="34" charset="-120"/>
+              </a:rPr>
+              <a:t>sinistri</a:t>
             </a:r>
             <a:endParaRPr lang="en-US" sz="1100" dirty="0"/>
           </a:p>
@@ -16267,7 +17745,7 @@
             <a:r>
               <a:rPr lang="en-US" sz="1100" dirty="0">
                 <a:solidFill>
-                  <a:srgbClr val="64748B"/>
+                  <a:srgbClr val="028090"/>
                 </a:solidFill>
                 <a:latin typeface="Calibri" pitchFamily="34" charset="0"/>
                 <a:ea typeface="Calibri" pitchFamily="34" charset="-122"/>
@@ -16275,7 +17753,11 @@
               </a:rPr>
               <a:t>Pattern spaziali delle righe (struttura verticale)</a:t>
             </a:r>
-            <a:endParaRPr lang="en-US" sz="1100" dirty="0"/>
+            <a:endParaRPr lang="en-US" sz="1100" dirty="0">
+              <a:solidFill>
+                <a:srgbClr val="028090"/>
+              </a:solidFill>
+            </a:endParaRPr>
           </a:p>
         </p:txBody>
       </p:sp>
@@ -16455,7 +17937,7 @@
             <a:r>
               <a:rPr lang="en-US" sz="1100" dirty="0">
                 <a:solidFill>
-                  <a:srgbClr val="64748B"/>
+                  <a:srgbClr val="028090"/>
                 </a:solidFill>
                 <a:latin typeface="Calibri" pitchFamily="34" charset="0"/>
                 <a:ea typeface="Calibri" pitchFamily="34" charset="-122"/>
@@ -16463,7 +17945,11 @@
               </a:rPr>
               <a:t>σ₁≈130 cattura la luminosità globale. Decadimento rapido.</a:t>
             </a:r>
-            <a:endParaRPr lang="en-US" sz="1100" dirty="0"/>
+            <a:endParaRPr lang="en-US" sz="1100" dirty="0">
+              <a:solidFill>
+                <a:srgbClr val="028090"/>
+              </a:solidFill>
+            </a:endParaRPr>
           </a:p>
         </p:txBody>
       </p:sp>
@@ -16610,7 +18096,40 @@
                 <a:ea typeface="Calibri" pitchFamily="34" charset="-122"/>
                 <a:cs typeface="Calibri" pitchFamily="34" charset="-120"/>
               </a:rPr>
-              <a:t>Right singular vectors</a:t>
+              <a:t>Vettori </a:t>
+            </a:r>
+            <a:r>
+              <a:rPr lang="en-US" sz="1100" i="1" dirty="0" err="1">
+                <a:solidFill>
+                  <a:srgbClr val="028090"/>
+                </a:solidFill>
+                <a:latin typeface="Calibri" pitchFamily="34" charset="0"/>
+                <a:ea typeface="Calibri" pitchFamily="34" charset="-122"/>
+                <a:cs typeface="Calibri" pitchFamily="34" charset="-120"/>
+              </a:rPr>
+              <a:t>singolari</a:t>
+            </a:r>
+            <a:r>
+              <a:rPr lang="en-US" sz="1100" i="1" dirty="0">
+                <a:solidFill>
+                  <a:srgbClr val="028090"/>
+                </a:solidFill>
+                <a:latin typeface="Calibri" pitchFamily="34" charset="0"/>
+                <a:ea typeface="Calibri" pitchFamily="34" charset="-122"/>
+                <a:cs typeface="Calibri" pitchFamily="34" charset="-120"/>
+              </a:rPr>
+              <a:t> </a:t>
+            </a:r>
+            <a:r>
+              <a:rPr lang="en-US" sz="1100" i="1" dirty="0" err="1">
+                <a:solidFill>
+                  <a:srgbClr val="028090"/>
+                </a:solidFill>
+                <a:latin typeface="Calibri" pitchFamily="34" charset="0"/>
+                <a:ea typeface="Calibri" pitchFamily="34" charset="-122"/>
+                <a:cs typeface="Calibri" pitchFamily="34" charset="-120"/>
+              </a:rPr>
+              <a:t>destri</a:t>
             </a:r>
             <a:endParaRPr lang="en-US" sz="1100" dirty="0"/>
           </a:p>
@@ -16643,7 +18162,7 @@
             <a:r>
               <a:rPr lang="en-US" sz="1100" dirty="0">
                 <a:solidFill>
-                  <a:srgbClr val="64748B"/>
+                  <a:srgbClr val="028090"/>
                 </a:solidFill>
                 <a:latin typeface="Calibri" pitchFamily="34" charset="0"/>
                 <a:ea typeface="Calibri" pitchFamily="34" charset="-122"/>
@@ -16651,7 +18170,11 @@
               </a:rPr>
               <a:t>Pattern spaziali delle colonne (struttura orizzontale)</a:t>
             </a:r>
-            <a:endParaRPr lang="en-US" sz="1100" dirty="0"/>
+            <a:endParaRPr lang="en-US" sz="1100" dirty="0">
+              <a:solidFill>
+                <a:srgbClr val="028090"/>
+              </a:solidFill>
+            </a:endParaRPr>
           </a:p>
         </p:txBody>
       </p:sp>
@@ -16803,7 +18326,7 @@
             <a:r>
               <a:rPr lang="it-IT" sz="1200" dirty="0">
                 <a:solidFill>
-                  <a:srgbClr val="64748B"/>
+                  <a:srgbClr val="028090"/>
                 </a:solidFill>
                 <a:latin typeface="Calibri" pitchFamily="34" charset="0"/>
                 <a:ea typeface="Calibri" pitchFamily="34" charset="-122"/>
@@ -16811,7 +18334,11 @@
               </a:rPr>
               <a:t>Il Teorema prova che l'approssimazione SVD troncata (ai primi k valori) è la migliore approssimazione normata possibile.</a:t>
             </a:r>
-            <a:endParaRPr lang="en-US" sz="1200" dirty="0"/>
+            <a:endParaRPr lang="en-US" sz="1200" dirty="0">
+              <a:solidFill>
+                <a:srgbClr val="028090"/>
+              </a:solidFill>
+            </a:endParaRPr>
           </a:p>
         </p:txBody>
       </p:sp>
@@ -16919,7 +18446,29 @@
                 <a:ea typeface="Calibri" pitchFamily="34" charset="-122"/>
                 <a:cs typeface="Calibri" pitchFamily="34" charset="-120"/>
               </a:rPr>
-              <a:t>Compression Ratio &amp; PSNR</a:t>
+              <a:t>Ratio di </a:t>
+            </a:r>
+            <a:r>
+              <a:rPr lang="en-US" sz="1300" b="1" dirty="0" err="1">
+                <a:solidFill>
+                  <a:srgbClr val="0D1B4B"/>
+                </a:solidFill>
+                <a:latin typeface="Calibri" pitchFamily="34" charset="0"/>
+                <a:ea typeface="Calibri" pitchFamily="34" charset="-122"/>
+                <a:cs typeface="Calibri" pitchFamily="34" charset="-120"/>
+              </a:rPr>
+              <a:t>compressione</a:t>
+            </a:r>
+            <a:r>
+              <a:rPr lang="en-US" sz="1300" b="1" dirty="0">
+                <a:solidFill>
+                  <a:srgbClr val="0D1B4B"/>
+                </a:solidFill>
+                <a:latin typeface="Calibri" pitchFamily="34" charset="0"/>
+                <a:ea typeface="Calibri" pitchFamily="34" charset="-122"/>
+                <a:cs typeface="Calibri" pitchFamily="34" charset="-120"/>
+              </a:rPr>
+              <a:t> &amp; PSNR</a:t>
             </a:r>
             <a:endParaRPr lang="en-US" sz="1300" dirty="0"/>
           </a:p>
@@ -16952,7 +18501,7 @@
             <a:r>
               <a:rPr lang="en-US" sz="1100" b="1" dirty="0">
                 <a:solidFill>
-                  <a:srgbClr val="64748B"/>
+                  <a:srgbClr val="028090"/>
                 </a:solidFill>
                 <a:latin typeface="Calibri" pitchFamily="34" charset="0"/>
                 <a:ea typeface="Calibri" pitchFamily="34" charset="-122"/>
@@ -16963,73 +18512,73 @@
             <a:r>
               <a:rPr lang="en-US" sz="1100" dirty="0">
                 <a:solidFill>
-                  <a:srgbClr val="64748B"/>
+                  <a:srgbClr val="028090"/>
                 </a:solidFill>
                 <a:latin typeface="Calibri" pitchFamily="34" charset="0"/>
                 <a:ea typeface="Calibri" pitchFamily="34" charset="-122"/>
                 <a:cs typeface="Calibri" pitchFamily="34" charset="-120"/>
               </a:rPr>
-              <a:t> = k(m+n+1)/(mn)    |    </a:t>
+              <a:t> = </a:t>
             </a:r>
             <a:r>
               <a:rPr lang="en-US" sz="1100" b="1" dirty="0">
                 <a:solidFill>
-                  <a:srgbClr val="64748B"/>
+                  <a:srgbClr val="028090"/>
                 </a:solidFill>
                 <a:latin typeface="Calibri" pitchFamily="34" charset="0"/>
                 <a:ea typeface="Calibri" pitchFamily="34" charset="-122"/>
                 <a:cs typeface="Calibri" pitchFamily="34" charset="-120"/>
               </a:rPr>
-              <a:t>PSNR</a:t>
+              <a:t>k(m+n+1)/(mn)    </a:t>
             </a:r>
             <a:r>
               <a:rPr lang="en-US" sz="1100" dirty="0">
                 <a:solidFill>
-                  <a:srgbClr val="64748B"/>
+                  <a:srgbClr val="028090"/>
                 </a:solidFill>
                 <a:latin typeface="Calibri" pitchFamily="34" charset="0"/>
                 <a:ea typeface="Calibri" pitchFamily="34" charset="-122"/>
                 <a:cs typeface="Calibri" pitchFamily="34" charset="-120"/>
               </a:rPr>
-              <a:t> &gt; 30 dB = qualità </a:t>
-            </a:r>
-            <a:r>
-              <a:rPr lang="en-US" sz="1100" dirty="0" err="1">
-                <a:solidFill>
-                  <a:srgbClr val="64748B"/>
+              <a:t>|    </a:t>
+            </a:r>
+            <a:r>
+              <a:rPr lang="en-US" sz="1100" b="1" dirty="0">
+                <a:solidFill>
+                  <a:srgbClr val="028090"/>
                 </a:solidFill>
                 <a:latin typeface="Calibri" pitchFamily="34" charset="0"/>
                 <a:ea typeface="Calibri" pitchFamily="34" charset="-122"/>
                 <a:cs typeface="Calibri" pitchFamily="34" charset="-120"/>
               </a:rPr>
-              <a:t>diagnostica</a:t>
+              <a:t>PSNR &gt; 30 dB </a:t>
             </a:r>
             <a:r>
               <a:rPr lang="en-US" sz="1100" dirty="0">
                 <a:solidFill>
-                  <a:srgbClr val="64748B"/>
+                  <a:srgbClr val="028090"/>
                 </a:solidFill>
                 <a:latin typeface="Calibri" pitchFamily="34" charset="0"/>
                 <a:ea typeface="Calibri" pitchFamily="34" charset="-122"/>
                 <a:cs typeface="Calibri" pitchFamily="34" charset="-120"/>
               </a:rPr>
-              <a:t> </a:t>
+              <a:t>= qualità </a:t>
             </a:r>
             <a:r>
               <a:rPr lang="en-US" sz="1100" dirty="0" err="1">
                 <a:solidFill>
-                  <a:srgbClr val="64748B"/>
+                  <a:srgbClr val="028090"/>
                 </a:solidFill>
                 <a:latin typeface="Calibri" pitchFamily="34" charset="0"/>
                 <a:ea typeface="Calibri" pitchFamily="34" charset="-122"/>
                 <a:cs typeface="Calibri" pitchFamily="34" charset="-120"/>
               </a:rPr>
-              <a:t>considerata</a:t>
+              <a:t>diagnostica</a:t>
             </a:r>
             <a:r>
               <a:rPr lang="en-US" sz="1100" dirty="0">
                 <a:solidFill>
-                  <a:srgbClr val="64748B"/>
+                  <a:srgbClr val="028090"/>
                 </a:solidFill>
                 <a:latin typeface="Calibri" pitchFamily="34" charset="0"/>
                 <a:ea typeface="Calibri" pitchFamily="34" charset="-122"/>
@@ -17040,15 +18589,41 @@
             <a:r>
               <a:rPr lang="en-US" sz="1100" dirty="0" err="1">
                 <a:solidFill>
-                  <a:srgbClr val="64748B"/>
+                  <a:srgbClr val="028090"/>
                 </a:solidFill>
                 <a:latin typeface="Calibri" pitchFamily="34" charset="0"/>
                 <a:ea typeface="Calibri" pitchFamily="34" charset="-122"/>
                 <a:cs typeface="Calibri" pitchFamily="34" charset="-120"/>
               </a:rPr>
+              <a:t>considerata</a:t>
+            </a:r>
+            <a:r>
+              <a:rPr lang="en-US" sz="1100" dirty="0">
+                <a:solidFill>
+                  <a:srgbClr val="028090"/>
+                </a:solidFill>
+                <a:latin typeface="Calibri" pitchFamily="34" charset="0"/>
+                <a:ea typeface="Calibri" pitchFamily="34" charset="-122"/>
+                <a:cs typeface="Calibri" pitchFamily="34" charset="-120"/>
+              </a:rPr>
+              <a:t> </a:t>
+            </a:r>
+            <a:r>
+              <a:rPr lang="en-US" sz="1100" dirty="0" err="1">
+                <a:solidFill>
+                  <a:srgbClr val="028090"/>
+                </a:solidFill>
+                <a:latin typeface="Calibri" pitchFamily="34" charset="0"/>
+                <a:ea typeface="Calibri" pitchFamily="34" charset="-122"/>
+                <a:cs typeface="Calibri" pitchFamily="34" charset="-120"/>
+              </a:rPr>
               <a:t>accettabile</a:t>
             </a:r>
-            <a:endParaRPr lang="en-US" sz="1100" dirty="0"/>
+            <a:endParaRPr lang="en-US" sz="1100" dirty="0">
+              <a:solidFill>
+                <a:srgbClr val="028090"/>
+              </a:solidFill>
+            </a:endParaRPr>
           </a:p>
         </p:txBody>
       </p:sp>
@@ -17190,53 +18765,14 @@
       </p:sp>
       <p:sp>
         <p:nvSpPr>
-          <p:cNvPr id="5" name="Text 3"/>
-          <p:cNvSpPr/>
-          <p:nvPr/>
-        </p:nvSpPr>
-        <p:spPr>
-          <a:xfrm>
-            <a:off x="365760" y="566928"/>
-            <a:ext cx="6858000" cy="292608"/>
-          </a:xfrm>
-          <a:prstGeom prst="rect">
-            <a:avLst/>
-          </a:prstGeom>
-          <a:noFill/>
-          <a:ln/>
-        </p:spPr>
-        <p:txBody>
-          <a:bodyPr wrap="square" lIns="0" tIns="0" rIns="0" bIns="0" rtlCol="0" anchor="ctr"/>
-          <a:lstStyle/>
-          <a:p>
-            <a:pPr marL="0" indent="0">
-              <a:buNone/>
-            </a:pPr>
-            <a:r>
-              <a:rPr lang="en-US" sz="1100" i="1" dirty="0">
-                <a:solidFill>
-                  <a:srgbClr val="02C39A"/>
-                </a:solidFill>
-                <a:latin typeface="Calibri" pitchFamily="34" charset="0"/>
-                <a:ea typeface="Calibri" pitchFamily="34" charset="-122"/>
-                <a:cs typeface="Calibri" pitchFamily="34" charset="-120"/>
-              </a:rPr>
-              <a:t>svd_engine.py</a:t>
-            </a:r>
-            <a:endParaRPr lang="en-US" sz="1100" dirty="0"/>
-          </a:p>
-        </p:txBody>
-      </p:sp>
-      <p:sp>
-        <p:nvSpPr>
           <p:cNvPr id="8" name="Shape 6"/>
           <p:cNvSpPr/>
           <p:nvPr/>
         </p:nvSpPr>
         <p:spPr>
           <a:xfrm>
-            <a:off x="0" y="1097280"/>
-            <a:ext cx="4741817" cy="365760"/>
+            <a:off x="58783" y="1119487"/>
+            <a:ext cx="4088675" cy="384048"/>
           </a:xfrm>
           <a:prstGeom prst="rect">
             <a:avLst/>
@@ -17267,7 +18803,7 @@
         </p:nvSpPr>
         <p:spPr>
           <a:xfrm>
-            <a:off x="0" y="1097280"/>
+            <a:off x="58783" y="1119487"/>
             <a:ext cx="1260566" cy="384048"/>
           </a:xfrm>
           <a:prstGeom prst="rect">
@@ -17306,8 +18842,8 @@
         </p:nvSpPr>
         <p:spPr>
           <a:xfrm>
-            <a:off x="0" y="1481328"/>
-            <a:ext cx="4741817" cy="3072384"/>
+            <a:off x="58784" y="1503535"/>
+            <a:ext cx="4088674" cy="3072384"/>
           </a:xfrm>
           <a:prstGeom prst="rect">
             <a:avLst/>
@@ -17339,7 +18875,7 @@
         <p:spPr>
           <a:xfrm>
             <a:off x="0" y="1554480"/>
-            <a:ext cx="4865914" cy="3017520"/>
+            <a:ext cx="4212771" cy="2834640"/>
           </a:xfrm>
           <a:prstGeom prst="rect">
             <a:avLst/>
@@ -17355,7 +18891,7 @@
               <a:buNone/>
             </a:pPr>
             <a:r>
-              <a:rPr lang="en-US" sz="1100" dirty="0">
+              <a:rPr lang="en-US" sz="1000" dirty="0">
                 <a:solidFill>
                   <a:srgbClr val="89DDFF"/>
                 </a:solidFill>
@@ -17366,7 +18902,7 @@
               <a:t>def</a:t>
             </a:r>
             <a:r>
-              <a:rPr lang="en-US" sz="1100" dirty="0">
+              <a:rPr lang="en-US" sz="1000" dirty="0">
                 <a:solidFill>
                   <a:srgbClr val="82AAFF"/>
                 </a:solidFill>
@@ -17377,7 +18913,7 @@
               <a:t> apply_svd</a:t>
             </a:r>
             <a:r>
-              <a:rPr lang="en-US" sz="1100" dirty="0">
+              <a:rPr lang="en-US" sz="1000" dirty="0">
                 <a:solidFill>
                   <a:srgbClr val="EEFFFF"/>
                 </a:solidFill>
@@ -17389,7 +18925,7 @@
 </a:t>
             </a:r>
             <a:r>
-              <a:rPr lang="en-US" sz="1100" dirty="0">
+              <a:rPr lang="en-US" sz="1000" dirty="0">
                 <a:solidFill>
                   <a:srgbClr val="546E7A"/>
                 </a:solidFill>
@@ -17401,7 +18937,7 @@
 </a:t>
             </a:r>
             <a:r>
-              <a:rPr lang="en-US" sz="1100" dirty="0">
+              <a:rPr lang="en-US" sz="1000" dirty="0">
                 <a:solidFill>
                   <a:srgbClr val="EEFFFF"/>
                 </a:solidFill>
@@ -17412,7 +18948,7 @@
               <a:t>    U, S, Vt </a:t>
             </a:r>
             <a:r>
-              <a:rPr lang="en-US" sz="1100" dirty="0">
+              <a:rPr lang="en-US" sz="1000" dirty="0">
                 <a:solidFill>
                   <a:srgbClr val="89DDFF"/>
                 </a:solidFill>
@@ -17423,7 +18959,7 @@
               <a:t>=</a:t>
             </a:r>
             <a:r>
-              <a:rPr lang="en-US" sz="1100" dirty="0">
+              <a:rPr lang="en-US" sz="1000" dirty="0">
                 <a:solidFill>
                   <a:srgbClr val="EEFFFF"/>
                 </a:solidFill>
@@ -17434,7 +18970,7 @@
               <a:t> np.linalg.</a:t>
             </a:r>
             <a:r>
-              <a:rPr lang="en-US" sz="1100" dirty="0">
+              <a:rPr lang="en-US" sz="1000" dirty="0">
                 <a:solidFill>
                   <a:srgbClr val="82AAFF"/>
                 </a:solidFill>
@@ -17445,7 +18981,7 @@
               <a:t>svd</a:t>
             </a:r>
             <a:r>
-              <a:rPr lang="en-US" sz="1100" dirty="0">
+              <a:rPr lang="en-US" sz="1000" dirty="0">
                 <a:solidFill>
                   <a:srgbClr val="EEFFFF"/>
                 </a:solidFill>
@@ -17453,359 +18989,370 @@
                 <a:ea typeface="Consolas" pitchFamily="34" charset="-122"/>
                 <a:cs typeface="Consolas" pitchFamily="34" charset="-120"/>
               </a:rPr>
-              <a:t>(image_matrix, full_matrices</a:t>
-            </a:r>
-            <a:r>
-              <a:rPr lang="en-US" sz="1100" dirty="0">
-                <a:solidFill>
-                  <a:srgbClr val="89DDFF"/>
+              <a:t>(image_matrix,  </a:t>
+            </a:r>
+            <a:r>
+              <a:rPr lang="en-US" sz="1000" dirty="0" err="1">
+                <a:solidFill>
+                  <a:srgbClr val="EEFFFF"/>
                 </a:solidFill>
                 <a:latin typeface="Consolas" pitchFamily="34" charset="0"/>
                 <a:ea typeface="Consolas" pitchFamily="34" charset="-122"/>
                 <a:cs typeface="Consolas" pitchFamily="34" charset="-120"/>
               </a:rPr>
-              <a:t>=</a:t>
-            </a:r>
-            <a:r>
-              <a:rPr lang="en-US" sz="1100" dirty="0">
-                <a:solidFill>
-                  <a:srgbClr val="EEFFFF"/>
+              <a:t>full_matrices</a:t>
+            </a:r>
+            <a:r>
+              <a:rPr lang="en-US" sz="1000" dirty="0">
+                <a:solidFill>
+                  <a:srgbClr val="89DDFF"/>
                 </a:solidFill>
                 <a:latin typeface="Consolas" pitchFamily="34" charset="0"/>
                 <a:ea typeface="Consolas" pitchFamily="34" charset="-122"/>
                 <a:cs typeface="Consolas" pitchFamily="34" charset="-120"/>
               </a:rPr>
-              <a:t>False)
-    </a:t>
-            </a:r>
-            <a:r>
-              <a:rPr lang="en-US" sz="1100" dirty="0">
-                <a:solidFill>
-                  <a:srgbClr val="89DDFF"/>
+              <a:t>=</a:t>
+            </a:r>
+            <a:r>
+              <a:rPr lang="en-US" sz="1000" dirty="0">
+                <a:solidFill>
+                  <a:srgbClr val="EEFFFF"/>
                 </a:solidFill>
                 <a:latin typeface="Consolas" pitchFamily="34" charset="0"/>
                 <a:ea typeface="Consolas" pitchFamily="34" charset="-122"/>
                 <a:cs typeface="Consolas" pitchFamily="34" charset="-120"/>
               </a:rPr>
-              <a:t>return</a:t>
-            </a:r>
-            <a:r>
-              <a:rPr lang="en-US" sz="1100" dirty="0">
-                <a:solidFill>
-                  <a:srgbClr val="EEFFFF"/>
+              <a:t>False)
+    </a:t>
+            </a:r>
+            <a:r>
+              <a:rPr lang="en-US" sz="1000" dirty="0">
+                <a:solidFill>
+                  <a:srgbClr val="89DDFF"/>
                 </a:solidFill>
                 <a:latin typeface="Consolas" pitchFamily="34" charset="0"/>
                 <a:ea typeface="Consolas" pitchFamily="34" charset="-122"/>
                 <a:cs typeface="Consolas" pitchFamily="34" charset="-120"/>
               </a:rPr>
-              <a:t> U, S, Vt
-</a:t>
-            </a:r>
-            <a:r>
-              <a:rPr lang="en-US" sz="1100" dirty="0">
-                <a:solidFill>
-                  <a:srgbClr val="89DDFF"/>
+              <a:t>return</a:t>
+            </a:r>
+            <a:r>
+              <a:rPr lang="en-US" sz="1000" dirty="0">
+                <a:solidFill>
+                  <a:srgbClr val="EEFFFF"/>
                 </a:solidFill>
                 <a:latin typeface="Consolas" pitchFamily="34" charset="0"/>
                 <a:ea typeface="Consolas" pitchFamily="34" charset="-122"/>
                 <a:cs typeface="Consolas" pitchFamily="34" charset="-120"/>
               </a:rPr>
-              <a:t>def</a:t>
-            </a:r>
-            <a:r>
-              <a:rPr lang="en-US" sz="1100" dirty="0">
-                <a:solidFill>
-                  <a:srgbClr val="82AAFF"/>
+              <a:t> U, S, Vt
+</a:t>
+            </a:r>
+            <a:r>
+              <a:rPr lang="en-US" sz="1000" dirty="0">
+                <a:solidFill>
+                  <a:srgbClr val="89DDFF"/>
                 </a:solidFill>
                 <a:latin typeface="Consolas" pitchFamily="34" charset="0"/>
                 <a:ea typeface="Consolas" pitchFamily="34" charset="-122"/>
                 <a:cs typeface="Consolas" pitchFamily="34" charset="-120"/>
               </a:rPr>
-              <a:t> reconstruct_svd</a:t>
-            </a:r>
-            <a:r>
-              <a:rPr lang="en-US" sz="1100" dirty="0">
-                <a:solidFill>
-                  <a:srgbClr val="EEFFFF"/>
+              <a:t>def</a:t>
+            </a:r>
+            <a:r>
+              <a:rPr lang="en-US" sz="1000" dirty="0">
+                <a:solidFill>
+                  <a:srgbClr val="82AAFF"/>
                 </a:solidFill>
                 <a:latin typeface="Consolas" pitchFamily="34" charset="0"/>
                 <a:ea typeface="Consolas" pitchFamily="34" charset="-122"/>
                 <a:cs typeface="Consolas" pitchFamily="34" charset="-120"/>
               </a:rPr>
-              <a:t>(U, S, Vt, k):
-</a:t>
-            </a:r>
-            <a:r>
-              <a:rPr lang="en-US" sz="1100" dirty="0">
-                <a:solidFill>
-                  <a:srgbClr val="546E7A"/>
+              <a:t> reconstruct_svd</a:t>
+            </a:r>
+            <a:r>
+              <a:rPr lang="en-US" sz="1000" dirty="0">
+                <a:solidFill>
+                  <a:srgbClr val="EEFFFF"/>
                 </a:solidFill>
                 <a:latin typeface="Consolas" pitchFamily="34" charset="0"/>
                 <a:ea typeface="Consolas" pitchFamily="34" charset="-122"/>
                 <a:cs typeface="Consolas" pitchFamily="34" charset="-120"/>
               </a:rPr>
-              <a:t>    """Rank-k reconstruction: Aₖ = Uₖ · diag(Sₖ) · Vtₖ"""
+              <a:t>(U, S, Vt, k):
 </a:t>
             </a:r>
             <a:r>
-              <a:rPr lang="en-US" sz="1100" dirty="0">
-                <a:solidFill>
-                  <a:srgbClr val="EEFFFF"/>
+              <a:rPr lang="en-US" sz="1000" dirty="0">
+                <a:solidFill>
+                  <a:srgbClr val="546E7A"/>
                 </a:solidFill>
                 <a:latin typeface="Consolas" pitchFamily="34" charset="0"/>
                 <a:ea typeface="Consolas" pitchFamily="34" charset="-122"/>
                 <a:cs typeface="Consolas" pitchFamily="34" charset="-120"/>
               </a:rPr>
-              <a:t>    </a:t>
-            </a:r>
-            <a:r>
-              <a:rPr lang="en-US" sz="1100" dirty="0">
-                <a:solidFill>
-                  <a:srgbClr val="89DDFF"/>
+              <a:t>    """Rank-k reconstruction: Aₖ = Uₖ · diag(Sₖ) · Vtₖ"""
+</a:t>
+            </a:r>
+            <a:r>
+              <a:rPr lang="en-US" sz="1000" dirty="0">
+                <a:solidFill>
+                  <a:srgbClr val="EEFFFF"/>
                 </a:solidFill>
                 <a:latin typeface="Consolas" pitchFamily="34" charset="0"/>
                 <a:ea typeface="Consolas" pitchFamily="34" charset="-122"/>
                 <a:cs typeface="Consolas" pitchFamily="34" charset="-120"/>
               </a:rPr>
-              <a:t>return</a:t>
-            </a:r>
-            <a:r>
-              <a:rPr lang="en-US" sz="1100" dirty="0">
-                <a:solidFill>
-                  <a:srgbClr val="EEFFFF"/>
+              <a:t>    </a:t>
+            </a:r>
+            <a:r>
+              <a:rPr lang="en-US" sz="1000" dirty="0">
+                <a:solidFill>
+                  <a:srgbClr val="89DDFF"/>
                 </a:solidFill>
                 <a:latin typeface="Consolas" pitchFamily="34" charset="0"/>
                 <a:ea typeface="Consolas" pitchFamily="34" charset="-122"/>
                 <a:cs typeface="Consolas" pitchFamily="34" charset="-120"/>
               </a:rPr>
-              <a:t> (U[:, :k] </a:t>
-            </a:r>
-            <a:r>
-              <a:rPr lang="en-US" sz="1100" dirty="0">
-                <a:solidFill>
-                  <a:srgbClr val="89DDFF"/>
+              <a:t>return</a:t>
+            </a:r>
+            <a:r>
+              <a:rPr lang="en-US" sz="1000" dirty="0">
+                <a:solidFill>
+                  <a:srgbClr val="EEFFFF"/>
                 </a:solidFill>
                 <a:latin typeface="Consolas" pitchFamily="34" charset="0"/>
                 <a:ea typeface="Consolas" pitchFamily="34" charset="-122"/>
                 <a:cs typeface="Consolas" pitchFamily="34" charset="-120"/>
               </a:rPr>
-              <a:t>*</a:t>
-            </a:r>
-            <a:r>
-              <a:rPr lang="en-US" sz="1100" dirty="0">
-                <a:solidFill>
-                  <a:srgbClr val="EEFFFF"/>
+              <a:t> (U[:, :k] </a:t>
+            </a:r>
+            <a:r>
+              <a:rPr lang="en-US" sz="1000" dirty="0">
+                <a:solidFill>
+                  <a:srgbClr val="89DDFF"/>
                 </a:solidFill>
                 <a:latin typeface="Consolas" pitchFamily="34" charset="0"/>
                 <a:ea typeface="Consolas" pitchFamily="34" charset="-122"/>
                 <a:cs typeface="Consolas" pitchFamily="34" charset="-120"/>
               </a:rPr>
-              <a:t> S[:k]) </a:t>
-            </a:r>
-            <a:r>
-              <a:rPr lang="en-US" sz="1100" dirty="0">
-                <a:solidFill>
-                  <a:srgbClr val="89DDFF"/>
+              <a:t>*</a:t>
+            </a:r>
+            <a:r>
+              <a:rPr lang="en-US" sz="1000" dirty="0">
+                <a:solidFill>
+                  <a:srgbClr val="EEFFFF"/>
                 </a:solidFill>
                 <a:latin typeface="Consolas" pitchFamily="34" charset="0"/>
                 <a:ea typeface="Consolas" pitchFamily="34" charset="-122"/>
                 <a:cs typeface="Consolas" pitchFamily="34" charset="-120"/>
               </a:rPr>
-              <a:t>@</a:t>
-            </a:r>
-            <a:r>
-              <a:rPr lang="en-US" sz="1100" dirty="0">
-                <a:solidFill>
-                  <a:srgbClr val="EEFFFF"/>
+              <a:t> S[:k]) </a:t>
+            </a:r>
+            <a:r>
+              <a:rPr lang="en-US" sz="1000" dirty="0">
+                <a:solidFill>
+                  <a:srgbClr val="89DDFF"/>
                 </a:solidFill>
                 <a:latin typeface="Consolas" pitchFamily="34" charset="0"/>
                 <a:ea typeface="Consolas" pitchFamily="34" charset="-122"/>
                 <a:cs typeface="Consolas" pitchFamily="34" charset="-120"/>
               </a:rPr>
-              <a:t> Vt[:k, :]
-</a:t>
-            </a:r>
-            <a:r>
-              <a:rPr lang="en-US" sz="1100" dirty="0">
-                <a:solidFill>
-                  <a:srgbClr val="89DDFF"/>
+              <a:t>@</a:t>
+            </a:r>
+            <a:r>
+              <a:rPr lang="en-US" sz="1000" dirty="0">
+                <a:solidFill>
+                  <a:srgbClr val="EEFFFF"/>
                 </a:solidFill>
                 <a:latin typeface="Consolas" pitchFamily="34" charset="0"/>
                 <a:ea typeface="Consolas" pitchFamily="34" charset="-122"/>
                 <a:cs typeface="Consolas" pitchFamily="34" charset="-120"/>
               </a:rPr>
-              <a:t>def</a:t>
-            </a:r>
-            <a:r>
-              <a:rPr lang="en-US" sz="1100" dirty="0">
-                <a:solidFill>
-                  <a:srgbClr val="82AAFF"/>
+              <a:t> Vt[:k, :]
+</a:t>
+            </a:r>
+            <a:r>
+              <a:rPr lang="en-US" sz="1000" dirty="0">
+                <a:solidFill>
+                  <a:srgbClr val="89DDFF"/>
                 </a:solidFill>
                 <a:latin typeface="Consolas" pitchFamily="34" charset="0"/>
                 <a:ea typeface="Consolas" pitchFamily="34" charset="-122"/>
                 <a:cs typeface="Consolas" pitchFamily="34" charset="-120"/>
               </a:rPr>
-              <a:t> compression_ratio</a:t>
-            </a:r>
-            <a:r>
-              <a:rPr lang="en-US" sz="1100" dirty="0">
-                <a:solidFill>
-                  <a:srgbClr val="EEFFFF"/>
+              <a:t>def</a:t>
+            </a:r>
+            <a:r>
+              <a:rPr lang="en-US" sz="1000" dirty="0">
+                <a:solidFill>
+                  <a:srgbClr val="82AAFF"/>
                 </a:solidFill>
                 <a:latin typeface="Consolas" pitchFamily="34" charset="0"/>
                 <a:ea typeface="Consolas" pitchFamily="34" charset="-122"/>
                 <a:cs typeface="Consolas" pitchFamily="34" charset="-120"/>
               </a:rPr>
-              <a:t>(m, n, k):
-</a:t>
-            </a:r>
-            <a:r>
-              <a:rPr lang="en-US" sz="1100" dirty="0">
-                <a:solidFill>
-                  <a:srgbClr val="546E7A"/>
+              <a:t> compression_ratio</a:t>
+            </a:r>
+            <a:r>
+              <a:rPr lang="en-US" sz="1000" dirty="0">
+                <a:solidFill>
+                  <a:srgbClr val="EEFFFF"/>
                 </a:solidFill>
                 <a:latin typeface="Consolas" pitchFamily="34" charset="0"/>
                 <a:ea typeface="Consolas" pitchFamily="34" charset="-122"/>
                 <a:cs typeface="Consolas" pitchFamily="34" charset="-120"/>
               </a:rPr>
-              <a:t>    """Fraction of values stored vs full image."""
+              <a:t>(m, n, k):
 </a:t>
             </a:r>
             <a:r>
-              <a:rPr lang="en-US" sz="1100" dirty="0">
-                <a:solidFill>
-                  <a:srgbClr val="EEFFFF"/>
+              <a:rPr lang="en-US" sz="1000" dirty="0">
+                <a:solidFill>
+                  <a:srgbClr val="546E7A"/>
                 </a:solidFill>
                 <a:latin typeface="Consolas" pitchFamily="34" charset="0"/>
                 <a:ea typeface="Consolas" pitchFamily="34" charset="-122"/>
                 <a:cs typeface="Consolas" pitchFamily="34" charset="-120"/>
               </a:rPr>
-              <a:t>    </a:t>
-            </a:r>
-            <a:r>
-              <a:rPr lang="en-US" sz="1100" dirty="0">
-                <a:solidFill>
-                  <a:srgbClr val="89DDFF"/>
+              <a:t>    """Fraction of values stored vs full image."""
+</a:t>
+            </a:r>
+            <a:r>
+              <a:rPr lang="en-US" sz="1000" dirty="0">
+                <a:solidFill>
+                  <a:srgbClr val="EEFFFF"/>
                 </a:solidFill>
                 <a:latin typeface="Consolas" pitchFamily="34" charset="0"/>
                 <a:ea typeface="Consolas" pitchFamily="34" charset="-122"/>
                 <a:cs typeface="Consolas" pitchFamily="34" charset="-120"/>
               </a:rPr>
-              <a:t>return</a:t>
-            </a:r>
-            <a:r>
-              <a:rPr lang="en-US" sz="1100" dirty="0">
-                <a:solidFill>
-                  <a:srgbClr val="EEFFFF"/>
+              <a:t>    </a:t>
+            </a:r>
+            <a:r>
+              <a:rPr lang="en-US" sz="1000" dirty="0">
+                <a:solidFill>
+                  <a:srgbClr val="89DDFF"/>
                 </a:solidFill>
                 <a:latin typeface="Consolas" pitchFamily="34" charset="0"/>
                 <a:ea typeface="Consolas" pitchFamily="34" charset="-122"/>
                 <a:cs typeface="Consolas" pitchFamily="34" charset="-120"/>
               </a:rPr>
-              <a:t> min(</a:t>
-            </a:r>
-            <a:r>
-              <a:rPr lang="en-US" sz="1100" dirty="0">
-                <a:solidFill>
-                  <a:srgbClr val="F78C6C"/>
+              <a:t>return</a:t>
+            </a:r>
+            <a:r>
+              <a:rPr lang="en-US" sz="1000" dirty="0">
+                <a:solidFill>
+                  <a:srgbClr val="EEFFFF"/>
                 </a:solidFill>
                 <a:latin typeface="Consolas" pitchFamily="34" charset="0"/>
                 <a:ea typeface="Consolas" pitchFamily="34" charset="-122"/>
                 <a:cs typeface="Consolas" pitchFamily="34" charset="-120"/>
               </a:rPr>
-              <a:t>1.0</a:t>
-            </a:r>
-            <a:r>
-              <a:rPr lang="en-US" sz="1100" dirty="0">
-                <a:solidFill>
-                  <a:srgbClr val="EEFFFF"/>
+              <a:t> min(</a:t>
+            </a:r>
+            <a:r>
+              <a:rPr lang="en-US" sz="1000" dirty="0">
+                <a:solidFill>
+                  <a:srgbClr val="F78C6C"/>
                 </a:solidFill>
                 <a:latin typeface="Consolas" pitchFamily="34" charset="0"/>
                 <a:ea typeface="Consolas" pitchFamily="34" charset="-122"/>
                 <a:cs typeface="Consolas" pitchFamily="34" charset="-120"/>
               </a:rPr>
-              <a:t>, k </a:t>
-            </a:r>
-            <a:r>
-              <a:rPr lang="en-US" sz="1100" dirty="0">
-                <a:solidFill>
-                  <a:srgbClr val="89DDFF"/>
+              <a:t>1.0</a:t>
+            </a:r>
+            <a:r>
+              <a:rPr lang="en-US" sz="1000" dirty="0">
+                <a:solidFill>
+                  <a:srgbClr val="EEFFFF"/>
                 </a:solidFill>
                 <a:latin typeface="Consolas" pitchFamily="34" charset="0"/>
                 <a:ea typeface="Consolas" pitchFamily="34" charset="-122"/>
                 <a:cs typeface="Consolas" pitchFamily="34" charset="-120"/>
               </a:rPr>
-              <a:t>*</a:t>
-            </a:r>
-            <a:r>
-              <a:rPr lang="en-US" sz="1100" dirty="0">
-                <a:solidFill>
-                  <a:srgbClr val="EEFFFF"/>
+              <a:t>, k </a:t>
+            </a:r>
+            <a:r>
+              <a:rPr lang="en-US" sz="1000" dirty="0">
+                <a:solidFill>
+                  <a:srgbClr val="89DDFF"/>
                 </a:solidFill>
                 <a:latin typeface="Consolas" pitchFamily="34" charset="0"/>
                 <a:ea typeface="Consolas" pitchFamily="34" charset="-122"/>
                 <a:cs typeface="Consolas" pitchFamily="34" charset="-120"/>
               </a:rPr>
-              <a:t> (m+n+</a:t>
-            </a:r>
-            <a:r>
-              <a:rPr lang="en-US" sz="1100" dirty="0">
-                <a:solidFill>
-                  <a:srgbClr val="F78C6C"/>
+              <a:t>*</a:t>
+            </a:r>
+            <a:r>
+              <a:rPr lang="en-US" sz="1000" dirty="0">
+                <a:solidFill>
+                  <a:srgbClr val="EEFFFF"/>
                 </a:solidFill>
                 <a:latin typeface="Consolas" pitchFamily="34" charset="0"/>
                 <a:ea typeface="Consolas" pitchFamily="34" charset="-122"/>
                 <a:cs typeface="Consolas" pitchFamily="34" charset="-120"/>
               </a:rPr>
-              <a:t>1</a:t>
-            </a:r>
-            <a:r>
-              <a:rPr lang="en-US" sz="1100" dirty="0">
-                <a:solidFill>
-                  <a:srgbClr val="EEFFFF"/>
+              <a:t> (m+n+</a:t>
+            </a:r>
+            <a:r>
+              <a:rPr lang="en-US" sz="1000" dirty="0">
+                <a:solidFill>
+                  <a:srgbClr val="F78C6C"/>
                 </a:solidFill>
                 <a:latin typeface="Consolas" pitchFamily="34" charset="0"/>
                 <a:ea typeface="Consolas" pitchFamily="34" charset="-122"/>
                 <a:cs typeface="Consolas" pitchFamily="34" charset="-120"/>
               </a:rPr>
-              <a:t>) / (m</a:t>
-            </a:r>
-            <a:r>
-              <a:rPr lang="en-US" sz="1100" dirty="0">
-                <a:solidFill>
-                  <a:srgbClr val="89DDFF"/>
+              <a:t>1</a:t>
+            </a:r>
+            <a:r>
+              <a:rPr lang="en-US" sz="1000" dirty="0">
+                <a:solidFill>
+                  <a:srgbClr val="EEFFFF"/>
                 </a:solidFill>
                 <a:latin typeface="Consolas" pitchFamily="34" charset="0"/>
                 <a:ea typeface="Consolas" pitchFamily="34" charset="-122"/>
                 <a:cs typeface="Consolas" pitchFamily="34" charset="-120"/>
               </a:rPr>
-              <a:t>*</a:t>
-            </a:r>
-            <a:r>
-              <a:rPr lang="en-US" sz="1100" dirty="0">
-                <a:solidFill>
-                  <a:srgbClr val="EEFFFF"/>
+              <a:t>) / (m</a:t>
+            </a:r>
+            <a:r>
+              <a:rPr lang="en-US" sz="1000" dirty="0">
+                <a:solidFill>
+                  <a:srgbClr val="89DDFF"/>
                 </a:solidFill>
                 <a:latin typeface="Consolas" pitchFamily="34" charset="0"/>
                 <a:ea typeface="Consolas" pitchFamily="34" charset="-122"/>
                 <a:cs typeface="Consolas" pitchFamily="34" charset="-120"/>
               </a:rPr>
-              <a:t>n))
-</a:t>
-            </a:r>
-            <a:r>
-              <a:rPr lang="en-US" sz="1100" dirty="0">
-                <a:solidFill>
-                  <a:srgbClr val="546E7A"/>
+              <a:t>*</a:t>
+            </a:r>
+            <a:r>
+              <a:rPr lang="en-US" sz="1000" dirty="0">
+                <a:solidFill>
+                  <a:srgbClr val="EEFFFF"/>
                 </a:solidFill>
                 <a:latin typeface="Consolas" pitchFamily="34" charset="0"/>
                 <a:ea typeface="Consolas" pitchFamily="34" charset="-122"/>
                 <a:cs typeface="Consolas" pitchFamily="34" charset="-120"/>
               </a:rPr>
+              <a:t>n))
+</a:t>
+            </a:r>
+            <a:r>
+              <a:rPr lang="en-US" sz="1000" dirty="0">
+                <a:solidFill>
+                  <a:srgbClr val="546E7A"/>
+                </a:solidFill>
+                <a:latin typeface="Consolas" pitchFamily="34" charset="0"/>
+                <a:ea typeface="Consolas" pitchFamily="34" charset="-122"/>
+                <a:cs typeface="Consolas" pitchFamily="34" charset="-120"/>
+              </a:rPr>
               <a:t># MSE efficiente (Eckart-Young) — evita 200 ricostruzioni:
 # MSE(k) = Σᵢ₌ₖ₊₁ʳ σᵢ² / (m·n)</a:t>
             </a:r>
-            <a:endParaRPr lang="en-US" sz="1100" dirty="0"/>
+            <a:endParaRPr lang="en-US" sz="1000" dirty="0"/>
           </a:p>
         </p:txBody>
       </p:sp>
@@ -17824,21 +19371,114 @@
           <p:nvPr/>
         </p:nvPicPr>
         <p:blipFill>
-          <a:blip r:embed="rId3"/>
+          <a:blip r:embed="rId3">
+            <a:extLst>
+              <a:ext uri="{BEBA8EAE-BF5A-486C-A8C5-ECC9F3942E4B}">
+                <a14:imgProps xmlns:a14="http://schemas.microsoft.com/office/drawing/2010/main">
+                  <a14:imgLayer r:embed="rId4">
+                    <a14:imgEffect>
+                      <a14:colorTemperature colorTemp="4700"/>
+                    </a14:imgEffect>
+                  </a14:imgLayer>
+                </a14:imgProps>
+              </a:ext>
+            </a:extLst>
+          </a:blip>
           <a:stretch>
             <a:fillRect/>
           </a:stretch>
         </p:blipFill>
         <p:spPr>
           <a:xfrm>
-            <a:off x="4741816" y="1704361"/>
-            <a:ext cx="4402183" cy="2029276"/>
+            <a:off x="4369525" y="1481328"/>
+            <a:ext cx="4223065" cy="1946708"/>
           </a:xfrm>
           <a:prstGeom prst="rect">
             <a:avLst/>
           </a:prstGeom>
         </p:spPr>
       </p:pic>
+      <p:sp>
+        <p:nvSpPr>
+          <p:cNvPr id="6" name="Shape 6">
+            <a:extLst>
+              <a:ext uri="{FF2B5EF4-FFF2-40B4-BE49-F238E27FC236}">
+                <a16:creationId xmlns:a16="http://schemas.microsoft.com/office/drawing/2014/main" id="{B36C4914-5C96-3AB0-B406-657D3A6D8FD3}"/>
+              </a:ext>
+            </a:extLst>
+          </p:cNvPr>
+          <p:cNvSpPr/>
+          <p:nvPr/>
+        </p:nvSpPr>
+        <p:spPr>
+          <a:xfrm>
+            <a:off x="4369525" y="1110343"/>
+            <a:ext cx="4223065" cy="393192"/>
+          </a:xfrm>
+          <a:prstGeom prst="rect">
+            <a:avLst/>
+          </a:prstGeom>
+          <a:solidFill>
+            <a:srgbClr val="1E2D40"/>
+          </a:solidFill>
+          <a:ln w="12700">
+            <a:solidFill>
+              <a:srgbClr val="1E2D40"/>
+            </a:solidFill>
+            <a:prstDash val="solid"/>
+          </a:ln>
+        </p:spPr>
+        <p:txBody>
+          <a:bodyPr/>
+          <a:lstStyle/>
+          <a:p>
+            <a:endParaRPr lang="it-IT" dirty="0"/>
+          </a:p>
+        </p:txBody>
+      </p:sp>
+      <p:sp>
+        <p:nvSpPr>
+          <p:cNvPr id="7" name="Text 7">
+            <a:extLst>
+              <a:ext uri="{FF2B5EF4-FFF2-40B4-BE49-F238E27FC236}">
+                <a16:creationId xmlns:a16="http://schemas.microsoft.com/office/drawing/2014/main" id="{66C18E67-C6F4-C57F-50EA-2CB591E5CF67}"/>
+              </a:ext>
+            </a:extLst>
+          </p:cNvPr>
+          <p:cNvSpPr/>
+          <p:nvPr/>
+        </p:nvSpPr>
+        <p:spPr>
+          <a:xfrm>
+            <a:off x="4480558" y="1103812"/>
+            <a:ext cx="2854236" cy="384048"/>
+          </a:xfrm>
+          <a:prstGeom prst="rect">
+            <a:avLst/>
+          </a:prstGeom>
+          <a:noFill/>
+          <a:ln/>
+        </p:spPr>
+        <p:txBody>
+          <a:bodyPr wrap="square" lIns="0" tIns="0" rIns="0" bIns="0" rtlCol="0" anchor="ctr"/>
+          <a:lstStyle/>
+          <a:p>
+            <a:pPr marL="0" indent="0">
+              <a:buNone/>
+            </a:pPr>
+            <a:r>
+              <a:rPr lang="en-US" sz="1100" dirty="0">
+                <a:solidFill>
+                  <a:srgbClr val="02C39A"/>
+                </a:solidFill>
+                <a:latin typeface="Consolas" pitchFamily="34" charset="0"/>
+              </a:rPr>
+              <a:t>medical_image_svd_pca.ipynb</a:t>
+            </a:r>
+            <a:endParaRPr lang="en-US" sz="1100" dirty="0"/>
+          </a:p>
+        </p:txBody>
+      </p:sp>
     </p:spTree>
   </p:cSld>
   <p:clrMapOvr>
@@ -18530,7 +20170,7 @@
           <p:nvPr>
             <p:extLst>
               <p:ext uri="{D42A27DB-BD31-4B8C-83A1-F6EECF244321}">
-                <p14:modId xmlns:p14="http://schemas.microsoft.com/office/powerpoint/2010/main" val="1579011935"/>
+                <p14:modId xmlns:p14="http://schemas.microsoft.com/office/powerpoint/2010/main" val="3069571209"/>
               </p:ext>
             </p:extLst>
           </p:nvPr>
@@ -18651,7 +20291,7 @@
                         <a:buNone/>
                       </a:pPr>
                       <a:r>
-                        <a:rPr lang="en-US" sz="1000" b="1" dirty="0">
+                        <a:rPr lang="en-US" sz="1000" b="1" dirty="0" err="1">
                           <a:solidFill>
                             <a:srgbClr val="FFFFFF"/>
                           </a:solidFill>
@@ -18659,7 +20299,7 @@
                           <a:ea typeface="Calibri" pitchFamily="34" charset="-122"/>
                           <a:cs typeface="Calibri" pitchFamily="34" charset="-120"/>
                         </a:rPr>
-                        <a:t>Ratio</a:t>
+                        <a:t>Compressione</a:t>
                       </a:r>
                       <a:endParaRPr lang="en-US" sz="1000" dirty="0">
                         <a:latin typeface="Calibri" charset="0"/>
@@ -18935,7 +20575,7 @@
                           <a:ea typeface="Calibri" pitchFamily="34" charset="-122"/>
                           <a:cs typeface="Calibri" pitchFamily="34" charset="-120"/>
                         </a:rPr>
-                        <a:t>0.8%</a:t>
+                        <a:t>0.78%</a:t>
                       </a:r>
                       <a:endParaRPr lang="en-US" sz="1000" dirty="0">
                         <a:latin typeface="Calibri" charset="0"/>
@@ -19202,7 +20842,7 @@
                           <a:ea typeface="Calibri" pitchFamily="34" charset="-122"/>
                           <a:cs typeface="Calibri" pitchFamily="34" charset="-120"/>
                         </a:rPr>
-                        <a:t>3.9%</a:t>
+                        <a:t>3.91%</a:t>
                       </a:r>
                       <a:endParaRPr lang="en-US" sz="1000" dirty="0">
                         <a:latin typeface="Calibri" charset="0"/>
@@ -19659,7 +21299,7 @@
                     <a:bodyPr/>
                     <a:lstStyle/>
                     <a:p>
-                      <a:pPr marL="0" indent="0" algn="ctr">
+                      <a:pPr marL="0" indent="0" algn="l">
                         <a:buNone/>
                       </a:pPr>
                       <a:r>
@@ -19727,7 +21367,7 @@
                     <a:bodyPr/>
                     <a:lstStyle/>
                     <a:p>
-                      <a:pPr marL="0" indent="0" algn="ctr">
+                      <a:pPr marL="0" indent="0" algn="l">
                         <a:buNone/>
                       </a:pPr>
                       <a:r>
@@ -19795,7 +21435,7 @@
                     <a:bodyPr/>
                     <a:lstStyle/>
                     <a:p>
-                      <a:pPr marL="0" indent="0" algn="ctr">
+                      <a:pPr marL="0" indent="0" algn="l">
                         <a:buNone/>
                       </a:pPr>
                       <a:r>
@@ -20769,6 +22409,104 @@
           <a:chExt cx="0" cy="0"/>
         </a:xfrm>
       </p:grpSpPr>
+      <p:sp>
+        <p:nvSpPr>
+          <p:cNvPr id="7" name="Rettangolo con angoli arrotondati 6">
+            <a:extLst>
+              <a:ext uri="{FF2B5EF4-FFF2-40B4-BE49-F238E27FC236}">
+                <a16:creationId xmlns:a16="http://schemas.microsoft.com/office/drawing/2014/main" id="{5893F8CA-79D9-A5B7-5D55-BA4005756945}"/>
+              </a:ext>
+            </a:extLst>
+          </p:cNvPr>
+          <p:cNvSpPr/>
+          <p:nvPr/>
+        </p:nvSpPr>
+        <p:spPr>
+          <a:xfrm>
+            <a:off x="5127170" y="3900260"/>
+            <a:ext cx="3095898" cy="1051215"/>
+          </a:xfrm>
+          <a:prstGeom prst="roundRect">
+            <a:avLst/>
+          </a:prstGeom>
+          <a:solidFill>
+            <a:srgbClr val="0D1B4B"/>
+          </a:solidFill>
+        </p:spPr>
+        <p:style>
+          <a:lnRef idx="2">
+            <a:schemeClr val="accent1">
+              <a:shade val="15000"/>
+            </a:schemeClr>
+          </a:lnRef>
+          <a:fillRef idx="1">
+            <a:schemeClr val="accent1"/>
+          </a:fillRef>
+          <a:effectRef idx="0">
+            <a:schemeClr val="accent1"/>
+          </a:effectRef>
+          <a:fontRef idx="minor">
+            <a:schemeClr val="lt1"/>
+          </a:fontRef>
+        </p:style>
+        <p:txBody>
+          <a:bodyPr rtlCol="0" anchor="ctr"/>
+          <a:lstStyle/>
+          <a:p>
+            <a:pPr algn="ctr"/>
+            <a:endParaRPr lang="it-IT"/>
+          </a:p>
+        </p:txBody>
+      </p:sp>
+      <p:sp>
+        <p:nvSpPr>
+          <p:cNvPr id="2" name="Rettangolo con angoli arrotondati 1">
+            <a:extLst>
+              <a:ext uri="{FF2B5EF4-FFF2-40B4-BE49-F238E27FC236}">
+                <a16:creationId xmlns:a16="http://schemas.microsoft.com/office/drawing/2014/main" id="{5893F8CA-79D9-A5B7-5D55-BA4005756945}"/>
+              </a:ext>
+            </a:extLst>
+          </p:cNvPr>
+          <p:cNvSpPr/>
+          <p:nvPr/>
+        </p:nvSpPr>
+        <p:spPr>
+          <a:xfrm>
+            <a:off x="920932" y="3900261"/>
+            <a:ext cx="3095898" cy="1051215"/>
+          </a:xfrm>
+          <a:prstGeom prst="roundRect">
+            <a:avLst/>
+          </a:prstGeom>
+          <a:solidFill>
+            <a:srgbClr val="0D1B4B"/>
+          </a:solidFill>
+        </p:spPr>
+        <p:style>
+          <a:lnRef idx="2">
+            <a:schemeClr val="accent1">
+              <a:shade val="15000"/>
+            </a:schemeClr>
+          </a:lnRef>
+          <a:fillRef idx="1">
+            <a:schemeClr val="accent1"/>
+          </a:fillRef>
+          <a:effectRef idx="0">
+            <a:schemeClr val="accent1"/>
+          </a:effectRef>
+          <a:fontRef idx="minor">
+            <a:schemeClr val="lt1"/>
+          </a:fontRef>
+        </p:style>
+        <p:txBody>
+          <a:bodyPr rtlCol="0" anchor="ctr"/>
+          <a:lstStyle/>
+          <a:p>
+            <a:pPr algn="ctr"/>
+            <a:endParaRPr lang="it-IT"/>
+          </a:p>
+        </p:txBody>
+      </p:sp>
       <p:pic>
         <p:nvPicPr>
           <p:cNvPr id="3" name="Immagine 2">
@@ -20791,8 +22529,8 @@
         </p:blipFill>
         <p:spPr>
           <a:xfrm>
-            <a:off x="552994" y="1040565"/>
-            <a:ext cx="7756435" cy="2859696"/>
+            <a:off x="550454" y="985700"/>
+            <a:ext cx="7829369" cy="2886586"/>
           </a:xfrm>
           <a:prstGeom prst="rect">
             <a:avLst/>
@@ -21000,8 +22738,8 @@
         </p:nvSpPr>
         <p:spPr>
           <a:xfrm>
-            <a:off x="249646" y="3979479"/>
-            <a:ext cx="4322354" cy="769441"/>
+            <a:off x="1059543" y="3971562"/>
+            <a:ext cx="2865846" cy="938719"/>
           </a:xfrm>
           <a:prstGeom prst="rect">
             <a:avLst/>
@@ -21017,7 +22755,7 @@
             <a:r>
               <a:rPr lang="it-IT" sz="1100" b="1" dirty="0">
                 <a:solidFill>
-                  <a:srgbClr val="0D1B4B"/>
+                  <a:schemeClr val="bg1"/>
                 </a:solidFill>
               </a:rPr>
               <a:t>Struttura a basso rango</a:t>
@@ -21025,7 +22763,7 @@
             <a:r>
               <a:rPr lang="it-IT" sz="1100" dirty="0">
                 <a:solidFill>
-                  <a:srgbClr val="0D1B4B"/>
+                  <a:schemeClr val="bg1"/>
                 </a:solidFill>
               </a:rPr>
               <a:t>: Il 90% dell'energia è contenuto in una media di </a:t>
@@ -21033,7 +22771,7 @@
             <a:r>
               <a:rPr lang="it-IT" sz="1100" b="1" dirty="0">
                 <a:solidFill>
-                  <a:srgbClr val="0D1B4B"/>
+                  <a:schemeClr val="bg1"/>
                 </a:solidFill>
               </a:rPr>
               <a:t>1 sola componente </a:t>
@@ -21041,7 +22779,7 @@
             <a:r>
               <a:rPr lang="it-IT" sz="1100" dirty="0">
                 <a:solidFill>
-                  <a:srgbClr val="0D1B4B"/>
+                  <a:schemeClr val="bg1"/>
                 </a:solidFill>
               </a:rPr>
               <a:t>in tutte le classi.</a:t>
@@ -21051,7 +22789,7 @@
             <a:r>
               <a:rPr lang="it-IT" sz="1100" dirty="0">
                 <a:solidFill>
-                  <a:srgbClr val="0D1B4B"/>
+                  <a:schemeClr val="bg1"/>
                 </a:solidFill>
               </a:rPr>
               <a:t>Il </a:t>
@@ -21059,7 +22797,7 @@
             <a:r>
               <a:rPr lang="it-IT" sz="1100" b="1" dirty="0">
                 <a:solidFill>
-                  <a:srgbClr val="0D1B4B"/>
+                  <a:schemeClr val="bg1"/>
                 </a:solidFill>
               </a:rPr>
               <a:t>99% della varianza </a:t>
@@ -21067,7 +22805,7 @@
             <a:r>
               <a:rPr lang="it-IT" sz="1100" dirty="0">
                 <a:solidFill>
-                  <a:srgbClr val="0D1B4B"/>
+                  <a:schemeClr val="bg1"/>
                 </a:solidFill>
               </a:rPr>
               <a:t>richiede appena </a:t>
@@ -21075,7 +22813,7 @@
             <a:r>
               <a:rPr lang="it-IT" sz="1100" b="1" dirty="0">
                 <a:solidFill>
-                  <a:srgbClr val="0D1B4B"/>
+                  <a:schemeClr val="bg1"/>
                 </a:solidFill>
               </a:rPr>
               <a:t>5–20</a:t>
@@ -21083,7 +22821,7 @@
             <a:r>
               <a:rPr lang="it-IT" sz="1100" dirty="0">
                 <a:solidFill>
-                  <a:srgbClr val="0D1B4B"/>
+                  <a:schemeClr val="bg1"/>
                 </a:solidFill>
               </a:rPr>
               <a:t> componenti a seconda della patologia.</a:t>
@@ -21105,8 +22843,8 @@
         </p:nvSpPr>
         <p:spPr>
           <a:xfrm>
-            <a:off x="4679769" y="4000999"/>
-            <a:ext cx="4464231" cy="600164"/>
+            <a:off x="5200649" y="3942670"/>
+            <a:ext cx="2948940" cy="938719"/>
           </a:xfrm>
           <a:prstGeom prst="rect">
             <a:avLst/>
@@ -21122,7 +22860,7 @@
             <a:r>
               <a:rPr lang="it-IT" sz="1100" b="1" dirty="0">
                 <a:solidFill>
-                  <a:srgbClr val="0D1B4B"/>
+                  <a:schemeClr val="bg1"/>
                 </a:solidFill>
               </a:rPr>
               <a:t>L'MSE</a:t>
@@ -21130,7 +22868,7 @@
             <a:r>
               <a:rPr lang="it-IT" sz="1100" dirty="0">
                 <a:solidFill>
-                  <a:srgbClr val="0D1B4B"/>
+                  <a:schemeClr val="bg1"/>
                 </a:solidFill>
               </a:rPr>
               <a:t> logico scende fino al gomito intorno a </a:t>
@@ -21138,7 +22876,7 @@
             <a:r>
               <a:rPr lang="it-IT" sz="1100" b="1" dirty="0">
                 <a:solidFill>
-                  <a:srgbClr val="0D1B4B"/>
+                  <a:schemeClr val="bg1"/>
                 </a:solidFill>
               </a:rPr>
               <a:t>k=20-30</a:t>
@@ -21146,7 +22884,7 @@
             <a:r>
               <a:rPr lang="it-IT" sz="1100" dirty="0">
                 <a:solidFill>
-                  <a:srgbClr val="0D1B4B"/>
+                  <a:schemeClr val="bg1"/>
                 </a:solidFill>
               </a:rPr>
               <a:t>.</a:t>
@@ -21156,7 +22894,7 @@
             <a:r>
               <a:rPr lang="it-IT" sz="1100" dirty="0">
                 <a:solidFill>
-                  <a:srgbClr val="0D1B4B"/>
+                  <a:schemeClr val="bg1"/>
                 </a:solidFill>
               </a:rPr>
               <a:t>Punto Ottimale SVD: </a:t>
@@ -21164,7 +22902,7 @@
             <a:r>
               <a:rPr lang="it-IT" sz="1100" b="1" dirty="0">
                 <a:solidFill>
-                  <a:srgbClr val="0D1B4B"/>
+                  <a:schemeClr val="bg1"/>
                 </a:solidFill>
               </a:rPr>
               <a:t>k=20 </a:t>
@@ -21172,7 +22910,7 @@
             <a:r>
               <a:rPr lang="it-IT" sz="1100" dirty="0">
                 <a:solidFill>
-                  <a:srgbClr val="0D1B4B"/>
+                  <a:schemeClr val="bg1"/>
                 </a:solidFill>
                 <a:sym typeface="Wingdings" panose="05000000000000000000" pitchFamily="2" charset="2"/>
               </a:rPr>
@@ -21181,7 +22919,7 @@
             <a:r>
               <a:rPr lang="it-IT" sz="1100" b="1" dirty="0">
                 <a:solidFill>
-                  <a:srgbClr val="0D1B4B"/>
+                  <a:schemeClr val="bg1"/>
                 </a:solidFill>
               </a:rPr>
               <a:t>15,7% dei dati totali</a:t>
@@ -21189,7 +22927,7 @@
             <a:r>
               <a:rPr lang="it-IT" sz="1100" dirty="0">
                 <a:solidFill>
-                  <a:srgbClr val="0D1B4B"/>
+                  <a:schemeClr val="bg1"/>
                 </a:solidFill>
               </a:rPr>
               <a:t>, mantenendo un PSNR accettabile in diagnostica di &gt; </a:t>
@@ -21197,7 +22935,7 @@
             <a:r>
               <a:rPr lang="it-IT" sz="1100" b="1" dirty="0">
                 <a:solidFill>
-                  <a:srgbClr val="0D1B4B"/>
+                  <a:schemeClr val="bg1"/>
                 </a:solidFill>
               </a:rPr>
               <a:t>32</a:t>
@@ -21205,7 +22943,7 @@
             <a:r>
               <a:rPr lang="it-IT" sz="1100" dirty="0">
                 <a:solidFill>
-                  <a:srgbClr val="0D1B4B"/>
+                  <a:schemeClr val="bg1"/>
                 </a:solidFill>
               </a:rPr>
               <a:t> dB.</a:t>
@@ -21834,4 +23572,26 @@
     </a:ext>
   </a:extLst>
 </a:theme>
+</file>
+
+<file path=ppt/webextensions/taskpanes.xml><?xml version="1.0" encoding="utf-8"?>
+<wetp:taskpanes xmlns:wetp="http://schemas.microsoft.com/office/webextensions/taskpanes/2010/11">
+  <wetp:taskpane dockstate="right" visibility="0" width="350" row="2">
+    <wetp:webextensionref xmlns:r="http://schemas.openxmlformats.org/officeDocument/2006/relationships" r:id="rId1"/>
+  </wetp:taskpane>
+</wetp:taskpanes>
+</file>
+
+<file path=ppt/webextensions/webextension1.xml><?xml version="1.0" encoding="utf-8"?>
+<we:webextension xmlns:we="http://schemas.microsoft.com/office/webextensions/webextension/2010/11" id="{FD1CEE74-A20D-41C5-BA8D-EB25E6DD089B}">
+  <we:reference id="WA200010001" version="1.0.0.1" store="Omex" storeType="OMEX"/>
+  <we:alternateReferences>
+    <we:reference id="WA200010001" version="1.0.0.1" store="WA200010001" storeType="OMEX"/>
+  </we:alternateReferences>
+  <we:properties>
+    <we:property name="claude.fileId" value="&quot;c3153610-0a4d-4ee1-82c9-fb5dcfc82a72&quot;"/>
+  </we:properties>
+  <we:bindings/>
+  <we:snapshot xmlns:r="http://schemas.openxmlformats.org/officeDocument/2006/relationships"/>
+</we:webextension>
 </file>